--- a/presentaciones/video_avance_2/AFG1_Video2_Presentacion_UC.pptx
+++ b/presentaciones/video_avance_2/AFG1_Video2_Presentacion_UC.pptx
@@ -18,6 +18,7 @@
     <p:sldId id="266" r:id="rId20"/>
     <p:sldId id="267" r:id="rId21"/>
     <p:sldId id="268" r:id="rId22"/>
+    <p:sldId id="269" r:id="rId23"/>
     <p:sldId id="260" r:id="rId8"/>
   </p:sldIdLst>
   <p:sldSz cx="9144000" cy="5143500" type="screen16x9"/>
@@ -3944,7 +3945,7 @@
                 </a:solidFill>
                 <a:latin typeface="Calibri"/>
               </a:rPr>
-              <a:t>Qué se sabe, con qué métodos se ha hecho y qué brecha abordamos para estimar PM₂.₅ · PM₁₀ · NO₂ · O₃ · SO₂ · CO en todo Chile, validado contra la red SINCA</a:t>
+              <a:t>El problema ordenado, la brecha de monitoreo cuantificada con la red SINCA y lo que dicen la literatura internacional y chilena para estimar PM₂.₅ · PM₁₀ · NO₂ · O₃ · SO₂ · CO</a:t>
             </a:r>
             <a:endParaRPr lang="es-ES" sz="1800" dirty="0"/>
           </a:p>
@@ -3980,7 +3981,7 @@
                 </a:solidFill>
                 <a:latin typeface="Calibri"/>
               </a:rPr>
-              <a:t>Revisión de literatura: estimar la calidad del aire desde el espacio</a:t>
+              <a:t>Estimación multi-contaminante de la calidad del aire en Chile</a:t>
             </a:r>
             <a:endParaRPr lang="es-CL" sz="4000" dirty="0">
               <a:solidFill>
@@ -4014,13 +4015,13 @@
           <a:p>
             <a:pPr algn="l"/>
             <a:r>
-              <a:rPr sz="1050" b="1" i="0">
+              <a:rPr sz="950" b="1" i="0">
                 <a:solidFill>
                   <a:srgbClr val="3366CC"/>
                 </a:solidFill>
                 <a:latin typeface="Calibri"/>
               </a:rPr>
-              <a:t>ACTIVIDAD FINAL DE GRADUACIÓN 1  ·  MDS3050  ·  VIDEO DE AVANCE N.º 2: REVISIÓN DE LITERATURA</a:t>
+              <a:t>ACTIVIDAD FINAL DE GRADUACIÓN 1  ·  MDS3050  ·  VIDEO DE AVANCE N.º 2: DEFINICIÓN DEL PROBLEMA + TRABAJOS RELACIONADOS</a:t>
             </a:r>
           </a:p>
         </p:txBody>
@@ -4388,6 +4389,495 @@
     <p:extLst>
       <p:ext uri="{BB962C8B-B14F-4D97-AF65-F5344CB8AC3E}">
         <p14:creationId xmlns:p14="http://schemas.microsoft.com/office/powerpoint/2010/main" val="4120695355"/>
+      </p:ext>
+    </p:extLst>
+  </p:cSld>
+  <p:clrMapOvr>
+    <a:masterClrMapping/>
+  </p:clrMapOvr>
+</p:sld>
+</file>
+
+<file path=ppt/slides/slide10.xml><?xml version="1.0" encoding="utf-8"?>
+<p:sld xmlns:a="http://schemas.openxmlformats.org/drawingml/2006/main" xmlns:r="http://schemas.openxmlformats.org/officeDocument/2006/relationships" xmlns:p="http://schemas.openxmlformats.org/presentationml/2006/main">
+  <p:cSld>
+    <p:spTree>
+      <p:nvGrpSpPr>
+        <p:cNvPr id="1" name=""/>
+        <p:cNvGrpSpPr/>
+        <p:nvPr/>
+      </p:nvGrpSpPr>
+      <p:grpSpPr>
+        <a:xfrm>
+          <a:off x="0" y="0"/>
+          <a:ext cx="0" cy="0"/>
+          <a:chOff x="0" y="0"/>
+          <a:chExt cx="0" cy="0"/>
+        </a:xfrm>
+      </p:grpSpPr>
+      <p:sp>
+        <p:nvSpPr>
+          <p:cNvPr id="2" name="Título 1"/>
+          <p:cNvSpPr>
+            <a:spLocks noGrp="1"/>
+          </p:cNvSpPr>
+          <p:nvPr>
+            <p:ph type="title"/>
+          </p:nvPr>
+        </p:nvSpPr>
+        <p:spPr/>
+        <p:txBody>
+          <a:bodyPr/>
+          <a:lstStyle/>
+          <a:p>
+            <a:endParaRPr lang="es-ES" dirty="0"/>
+          </a:p>
+        </p:txBody>
+      </p:sp>
+      <p:sp>
+        <p:nvSpPr>
+          <p:cNvPr id="3" name="Marcador de contenido 2"/>
+          <p:cNvSpPr>
+            <a:spLocks noGrp="1"/>
+          </p:cNvSpPr>
+          <p:nvPr>
+            <p:ph sz="half" idx="1"/>
+          </p:nvPr>
+        </p:nvSpPr>
+        <p:spPr/>
+        <p:txBody>
+          <a:bodyPr/>
+          <a:lstStyle/>
+          <a:p>
+            <a:endParaRPr lang="es-ES" dirty="0"/>
+          </a:p>
+        </p:txBody>
+      </p:sp>
+      <p:sp>
+        <p:nvSpPr>
+          <p:cNvPr id="4" name="Marcador de contenido 3"/>
+          <p:cNvSpPr>
+            <a:spLocks noGrp="1"/>
+          </p:cNvSpPr>
+          <p:nvPr>
+            <p:ph sz="half" idx="2"/>
+          </p:nvPr>
+        </p:nvSpPr>
+        <p:spPr/>
+        <p:txBody>
+          <a:bodyPr/>
+          <a:lstStyle/>
+          <a:p>
+            <a:endParaRPr lang="es-ES" dirty="0"/>
+          </a:p>
+        </p:txBody>
+      </p:sp>
+    </p:spTree>
+    <p:extLst>
+      <p:ext uri="{BB962C8B-B14F-4D97-AF65-F5344CB8AC3E}">
+        <p14:creationId xmlns:p14="http://schemas.microsoft.com/office/powerpoint/2010/main" val="3227572768"/>
+      </p:ext>
+    </p:extLst>
+  </p:cSld>
+  <p:clrMapOvr>
+    <a:masterClrMapping/>
+  </p:clrMapOvr>
+</p:sld>
+</file>
+
+<file path=ppt/slides/slide11.xml><?xml version="1.0" encoding="utf-8"?>
+<p:sld xmlns:a="http://schemas.openxmlformats.org/drawingml/2006/main" xmlns:r="http://schemas.openxmlformats.org/officeDocument/2006/relationships" xmlns:p="http://schemas.openxmlformats.org/presentationml/2006/main">
+  <p:cSld>
+    <p:spTree>
+      <p:nvGrpSpPr>
+        <p:cNvPr id="1" name=""/>
+        <p:cNvGrpSpPr/>
+        <p:nvPr/>
+      </p:nvGrpSpPr>
+      <p:grpSpPr>
+        <a:xfrm>
+          <a:off x="0" y="0"/>
+          <a:ext cx="0" cy="0"/>
+          <a:chOff x="0" y="0"/>
+          <a:chExt cx="0" cy="0"/>
+        </a:xfrm>
+      </p:grpSpPr>
+      <p:sp>
+        <p:nvSpPr>
+          <p:cNvPr id="2" name="TextBox 1"/>
+          <p:cNvSpPr txBox="1"/>
+          <p:nvPr/>
+        </p:nvSpPr>
+        <p:spPr>
+          <a:xfrm>
+            <a:off x="502920" y="932688"/>
+            <a:ext cx="5394960" cy="685800"/>
+          </a:xfrm>
+          <a:prstGeom prst="rect">
+            <a:avLst/>
+          </a:prstGeom>
+          <a:noFill/>
+        </p:spPr>
+        <p:txBody>
+          <a:bodyPr wrap="square" anchor="t" lIns="0" rIns="0" tIns="0" bIns="0">
+            <a:spAutoFit/>
+          </a:bodyPr>
+          <a:lstStyle/>
+          <a:p>
+            <a:pPr algn="l"/>
+            <a:r>
+              <a:rPr sz="1900" b="1" i="0">
+                <a:solidFill>
+                  <a:srgbClr val="FFFFFF"/>
+                </a:solidFill>
+                <a:latin typeface="Calibri"/>
+              </a:rPr>
+              <a:t>Todo el detalle vive
+en el repositorio</a:t>
+            </a:r>
+          </a:p>
+        </p:txBody>
+      </p:sp>
+      <p:sp>
+        <p:nvSpPr>
+          <p:cNvPr id="3" name="TextBox 2"/>
+          <p:cNvSpPr txBox="1"/>
+          <p:nvPr/>
+        </p:nvSpPr>
+        <p:spPr>
+          <a:xfrm>
+            <a:off x="502920" y="1783080"/>
+            <a:ext cx="5394960" cy="1554480"/>
+          </a:xfrm>
+          <a:prstGeom prst="rect">
+            <a:avLst/>
+          </a:prstGeom>
+          <a:noFill/>
+        </p:spPr>
+        <p:txBody>
+          <a:bodyPr wrap="square" lIns="0" rIns="0" tIns="0" bIns="0">
+            <a:spAutoFit/>
+          </a:bodyPr>
+          <a:lstStyle/>
+          <a:p>
+            <a:pPr>
+              <a:spcAft>
+                <a:spcPts val="500"/>
+              </a:spcAft>
+            </a:pPr>
+            <a:r>
+              <a:rPr sz="950">
+                <a:solidFill>
+                  <a:srgbClr val="CDE2FB"/>
+                </a:solidFill>
+                <a:latin typeface="Calibri"/>
+              </a:rPr>
+              <a:t>• Bibliografía APA con cada DOI verificado</a:t>
+            </a:r>
+          </a:p>
+          <a:p>
+            <a:pPr>
+              <a:spcAft>
+                <a:spcPts val="500"/>
+              </a:spcAft>
+            </a:pPr>
+            <a:r>
+              <a:rPr sz="950">
+                <a:solidFill>
+                  <a:srgbClr val="CDE2FB"/>
+                </a:solidFill>
+                <a:latin typeface="Calibri"/>
+              </a:rPr>
+              <a:t>• Datos y scripts de la brecha SINCA (mapa y coberturas)</a:t>
+            </a:r>
+          </a:p>
+          <a:p>
+            <a:pPr>
+              <a:spcAft>
+                <a:spcPts val="500"/>
+              </a:spcAft>
+            </a:pPr>
+            <a:r>
+              <a:rPr sz="950">
+                <a:solidFill>
+                  <a:srgbClr val="CDE2FB"/>
+                </a:solidFill>
+                <a:latin typeface="Calibri"/>
+              </a:rPr>
+              <a:t>• Matriz contaminante × método y líneas base</a:t>
+            </a:r>
+          </a:p>
+          <a:p>
+            <a:pPr>
+              <a:spcAft>
+                <a:spcPts val="500"/>
+              </a:spcAft>
+            </a:pPr>
+            <a:r>
+              <a:rPr sz="950">
+                <a:solidFill>
+                  <a:srgbClr val="CDE2FB"/>
+                </a:solidFill>
+                <a:latin typeface="Calibri"/>
+              </a:rPr>
+              <a:t>• Pipeline reproducible de descarga y procesamiento</a:t>
+            </a:r>
+          </a:p>
+        </p:txBody>
+      </p:sp>
+      <p:sp>
+        <p:nvSpPr>
+          <p:cNvPr id="4" name="Rounded Rectangle 3"/>
+          <p:cNvSpPr/>
+          <p:nvPr/>
+        </p:nvSpPr>
+        <p:spPr>
+          <a:xfrm>
+            <a:off x="502920" y="3456432"/>
+            <a:ext cx="5394960" cy="512064"/>
+          </a:xfrm>
+          <a:prstGeom prst="roundRect">
+            <a:avLst>
+              <a:gd name="adj" fmla="val 10000"/>
+            </a:avLst>
+          </a:prstGeom>
+          <a:solidFill>
+            <a:srgbClr val="113E8F"/>
+          </a:solidFill>
+          <a:ln>
+            <a:noFill/>
+          </a:ln>
+          <a:effectLst/>
+        </p:spPr>
+        <p:style>
+          <a:lnRef idx="1">
+            <a:schemeClr val="accent1"/>
+          </a:lnRef>
+          <a:fillRef idx="3">
+            <a:schemeClr val="accent1"/>
+          </a:fillRef>
+          <a:effectRef idx="2">
+            <a:schemeClr val="accent1"/>
+          </a:effectRef>
+          <a:fontRef idx="minor">
+            <a:schemeClr val="lt1"/>
+          </a:fontRef>
+        </p:style>
+        <p:txBody>
+          <a:bodyPr rtlCol="0" anchor="ctr"/>
+          <a:lstStyle/>
+          <a:p>
+            <a:pPr algn="ctr"/>
+          </a:p>
+        </p:txBody>
+      </p:sp>
+      <p:pic>
+        <p:nvPicPr>
+          <p:cNvPr id="5" name="Picture 4" descr="github_w.png"/>
+          <p:cNvPicPr>
+            <a:picLocks noChangeAspect="1"/>
+          </p:cNvPicPr>
+          <p:nvPr/>
+        </p:nvPicPr>
+        <p:blipFill>
+          <a:blip r:embed="rId2"/>
+          <a:stretch>
+            <a:fillRect/>
+          </a:stretch>
+        </p:blipFill>
+        <p:spPr>
+          <a:xfrm>
+            <a:off x="658368" y="3584448"/>
+            <a:ext cx="256032" cy="256032"/>
+          </a:xfrm>
+          <a:prstGeom prst="rect">
+            <a:avLst/>
+          </a:prstGeom>
+        </p:spPr>
+      </p:pic>
+      <p:sp>
+        <p:nvSpPr>
+          <p:cNvPr id="6" name="TextBox 5"/>
+          <p:cNvSpPr txBox="1"/>
+          <p:nvPr/>
+        </p:nvSpPr>
+        <p:spPr>
+          <a:xfrm>
+            <a:off x="1005840" y="3456432"/>
+            <a:ext cx="4846320" cy="512064"/>
+          </a:xfrm>
+          <a:prstGeom prst="rect">
+            <a:avLst/>
+          </a:prstGeom>
+          <a:noFill/>
+        </p:spPr>
+        <p:txBody>
+          <a:bodyPr wrap="square" anchor="ctr" lIns="0" rIns="0" tIns="0" bIns="0">
+            <a:spAutoFit/>
+          </a:bodyPr>
+          <a:lstStyle/>
+          <a:p>
+            <a:pPr algn="l"/>
+            <a:r>
+              <a:rPr sz="1150" b="1" i="0">
+                <a:solidFill>
+                  <a:srgbClr val="FFFFFF"/>
+                </a:solidFill>
+                <a:latin typeface="Calibri"/>
+              </a:rPr>
+              <a:t>github.com/AmaruSimonAgueroJimenez/Air-Pollution</a:t>
+            </a:r>
+          </a:p>
+        </p:txBody>
+      </p:sp>
+      <p:sp>
+        <p:nvSpPr>
+          <p:cNvPr id="7" name="Rounded Rectangle 6"/>
+          <p:cNvSpPr/>
+          <p:nvPr/>
+        </p:nvSpPr>
+        <p:spPr>
+          <a:xfrm>
+            <a:off x="6355080" y="932688"/>
+            <a:ext cx="2331720" cy="3035808"/>
+          </a:xfrm>
+          <a:prstGeom prst="roundRect">
+            <a:avLst>
+              <a:gd name="adj" fmla="val 6000"/>
+            </a:avLst>
+          </a:prstGeom>
+          <a:solidFill>
+            <a:srgbClr val="FFFFFF"/>
+          </a:solidFill>
+          <a:ln>
+            <a:noFill/>
+          </a:ln>
+          <a:effectLst/>
+        </p:spPr>
+        <p:style>
+          <a:lnRef idx="1">
+            <a:schemeClr val="accent1"/>
+          </a:lnRef>
+          <a:fillRef idx="3">
+            <a:schemeClr val="accent1"/>
+          </a:fillRef>
+          <a:effectRef idx="2">
+            <a:schemeClr val="accent1"/>
+          </a:effectRef>
+          <a:fontRef idx="minor">
+            <a:schemeClr val="lt1"/>
+          </a:fontRef>
+        </p:style>
+        <p:txBody>
+          <a:bodyPr rtlCol="0" anchor="ctr"/>
+          <a:lstStyle/>
+          <a:p>
+            <a:pPr algn="ctr"/>
+          </a:p>
+        </p:txBody>
+      </p:sp>
+      <p:pic>
+        <p:nvPicPr>
+          <p:cNvPr id="8" name="Picture 7" descr="qr_repo.png"/>
+          <p:cNvPicPr>
+            <a:picLocks noChangeAspect="1"/>
+          </p:cNvPicPr>
+          <p:nvPr/>
+        </p:nvPicPr>
+        <p:blipFill>
+          <a:blip r:embed="rId3"/>
+          <a:stretch>
+            <a:fillRect/>
+          </a:stretch>
+        </p:blipFill>
+        <p:spPr>
+          <a:xfrm>
+            <a:off x="6556248" y="1133856"/>
+            <a:ext cx="1929384" cy="1929384"/>
+          </a:xfrm>
+          <a:prstGeom prst="rect">
+            <a:avLst/>
+          </a:prstGeom>
+        </p:spPr>
+      </p:pic>
+      <p:sp>
+        <p:nvSpPr>
+          <p:cNvPr id="9" name="TextBox 8"/>
+          <p:cNvSpPr txBox="1"/>
+          <p:nvPr/>
+        </p:nvSpPr>
+        <p:spPr>
+          <a:xfrm>
+            <a:off x="6446520" y="3127248"/>
+            <a:ext cx="2148840" cy="731520"/>
+          </a:xfrm>
+          <a:prstGeom prst="rect">
+            <a:avLst/>
+          </a:prstGeom>
+          <a:noFill/>
+        </p:spPr>
+        <p:txBody>
+          <a:bodyPr wrap="square" anchor="t" lIns="0" rIns="0" tIns="0" bIns="0">
+            <a:spAutoFit/>
+          </a:bodyPr>
+          <a:lstStyle/>
+          <a:p>
+            <a:pPr algn="ctr">
+              <a:lnSpc>
+                <a:spcPct val="95000"/>
+              </a:lnSpc>
+            </a:pPr>
+            <a:r>
+              <a:rPr sz="850" b="0" i="0">
+                <a:solidFill>
+                  <a:srgbClr val="17375D"/>
+                </a:solidFill>
+                <a:latin typeface="Calibri"/>
+              </a:rPr>
+              <a:t>Escanea para ver la bibliografía, el pipeline y la documentación</a:t>
+            </a:r>
+          </a:p>
+        </p:txBody>
+      </p:sp>
+      <p:sp>
+        <p:nvSpPr>
+          <p:cNvPr id="10" name="TextBox 9"/>
+          <p:cNvSpPr txBox="1"/>
+          <p:nvPr/>
+        </p:nvSpPr>
+        <p:spPr>
+          <a:xfrm>
+            <a:off x="502920" y="4389120"/>
+            <a:ext cx="8138160" cy="274320"/>
+          </a:xfrm>
+          <a:prstGeom prst="rect">
+            <a:avLst/>
+          </a:prstGeom>
+          <a:noFill/>
+        </p:spPr>
+        <p:txBody>
+          <a:bodyPr wrap="square" anchor="t" lIns="0" rIns="0" tIns="0" bIns="0">
+            <a:spAutoFit/>
+          </a:bodyPr>
+          <a:lstStyle/>
+          <a:p>
+            <a:pPr algn="l"/>
+            <a:r>
+              <a:rPr sz="1000" b="0" i="0">
+                <a:solidFill>
+                  <a:srgbClr val="CDE2FB"/>
+                </a:solidFill>
+                <a:latin typeface="Calibri"/>
+              </a:rPr>
+              <a:t>Equipo 2: José J. Romero · Roberto I. Ávila · Amaru S. Agüero · Esteban A. González          ¡Gracias!</a:t>
+            </a:r>
+          </a:p>
+        </p:txBody>
+      </p:sp>
+    </p:spTree>
+    <p:extLst>
+      <p:ext uri="{BB962C8B-B14F-4D97-AF65-F5344CB8AC3E}">
+        <p14:creationId xmlns:p14="http://schemas.microsoft.com/office/powerpoint/2010/main" val="785384284"/>
       </p:ext>
     </p:extLst>
   </p:cSld>
@@ -4430,13 +4920,13 @@
           <a:lstStyle/>
           <a:p>
             <a:r>
-              <a:rPr sz="2000" b="1">
+              <a:rPr sz="1900" b="1">
                 <a:solidFill>
                   <a:srgbClr val="FFFFFF"/>
                 </a:solidFill>
                 <a:latin typeface="Calibri"/>
               </a:rPr>
-              <a:t>Cómo hicimos la revisión: método antes que lista de papers</a:t>
+              <a:t>El problema: de la contaminación a la propuesta</a:t>
             </a:r>
             <a:endParaRPr lang="es-ES" dirty="0"/>
           </a:p>
@@ -4450,12 +4940,12 @@
         </p:nvSpPr>
         <p:spPr>
           <a:xfrm>
-            <a:off x="457200" y="1115568"/>
-            <a:ext cx="2011680" cy="2231136"/>
+            <a:off x="457200" y="1188720"/>
+            <a:ext cx="1225296" cy="713232"/>
           </a:xfrm>
           <a:prstGeom prst="roundRect">
             <a:avLst>
-              <a:gd name="adj" fmla="val 10000"/>
+              <a:gd name="adj" fmla="val 14000"/>
             </a:avLst>
           </a:prstGeom>
           <a:solidFill>
@@ -4490,20 +4980,96 @@
       </p:sp>
       <p:sp>
         <p:nvSpPr>
-          <p:cNvPr id="4" name="Oval 3"/>
+          <p:cNvPr id="4" name="TextBox 3"/>
+          <p:cNvSpPr txBox="1"/>
+          <p:nvPr/>
+        </p:nvSpPr>
+        <p:spPr>
+          <a:xfrm>
+            <a:off x="512064" y="1188720"/>
+            <a:ext cx="1115568" cy="713232"/>
+          </a:xfrm>
+          <a:prstGeom prst="rect">
+            <a:avLst/>
+          </a:prstGeom>
+          <a:noFill/>
+        </p:spPr>
+        <p:txBody>
+          <a:bodyPr wrap="square" anchor="ctr" lIns="0" rIns="0" tIns="0" bIns="0">
+            <a:spAutoFit/>
+          </a:bodyPr>
+          <a:lstStyle/>
+          <a:p>
+            <a:pPr algn="ctr">
+              <a:lnSpc>
+                <a:spcPct val="90000"/>
+              </a:lnSpc>
+            </a:pPr>
+            <a:r>
+              <a:rPr sz="819" b="1" i="0">
+                <a:solidFill>
+                  <a:srgbClr val="1F497D"/>
+                </a:solidFill>
+                <a:latin typeface="Calibri"/>
+              </a:rPr>
+              <a:t>Contaminación atmosférica</a:t>
+            </a:r>
+          </a:p>
+        </p:txBody>
+      </p:sp>
+      <p:sp>
+        <p:nvSpPr>
+          <p:cNvPr id="5" name="TextBox 4"/>
+          <p:cNvSpPr txBox="1"/>
+          <p:nvPr/>
+        </p:nvSpPr>
+        <p:spPr>
+          <a:xfrm>
+            <a:off x="1668780" y="1188720"/>
+            <a:ext cx="202996" cy="713232"/>
+          </a:xfrm>
+          <a:prstGeom prst="rect">
+            <a:avLst/>
+          </a:prstGeom>
+          <a:noFill/>
+        </p:spPr>
+        <p:txBody>
+          <a:bodyPr wrap="square" anchor="ctr" lIns="0" rIns="0" tIns="0" bIns="0">
+            <a:spAutoFit/>
+          </a:bodyPr>
+          <a:lstStyle/>
+          <a:p>
+            <a:pPr algn="ctr"/>
+            <a:r>
+              <a:rPr sz="1200" b="1" i="0">
+                <a:solidFill>
+                  <a:srgbClr val="3366CC"/>
+                </a:solidFill>
+                <a:latin typeface="Calibri"/>
+              </a:rPr>
+              <a:t>→</a:t>
+            </a:r>
+          </a:p>
+        </p:txBody>
+      </p:sp>
+      <p:sp>
+        <p:nvSpPr>
+          <p:cNvPr id="6" name="Rounded Rectangle 5"/>
           <p:cNvSpPr/>
           <p:nvPr/>
         </p:nvSpPr>
         <p:spPr>
           <a:xfrm>
-            <a:off x="585216" y="1243584"/>
-            <a:ext cx="384048" cy="384048"/>
-          </a:xfrm>
-          <a:prstGeom prst="ellipse">
-            <a:avLst/>
+            <a:off x="1858060" y="1188720"/>
+            <a:ext cx="1225296" cy="713232"/>
+          </a:xfrm>
+          <a:prstGeom prst="roundRect">
+            <a:avLst>
+              <a:gd name="adj" fmla="val 14000"/>
+            </a:avLst>
           </a:prstGeom>
           <a:solidFill>
-            <a:srgbClr val="1F497D"/>
+            <a:srgbClr val="F2F6FC"/>
           </a:solidFill>
           <a:ln>
             <a:noFill/>
@@ -4532,40 +5098,16 @@
           </a:p>
         </p:txBody>
       </p:sp>
-      <p:pic>
-        <p:nvPicPr>
-          <p:cNvPr id="5" name="Picture 4" descr="explore_w.png"/>
-          <p:cNvPicPr>
-            <a:picLocks noChangeAspect="1"/>
-          </p:cNvPicPr>
-          <p:nvPr/>
-        </p:nvPicPr>
-        <p:blipFill>
-          <a:blip r:embed="rId2"/>
-          <a:stretch>
-            <a:fillRect/>
-          </a:stretch>
-        </p:blipFill>
-        <p:spPr>
-          <a:xfrm>
-            <a:off x="677387" y="1335755"/>
-            <a:ext cx="199704" cy="199704"/>
-          </a:xfrm>
-          <a:prstGeom prst="rect">
-            <a:avLst/>
-          </a:prstGeom>
-        </p:spPr>
-      </p:pic>
-      <p:sp>
-        <p:nvSpPr>
-          <p:cNvPr id="6" name="TextBox 5"/>
+      <p:sp>
+        <p:nvSpPr>
+          <p:cNvPr id="7" name="TextBox 6"/>
           <p:cNvSpPr txBox="1"/>
           <p:nvPr/>
         </p:nvSpPr>
         <p:spPr>
           <a:xfrm>
-            <a:off x="1042416" y="1225296"/>
-            <a:ext cx="1371600" cy="457200"/>
+            <a:off x="1912924" y="1188720"/>
+            <a:ext cx="1115568" cy="713232"/>
           </a:xfrm>
           <a:prstGeom prst="rect">
             <a:avLst/>
@@ -4578,33 +5120,33 @@
           </a:bodyPr>
           <a:lstStyle/>
           <a:p>
-            <a:pPr algn="l">
+            <a:pPr algn="ctr">
               <a:lnSpc>
                 <a:spcPct val="90000"/>
               </a:lnSpc>
             </a:pPr>
             <a:r>
-              <a:rPr sz="950" b="1" i="0">
+              <a:rPr sz="819" b="1" i="0">
                 <a:solidFill>
                   <a:srgbClr val="1F497D"/>
                 </a:solidFill>
                 <a:latin typeface="Calibri"/>
               </a:rPr>
-              <a:t>Búsqueda por palabras clave</a:t>
-            </a:r>
-          </a:p>
-        </p:txBody>
-      </p:sp>
-      <p:sp>
-        <p:nvSpPr>
-          <p:cNvPr id="7" name="TextBox 6"/>
+              <a:t>Necesidad de conocer la exposición</a:t>
+            </a:r>
+          </a:p>
+        </p:txBody>
+      </p:sp>
+      <p:sp>
+        <p:nvSpPr>
+          <p:cNvPr id="8" name="TextBox 7"/>
           <p:cNvSpPr txBox="1"/>
           <p:nvPr/>
         </p:nvSpPr>
         <p:spPr>
           <a:xfrm>
-            <a:off x="603504" y="1847088"/>
-            <a:ext cx="1737360" cy="1417320"/>
+            <a:off x="3069640" y="1188720"/>
+            <a:ext cx="202996" cy="713232"/>
           </a:xfrm>
           <a:prstGeom prst="rect">
             <a:avLst/>
@@ -4612,42 +5154,38 @@
           <a:noFill/>
         </p:spPr>
         <p:txBody>
-          <a:bodyPr wrap="square" anchor="t" lIns="0" rIns="0" tIns="0" bIns="0">
+          <a:bodyPr wrap="square" anchor="ctr" lIns="0" rIns="0" tIns="0" bIns="0">
             <a:spAutoFit/>
           </a:bodyPr>
           <a:lstStyle/>
           <a:p>
-            <a:pPr algn="l">
-              <a:lnSpc>
-                <a:spcPct val="98000"/>
-              </a:lnSpc>
-            </a:pPr>
-            <a:r>
-              <a:rPr sz="790" b="0" i="0">
-                <a:solidFill>
-                  <a:srgbClr val="52514E"/>
+            <a:pPr algn="ctr"/>
+            <a:r>
+              <a:rPr sz="1200" b="1" i="0">
+                <a:solidFill>
+                  <a:srgbClr val="3366CC"/>
                 </a:solidFill>
                 <a:latin typeface="Calibri"/>
               </a:rPr>
-              <a:t>Google Scholar, Scopus y Web of Science; términos en inglés por contaminante: satellite, surface estimation, LUR, machine learning</a:t>
-            </a:r>
-          </a:p>
-        </p:txBody>
-      </p:sp>
-      <p:sp>
-        <p:nvSpPr>
-          <p:cNvPr id="8" name="Rounded Rectangle 7"/>
+              <a:t>→</a:t>
+            </a:r>
+          </a:p>
+        </p:txBody>
+      </p:sp>
+      <p:sp>
+        <p:nvSpPr>
+          <p:cNvPr id="9" name="Rounded Rectangle 8"/>
           <p:cNvSpPr/>
           <p:nvPr/>
         </p:nvSpPr>
         <p:spPr>
           <a:xfrm>
-            <a:off x="2578608" y="1115568"/>
-            <a:ext cx="2011680" cy="2231136"/>
+            <a:off x="3258921" y="1188720"/>
+            <a:ext cx="1225296" cy="713232"/>
           </a:xfrm>
           <a:prstGeom prst="roundRect">
             <a:avLst>
-              <a:gd name="adj" fmla="val 10000"/>
+              <a:gd name="adj" fmla="val 14000"/>
             </a:avLst>
           </a:prstGeom>
           <a:solidFill>
@@ -4682,20 +5220,96 @@
       </p:sp>
       <p:sp>
         <p:nvSpPr>
-          <p:cNvPr id="9" name="Oval 8"/>
+          <p:cNvPr id="10" name="TextBox 9"/>
+          <p:cNvSpPr txBox="1"/>
+          <p:nvPr/>
+        </p:nvSpPr>
+        <p:spPr>
+          <a:xfrm>
+            <a:off x="3313785" y="1188720"/>
+            <a:ext cx="1115568" cy="713232"/>
+          </a:xfrm>
+          <a:prstGeom prst="rect">
+            <a:avLst/>
+          </a:prstGeom>
+          <a:noFill/>
+        </p:spPr>
+        <p:txBody>
+          <a:bodyPr wrap="square" anchor="ctr" lIns="0" rIns="0" tIns="0" bIns="0">
+            <a:spAutoFit/>
+          </a:bodyPr>
+          <a:lstStyle/>
+          <a:p>
+            <a:pPr algn="ctr">
+              <a:lnSpc>
+                <a:spcPct val="90000"/>
+              </a:lnSpc>
+            </a:pPr>
+            <a:r>
+              <a:rPr sz="819" b="1" i="0">
+                <a:solidFill>
+                  <a:srgbClr val="1F497D"/>
+                </a:solidFill>
+                <a:latin typeface="Calibri"/>
+              </a:rPr>
+              <a:t>Red de monitoreo SINCA</a:t>
+            </a:r>
+          </a:p>
+        </p:txBody>
+      </p:sp>
+      <p:sp>
+        <p:nvSpPr>
+          <p:cNvPr id="11" name="TextBox 10"/>
+          <p:cNvSpPr txBox="1"/>
+          <p:nvPr/>
+        </p:nvSpPr>
+        <p:spPr>
+          <a:xfrm>
+            <a:off x="4470501" y="1188720"/>
+            <a:ext cx="202996" cy="713232"/>
+          </a:xfrm>
+          <a:prstGeom prst="rect">
+            <a:avLst/>
+          </a:prstGeom>
+          <a:noFill/>
+        </p:spPr>
+        <p:txBody>
+          <a:bodyPr wrap="square" anchor="ctr" lIns="0" rIns="0" tIns="0" bIns="0">
+            <a:spAutoFit/>
+          </a:bodyPr>
+          <a:lstStyle/>
+          <a:p>
+            <a:pPr algn="ctr"/>
+            <a:r>
+              <a:rPr sz="1200" b="1" i="0">
+                <a:solidFill>
+                  <a:srgbClr val="3366CC"/>
+                </a:solidFill>
+                <a:latin typeface="Calibri"/>
+              </a:rPr>
+              <a:t>→</a:t>
+            </a:r>
+          </a:p>
+        </p:txBody>
+      </p:sp>
+      <p:sp>
+        <p:nvSpPr>
+          <p:cNvPr id="12" name="Rounded Rectangle 11"/>
           <p:cNvSpPr/>
           <p:nvPr/>
         </p:nvSpPr>
         <p:spPr>
           <a:xfrm>
-            <a:off x="2706624" y="1243584"/>
-            <a:ext cx="384048" cy="384048"/>
-          </a:xfrm>
-          <a:prstGeom prst="ellipse">
-            <a:avLst/>
+            <a:off x="4659782" y="1188720"/>
+            <a:ext cx="1225296" cy="713232"/>
+          </a:xfrm>
+          <a:prstGeom prst="roundRect">
+            <a:avLst>
+              <a:gd name="adj" fmla="val 14000"/>
+            </a:avLst>
           </a:prstGeom>
           <a:solidFill>
-            <a:srgbClr val="3366CC"/>
+            <a:srgbClr val="F2F6FC"/>
           </a:solidFill>
           <a:ln>
             <a:noFill/>
@@ -4724,40 +5338,16 @@
           </a:p>
         </p:txBody>
       </p:sp>
-      <p:pic>
-        <p:nvPicPr>
-          <p:cNvPr id="10" name="Picture 9" descr="checklist_w.png"/>
-          <p:cNvPicPr>
-            <a:picLocks noChangeAspect="1"/>
-          </p:cNvPicPr>
-          <p:nvPr/>
-        </p:nvPicPr>
-        <p:blipFill>
-          <a:blip r:embed="rId3"/>
-          <a:stretch>
-            <a:fillRect/>
-          </a:stretch>
-        </p:blipFill>
-        <p:spPr>
-          <a:xfrm>
-            <a:off x="2798795" y="1335755"/>
-            <a:ext cx="199704" cy="199704"/>
-          </a:xfrm>
-          <a:prstGeom prst="rect">
-            <a:avLst/>
-          </a:prstGeom>
-        </p:spPr>
-      </p:pic>
-      <p:sp>
-        <p:nvSpPr>
-          <p:cNvPr id="11" name="TextBox 10"/>
+      <p:sp>
+        <p:nvSpPr>
+          <p:cNvPr id="13" name="TextBox 12"/>
           <p:cNvSpPr txBox="1"/>
           <p:nvPr/>
         </p:nvSpPr>
         <p:spPr>
           <a:xfrm>
-            <a:off x="3163824" y="1225296"/>
-            <a:ext cx="1371600" cy="457200"/>
+            <a:off x="4714646" y="1188720"/>
+            <a:ext cx="1115568" cy="713232"/>
           </a:xfrm>
           <a:prstGeom prst="rect">
             <a:avLst/>
@@ -4770,33 +5360,33 @@
           </a:bodyPr>
           <a:lstStyle/>
           <a:p>
-            <a:pPr algn="l">
+            <a:pPr algn="ctr">
               <a:lnSpc>
                 <a:spcPct val="90000"/>
               </a:lnSpc>
             </a:pPr>
             <a:r>
-              <a:rPr sz="950" b="1" i="0">
-                <a:solidFill>
-                  <a:srgbClr val="3366CC"/>
+              <a:rPr sz="819" b="1" i="0">
+                <a:solidFill>
+                  <a:srgbClr val="1F497D"/>
                 </a:solidFill>
                 <a:latin typeface="Calibri"/>
               </a:rPr>
-              <a:t>Criterios de inclusión</a:t>
-            </a:r>
-          </a:p>
-        </p:txBody>
-      </p:sp>
-      <p:sp>
-        <p:nvSpPr>
-          <p:cNvPr id="12" name="TextBox 11"/>
+              <a:t>Brecha de cobertura</a:t>
+            </a:r>
+          </a:p>
+        </p:txBody>
+      </p:sp>
+      <p:sp>
+        <p:nvSpPr>
+          <p:cNvPr id="14" name="TextBox 13"/>
           <p:cNvSpPr txBox="1"/>
           <p:nvPr/>
         </p:nvSpPr>
         <p:spPr>
           <a:xfrm>
-            <a:off x="2724912" y="1847088"/>
-            <a:ext cx="1737360" cy="1417320"/>
+            <a:off x="5871362" y="1188720"/>
+            <a:ext cx="202996" cy="713232"/>
           </a:xfrm>
           <a:prstGeom prst="rect">
             <a:avLst/>
@@ -4804,42 +5394,38 @@
           <a:noFill/>
         </p:spPr>
         <p:txBody>
-          <a:bodyPr wrap="square" anchor="t" lIns="0" rIns="0" tIns="0" bIns="0">
+          <a:bodyPr wrap="square" anchor="ctr" lIns="0" rIns="0" tIns="0" bIns="0">
             <a:spAutoFit/>
           </a:bodyPr>
           <a:lstStyle/>
           <a:p>
-            <a:pPr algn="l">
-              <a:lnSpc>
-                <a:spcPct val="98000"/>
-              </a:lnSpc>
-            </a:pPr>
-            <a:r>
-              <a:rPr sz="790" b="0" i="0">
-                <a:solidFill>
-                  <a:srgbClr val="52514E"/>
+            <a:pPr algn="ctr"/>
+            <a:r>
+              <a:rPr sz="1200" b="1" i="0">
+                <a:solidFill>
+                  <a:srgbClr val="3366CC"/>
                 </a:solidFill>
                 <a:latin typeface="Calibri"/>
               </a:rPr>
-              <a:t>trabajos 2000+; estimación de superficies con validación contra estaciones; guías OMS y normas como literatura oficial</a:t>
-            </a:r>
-          </a:p>
-        </p:txBody>
-      </p:sp>
-      <p:sp>
-        <p:nvSpPr>
-          <p:cNvPr id="13" name="Rounded Rectangle 12"/>
+              <a:t>→</a:t>
+            </a:r>
+          </a:p>
+        </p:txBody>
+      </p:sp>
+      <p:sp>
+        <p:nvSpPr>
+          <p:cNvPr id="15" name="Rounded Rectangle 14"/>
           <p:cNvSpPr/>
           <p:nvPr/>
         </p:nvSpPr>
         <p:spPr>
           <a:xfrm>
-            <a:off x="4700016" y="1115568"/>
-            <a:ext cx="2011680" cy="2231136"/>
+            <a:off x="6060643" y="1188720"/>
+            <a:ext cx="1225296" cy="713232"/>
           </a:xfrm>
           <a:prstGeom prst="roundRect">
             <a:avLst>
-              <a:gd name="adj" fmla="val 10000"/>
+              <a:gd name="adj" fmla="val 14000"/>
             </a:avLst>
           </a:prstGeom>
           <a:solidFill>
@@ -4874,20 +5460,96 @@
       </p:sp>
       <p:sp>
         <p:nvSpPr>
-          <p:cNvPr id="14" name="Oval 13"/>
+          <p:cNvPr id="16" name="TextBox 15"/>
+          <p:cNvSpPr txBox="1"/>
+          <p:nvPr/>
+        </p:nvSpPr>
+        <p:spPr>
+          <a:xfrm>
+            <a:off x="6115507" y="1188720"/>
+            <a:ext cx="1115568" cy="713232"/>
+          </a:xfrm>
+          <a:prstGeom prst="rect">
+            <a:avLst/>
+          </a:prstGeom>
+          <a:noFill/>
+        </p:spPr>
+        <p:txBody>
+          <a:bodyPr wrap="square" anchor="ctr" lIns="0" rIns="0" tIns="0" bIns="0">
+            <a:spAutoFit/>
+          </a:bodyPr>
+          <a:lstStyle/>
+          <a:p>
+            <a:pPr algn="ctr">
+              <a:lnSpc>
+                <a:spcPct val="90000"/>
+              </a:lnSpc>
+            </a:pPr>
+            <a:r>
+              <a:rPr sz="819" b="1" i="0">
+                <a:solidFill>
+                  <a:srgbClr val="1F497D"/>
+                </a:solidFill>
+                <a:latin typeface="Calibri"/>
+              </a:rPr>
+              <a:t>Brecha de información</a:t>
+            </a:r>
+          </a:p>
+        </p:txBody>
+      </p:sp>
+      <p:sp>
+        <p:nvSpPr>
+          <p:cNvPr id="17" name="TextBox 16"/>
+          <p:cNvSpPr txBox="1"/>
+          <p:nvPr/>
+        </p:nvSpPr>
+        <p:spPr>
+          <a:xfrm>
+            <a:off x="7272223" y="1188720"/>
+            <a:ext cx="202996" cy="713232"/>
+          </a:xfrm>
+          <a:prstGeom prst="rect">
+            <a:avLst/>
+          </a:prstGeom>
+          <a:noFill/>
+        </p:spPr>
+        <p:txBody>
+          <a:bodyPr wrap="square" anchor="ctr" lIns="0" rIns="0" tIns="0" bIns="0">
+            <a:spAutoFit/>
+          </a:bodyPr>
+          <a:lstStyle/>
+          <a:p>
+            <a:pPr algn="ctr"/>
+            <a:r>
+              <a:rPr sz="1200" b="1" i="0">
+                <a:solidFill>
+                  <a:srgbClr val="3366CC"/>
+                </a:solidFill>
+                <a:latin typeface="Calibri"/>
+              </a:rPr>
+              <a:t>→</a:t>
+            </a:r>
+          </a:p>
+        </p:txBody>
+      </p:sp>
+      <p:sp>
+        <p:nvSpPr>
+          <p:cNvPr id="18" name="Rounded Rectangle 17"/>
           <p:cNvSpPr/>
           <p:nvPr/>
         </p:nvSpPr>
         <p:spPr>
           <a:xfrm>
-            <a:off x="4828031" y="1243584"/>
-            <a:ext cx="384048" cy="384048"/>
-          </a:xfrm>
-          <a:prstGeom prst="ellipse">
-            <a:avLst/>
+            <a:off x="7461504" y="1188720"/>
+            <a:ext cx="1225296" cy="713232"/>
+          </a:xfrm>
+          <a:prstGeom prst="roundRect">
+            <a:avLst>
+              <a:gd name="adj" fmla="val 14000"/>
+            </a:avLst>
           </a:prstGeom>
           <a:solidFill>
-            <a:srgbClr val="0F7D57"/>
+            <a:srgbClr val="17375D"/>
           </a:solidFill>
           <a:ln>
             <a:noFill/>
@@ -4916,40 +5578,16 @@
           </a:p>
         </p:txBody>
       </p:sp>
-      <p:pic>
-        <p:nvPicPr>
-          <p:cNvPr id="15" name="Picture 14" descr="science_w.png"/>
-          <p:cNvPicPr>
-            <a:picLocks noChangeAspect="1"/>
-          </p:cNvPicPr>
-          <p:nvPr/>
-        </p:nvPicPr>
-        <p:blipFill>
-          <a:blip r:embed="rId4"/>
-          <a:stretch>
-            <a:fillRect/>
-          </a:stretch>
-        </p:blipFill>
-        <p:spPr>
-          <a:xfrm>
-            <a:off x="4920203" y="1335755"/>
-            <a:ext cx="199704" cy="199704"/>
-          </a:xfrm>
-          <a:prstGeom prst="rect">
-            <a:avLst/>
-          </a:prstGeom>
-        </p:spPr>
-      </p:pic>
-      <p:sp>
-        <p:nvSpPr>
-          <p:cNvPr id="16" name="TextBox 15"/>
+      <p:sp>
+        <p:nvSpPr>
+          <p:cNvPr id="19" name="TextBox 18"/>
           <p:cNvSpPr txBox="1"/>
           <p:nvPr/>
         </p:nvSpPr>
         <p:spPr>
           <a:xfrm>
-            <a:off x="5285231" y="1225296"/>
-            <a:ext cx="1371600" cy="457200"/>
+            <a:off x="7516368" y="1188720"/>
+            <a:ext cx="1115568" cy="713232"/>
           </a:xfrm>
           <a:prstGeom prst="rect">
             <a:avLst/>
@@ -4962,72 +5600,33 @@
           </a:bodyPr>
           <a:lstStyle/>
           <a:p>
-            <a:pPr algn="l">
+            <a:pPr algn="ctr">
               <a:lnSpc>
                 <a:spcPct val="90000"/>
               </a:lnSpc>
             </a:pPr>
             <a:r>
-              <a:rPr sz="950" b="1" i="0">
-                <a:solidFill>
-                  <a:srgbClr val="0F7D57"/>
+              <a:rPr sz="819" b="1" i="0">
+                <a:solidFill>
+                  <a:srgbClr val="FFFFFF"/>
                 </a:solidFill>
                 <a:latin typeface="Calibri"/>
               </a:rPr>
-              <a:t>Citation chaining</a:t>
-            </a:r>
-          </a:p>
-        </p:txBody>
-      </p:sp>
-      <p:sp>
-        <p:nvSpPr>
-          <p:cNvPr id="17" name="TextBox 16"/>
-          <p:cNvSpPr txBox="1"/>
-          <p:nvPr/>
-        </p:nvSpPr>
-        <p:spPr>
-          <a:xfrm>
-            <a:off x="4846320" y="1847088"/>
-            <a:ext cx="1737360" cy="1417320"/>
-          </a:xfrm>
-          <a:prstGeom prst="rect">
-            <a:avLst/>
-          </a:prstGeom>
-          <a:noFill/>
-        </p:spPr>
-        <p:txBody>
-          <a:bodyPr wrap="square" anchor="t" lIns="0" rIns="0" tIns="0" bIns="0">
-            <a:spAutoFit/>
-          </a:bodyPr>
-          <a:lstStyle/>
-          <a:p>
-            <a:pPr algn="l">
-              <a:lnSpc>
-                <a:spcPct val="98000"/>
-              </a:lnSpc>
-            </a:pPr>
-            <a:r>
-              <a:rPr sz="790" b="0" i="0">
-                <a:solidFill>
-                  <a:srgbClr val="52514E"/>
-                </a:solidFill>
-                <a:latin typeface="Calibri"/>
-              </a:rPr>
-              <a:t>desde los trabajos ancla, hacia atrás (sus referencias) y hacia adelante (quién los cita hoy)</a:t>
-            </a:r>
-          </a:p>
-        </p:txBody>
-      </p:sp>
-      <p:sp>
-        <p:nvSpPr>
-          <p:cNvPr id="18" name="Rounded Rectangle 17"/>
+              <a:t>Propuesta de Ciencia de Datos</a:t>
+            </a:r>
+          </a:p>
+        </p:txBody>
+      </p:sp>
+      <p:sp>
+        <p:nvSpPr>
+          <p:cNvPr id="20" name="Rounded Rectangle 19"/>
           <p:cNvSpPr/>
           <p:nvPr/>
         </p:nvSpPr>
         <p:spPr>
           <a:xfrm>
-            <a:off x="6821423" y="1115568"/>
-            <a:ext cx="2011680" cy="2231136"/>
+            <a:off x="457200" y="2212848"/>
+            <a:ext cx="2679192" cy="1115568"/>
           </a:xfrm>
           <a:prstGeom prst="roundRect">
             <a:avLst>
@@ -5035,10 +5634,12 @@
             </a:avLst>
           </a:prstGeom>
           <a:solidFill>
-            <a:srgbClr val="F2F6FC"/>
+            <a:srgbClr val="FFFFFF"/>
           </a:solidFill>
-          <a:ln>
-            <a:noFill/>
+          <a:ln w="12700">
+            <a:solidFill>
+              <a:srgbClr val="D8DEE9"/>
+            </a:solidFill>
           </a:ln>
           <a:effectLst/>
         </p:spPr>
@@ -5066,23 +5667,97 @@
       </p:sp>
       <p:sp>
         <p:nvSpPr>
-          <p:cNvPr id="19" name="Oval 18"/>
+          <p:cNvPr id="21" name="TextBox 20"/>
+          <p:cNvSpPr txBox="1"/>
+          <p:nvPr/>
+        </p:nvSpPr>
+        <p:spPr>
+          <a:xfrm>
+            <a:off x="603504" y="2322576"/>
+            <a:ext cx="2377440" cy="219456"/>
+          </a:xfrm>
+          <a:prstGeom prst="rect">
+            <a:avLst/>
+          </a:prstGeom>
+          <a:noFill/>
+        </p:spPr>
+        <p:txBody>
+          <a:bodyPr wrap="square" anchor="t" lIns="0" rIns="0" tIns="0" bIns="0">
+            <a:spAutoFit/>
+          </a:bodyPr>
+          <a:lstStyle/>
+          <a:p>
+            <a:pPr algn="l"/>
+            <a:r>
+              <a:rPr sz="1000" b="1" i="0">
+                <a:solidFill>
+                  <a:srgbClr val="3366CC"/>
+                </a:solidFill>
+                <a:latin typeface="Calibri"/>
+              </a:rPr>
+              <a:t>El problema</a:t>
+            </a:r>
+          </a:p>
+        </p:txBody>
+      </p:sp>
+      <p:sp>
+        <p:nvSpPr>
+          <p:cNvPr id="22" name="TextBox 21"/>
+          <p:cNvSpPr txBox="1"/>
+          <p:nvPr/>
+        </p:nvSpPr>
+        <p:spPr>
+          <a:xfrm>
+            <a:off x="603504" y="2578608"/>
+            <a:ext cx="2377440" cy="694944"/>
+          </a:xfrm>
+          <a:prstGeom prst="rect">
+            <a:avLst/>
+          </a:prstGeom>
+          <a:noFill/>
+        </p:spPr>
+        <p:txBody>
+          <a:bodyPr wrap="square" anchor="t" lIns="0" rIns="0" tIns="0" bIns="0">
+            <a:spAutoFit/>
+          </a:bodyPr>
+          <a:lstStyle/>
+          <a:p>
+            <a:pPr algn="l"/>
+            <a:r>
+              <a:rPr sz="860" b="0" i="0">
+                <a:solidFill>
+                  <a:srgbClr val="52514E"/>
+                </a:solidFill>
+                <a:latin typeface="Calibri"/>
+              </a:rPr>
+              <a:t>Existen lugares y horas donde no conocemos directamente la concentración de ciertos contaminantes.</a:t>
+            </a:r>
+          </a:p>
+        </p:txBody>
+      </p:sp>
+      <p:sp>
+        <p:nvSpPr>
+          <p:cNvPr id="23" name="Rounded Rectangle 22"/>
           <p:cNvSpPr/>
           <p:nvPr/>
         </p:nvSpPr>
         <p:spPr>
           <a:xfrm>
-            <a:off x="6949439" y="1243584"/>
-            <a:ext cx="384048" cy="384048"/>
-          </a:xfrm>
-          <a:prstGeom prst="ellipse">
-            <a:avLst/>
+            <a:off x="3264408" y="2212848"/>
+            <a:ext cx="2679192" cy="1115568"/>
+          </a:xfrm>
+          <a:prstGeom prst="roundRect">
+            <a:avLst>
+              <a:gd name="adj" fmla="val 10000"/>
+            </a:avLst>
           </a:prstGeom>
           <a:solidFill>
-            <a:srgbClr val="B24E1C"/>
+            <a:srgbClr val="FFFFFF"/>
           </a:solidFill>
-          <a:ln>
-            <a:noFill/>
+          <a:ln w="12700">
+            <a:solidFill>
+              <a:srgbClr val="D8DEE9"/>
+            </a:solidFill>
           </a:ln>
           <a:effectLst/>
         </p:spPr>
@@ -5108,79 +5783,16 @@
           </a:p>
         </p:txBody>
       </p:sp>
-      <p:pic>
-        <p:nvPicPr>
-          <p:cNvPr id="20" name="Picture 19" descr="storage_w.png"/>
-          <p:cNvPicPr>
-            <a:picLocks noChangeAspect="1"/>
-          </p:cNvPicPr>
-          <p:nvPr/>
-        </p:nvPicPr>
-        <p:blipFill>
-          <a:blip r:embed="rId5"/>
-          <a:stretch>
-            <a:fillRect/>
-          </a:stretch>
-        </p:blipFill>
-        <p:spPr>
-          <a:xfrm>
-            <a:off x="7041611" y="1335755"/>
-            <a:ext cx="199704" cy="199704"/>
-          </a:xfrm>
-          <a:prstGeom prst="rect">
-            <a:avLst/>
-          </a:prstGeom>
-        </p:spPr>
-      </p:pic>
-      <p:sp>
-        <p:nvSpPr>
-          <p:cNvPr id="21" name="TextBox 20"/>
+      <p:sp>
+        <p:nvSpPr>
+          <p:cNvPr id="24" name="TextBox 23"/>
           <p:cNvSpPr txBox="1"/>
           <p:nvPr/>
         </p:nvSpPr>
         <p:spPr>
           <a:xfrm>
-            <a:off x="7406640" y="1225296"/>
-            <a:ext cx="1371600" cy="457200"/>
-          </a:xfrm>
-          <a:prstGeom prst="rect">
-            <a:avLst/>
-          </a:prstGeom>
-          <a:noFill/>
-        </p:spPr>
-        <p:txBody>
-          <a:bodyPr wrap="square" anchor="ctr" lIns="0" rIns="0" tIns="0" bIns="0">
-            <a:spAutoFit/>
-          </a:bodyPr>
-          <a:lstStyle/>
-          <a:p>
-            <a:pPr algn="l">
-              <a:lnSpc>
-                <a:spcPct val="90000"/>
-              </a:lnSpc>
-            </a:pPr>
-            <a:r>
-              <a:rPr sz="950" b="1" i="0">
-                <a:solidFill>
-                  <a:srgbClr val="B24E1C"/>
-                </a:solidFill>
-                <a:latin typeface="Calibri"/>
-              </a:rPr>
-              <a:t>Síntesis y gestión</a:t>
-            </a:r>
-          </a:p>
-        </p:txBody>
-      </p:sp>
-      <p:sp>
-        <p:nvSpPr>
-          <p:cNvPr id="22" name="TextBox 21"/>
-          <p:cNvSpPr txBox="1"/>
-          <p:nvPr/>
-        </p:nvSpPr>
-        <p:spPr>
-          <a:xfrm>
-            <a:off x="6967727" y="1847088"/>
-            <a:ext cx="1737360" cy="1417320"/>
+            <a:off x="3410712" y="2322576"/>
+            <a:ext cx="2377440" cy="219456"/>
           </a:xfrm>
           <a:prstGeom prst="rect">
             <a:avLst/>
@@ -5193,33 +5805,64 @@
           </a:bodyPr>
           <a:lstStyle/>
           <a:p>
-            <a:pPr algn="l">
-              <a:lnSpc>
-                <a:spcPct val="98000"/>
-              </a:lnSpc>
-            </a:pPr>
-            <a:r>
-              <a:rPr sz="790" b="0" i="0">
-                <a:solidFill>
-                  <a:srgbClr val="52514E"/>
+            <a:pPr algn="l"/>
+            <a:r>
+              <a:rPr sz="1000" b="1" i="0">
+                <a:solidFill>
+                  <a:srgbClr val="3366CC"/>
                 </a:solidFill>
                 <a:latin typeface="Calibri"/>
               </a:rPr>
-              <a:t>matriz contaminante × método; bibliografía en formato APA consolidada en el repositorio</a:t>
-            </a:r>
-          </a:p>
-        </p:txBody>
-      </p:sp>
-      <p:sp>
-        <p:nvSpPr>
-          <p:cNvPr id="23" name="Rounded Rectangle 22"/>
+              <a:t>Por qué importa</a:t>
+            </a:r>
+          </a:p>
+        </p:txBody>
+      </p:sp>
+      <p:sp>
+        <p:nvSpPr>
+          <p:cNvPr id="25" name="TextBox 24"/>
+          <p:cNvSpPr txBox="1"/>
+          <p:nvPr/>
+        </p:nvSpPr>
+        <p:spPr>
+          <a:xfrm>
+            <a:off x="3410712" y="2578608"/>
+            <a:ext cx="2377440" cy="694944"/>
+          </a:xfrm>
+          <a:prstGeom prst="rect">
+            <a:avLst/>
+          </a:prstGeom>
+          <a:noFill/>
+        </p:spPr>
+        <p:txBody>
+          <a:bodyPr wrap="square" anchor="t" lIns="0" rIns="0" tIns="0" bIns="0">
+            <a:spAutoFit/>
+          </a:bodyPr>
+          <a:lstStyle/>
+          <a:p>
+            <a:pPr algn="l"/>
+            <a:r>
+              <a:rPr sz="860" b="0" i="0">
+                <a:solidFill>
+                  <a:srgbClr val="52514E"/>
+                </a:solidFill>
+                <a:latin typeface="Calibri"/>
+              </a:rPr>
+              <a:t>La contaminación tiene efectos sobre la salud, el ambiente y la toma de decisiones públicas.</a:t>
+            </a:r>
+          </a:p>
+        </p:txBody>
+      </p:sp>
+      <p:sp>
+        <p:nvSpPr>
+          <p:cNvPr id="26" name="Rounded Rectangle 25"/>
           <p:cNvSpPr/>
           <p:nvPr/>
         </p:nvSpPr>
         <p:spPr>
           <a:xfrm>
-            <a:off x="457200" y="3529584"/>
-            <a:ext cx="8229600" cy="566928"/>
+            <a:off x="6071616" y="2212848"/>
+            <a:ext cx="2679192" cy="1115568"/>
           </a:xfrm>
           <a:prstGeom prst="roundRect">
             <a:avLst>
@@ -5227,10 +5870,12 @@
             </a:avLst>
           </a:prstGeom>
           <a:solidFill>
-            <a:srgbClr val="EAF2FD"/>
+            <a:srgbClr val="FFFFFF"/>
           </a:solidFill>
-          <a:ln>
-            <a:noFill/>
+          <a:ln w="12700">
+            <a:solidFill>
+              <a:srgbClr val="D8DEE9"/>
+            </a:solidFill>
           </a:ln>
           <a:effectLst/>
         </p:spPr>
@@ -5258,14 +5903,14 @@
       </p:sp>
       <p:sp>
         <p:nvSpPr>
-          <p:cNvPr id="24" name="TextBox 23"/>
+          <p:cNvPr id="27" name="TextBox 26"/>
           <p:cNvSpPr txBox="1"/>
           <p:nvPr/>
         </p:nvSpPr>
         <p:spPr>
           <a:xfrm>
-            <a:off x="621792" y="3602736"/>
-            <a:ext cx="7909560" cy="457200"/>
+            <a:off x="6217920" y="2322576"/>
+            <a:ext cx="2377440" cy="219456"/>
           </a:xfrm>
           <a:prstGeom prst="rect">
             <a:avLst/>
@@ -5280,36 +5925,27 @@
           <a:p>
             <a:pPr algn="l"/>
             <a:r>
-              <a:rPr sz="919" b="1" i="0">
-                <a:solidFill>
-                  <a:srgbClr val="1F497D"/>
+              <a:rPr sz="1000" b="1" i="0">
+                <a:solidFill>
+                  <a:srgbClr val="3366CC"/>
                 </a:solidFill>
                 <a:latin typeface="Calibri"/>
               </a:rPr>
-              <a:t>Estructura elegida: </a:t>
-            </a:r>
-            <a:r>
-              <a:rPr sz="919" b="0" i="0">
-                <a:solidFill>
-                  <a:srgbClr val="52514E"/>
-                </a:solidFill>
-                <a:latin typeface="Calibri"/>
-              </a:rPr>
-              <a:t>por tema (cada contaminante) y por metodología, dos de las formas recomendadas en la sesión sincrónica del curso. La revisión busca qué se sabe, cómo se llegó y qué no se sabe.</a:t>
-            </a:r>
-          </a:p>
-        </p:txBody>
-      </p:sp>
-      <p:sp>
-        <p:nvSpPr>
-          <p:cNvPr id="25" name="TextBox 24"/>
+              <a:t>Por qué ocurre</a:t>
+            </a:r>
+          </a:p>
+        </p:txBody>
+      </p:sp>
+      <p:sp>
+        <p:nvSpPr>
+          <p:cNvPr id="28" name="TextBox 27"/>
           <p:cNvSpPr txBox="1"/>
           <p:nvPr/>
         </p:nvSpPr>
         <p:spPr>
           <a:xfrm>
-            <a:off x="457200" y="4224528"/>
-            <a:ext cx="8229600" cy="274320"/>
+            <a:off x="6217920" y="2578608"/>
+            <a:ext cx="2377440" cy="694944"/>
           </a:xfrm>
           <a:prstGeom prst="rect">
             <a:avLst/>
@@ -5324,13 +5960,103 @@
           <a:p>
             <a:pPr algn="l"/>
             <a:r>
-              <a:rPr sz="819" b="0" i="0">
-                <a:solidFill>
-                  <a:srgbClr val="898781"/>
+              <a:rPr sz="860" b="0" i="0">
+                <a:solidFill>
+                  <a:srgbClr val="52514E"/>
                 </a:solidFill>
                 <a:latin typeface="Calibri"/>
               </a:rPr>
-              <a:t>Todas las referencias citadas en esta presentación tienen DOI o ISBN verificado y están en la bibliografía del repositorio.</a:t>
+              <a:t>Distribución de las estaciones, fuentes de emisión, características del territorio y meteorología.</a:t>
+            </a:r>
+          </a:p>
+        </p:txBody>
+      </p:sp>
+      <p:sp>
+        <p:nvSpPr>
+          <p:cNvPr id="29" name="Rounded Rectangle 28"/>
+          <p:cNvSpPr/>
+          <p:nvPr/>
+        </p:nvSpPr>
+        <p:spPr>
+          <a:xfrm>
+            <a:off x="457200" y="3566160"/>
+            <a:ext cx="8229600" cy="603504"/>
+          </a:xfrm>
+          <a:prstGeom prst="roundRect">
+            <a:avLst>
+              <a:gd name="adj" fmla="val 10000"/>
+            </a:avLst>
+          </a:prstGeom>
+          <a:solidFill>
+            <a:srgbClr val="EAF2FD"/>
+          </a:solidFill>
+          <a:ln>
+            <a:noFill/>
+          </a:ln>
+          <a:effectLst/>
+        </p:spPr>
+        <p:style>
+          <a:lnRef idx="1">
+            <a:schemeClr val="accent1"/>
+          </a:lnRef>
+          <a:fillRef idx="3">
+            <a:schemeClr val="accent1"/>
+          </a:fillRef>
+          <a:effectRef idx="2">
+            <a:schemeClr val="accent1"/>
+          </a:effectRef>
+          <a:fontRef idx="minor">
+            <a:schemeClr val="lt1"/>
+          </a:fontRef>
+        </p:style>
+        <p:txBody>
+          <a:bodyPr rtlCol="0" anchor="ctr"/>
+          <a:lstStyle/>
+          <a:p>
+            <a:pPr algn="ctr"/>
+          </a:p>
+        </p:txBody>
+      </p:sp>
+      <p:sp>
+        <p:nvSpPr>
+          <p:cNvPr id="30" name="TextBox 29"/>
+          <p:cNvSpPr txBox="1"/>
+          <p:nvPr/>
+        </p:nvSpPr>
+        <p:spPr>
+          <a:xfrm>
+            <a:off x="621792" y="3648456"/>
+            <a:ext cx="7909560" cy="457200"/>
+          </a:xfrm>
+          <a:prstGeom prst="rect">
+            <a:avLst/>
+          </a:prstGeom>
+          <a:noFill/>
+        </p:spPr>
+        <p:txBody>
+          <a:bodyPr wrap="square" anchor="t" lIns="0" rIns="0" tIns="0" bIns="0">
+            <a:spAutoFit/>
+          </a:bodyPr>
+          <a:lstStyle/>
+          <a:p>
+            <a:pPr algn="l"/>
+            <a:r>
+              <a:rPr sz="940" b="1" i="0">
+                <a:solidFill>
+                  <a:srgbClr val="1F497D"/>
+                </a:solidFill>
+                <a:latin typeface="Calibri"/>
+              </a:rPr>
+              <a:t>Alcance: </a:t>
+            </a:r>
+            <a:r>
+              <a:rPr sz="940" b="0" i="0">
+                <a:solidFill>
+                  <a:srgbClr val="52514E"/>
+                </a:solidFill>
+                <a:latin typeface="Calibri"/>
+              </a:rPr>
+              <a:t>el proyecto no busca resolver las fuentes de contaminación; busca estimar concentraciones en lugares y momentos donde no existe una medición directa, usando las estaciones como mediciones de referencia para entrenar y validar.</a:t>
             </a:r>
           </a:p>
         </p:txBody>
@@ -5381,13 +6107,13 @@
           <a:lstStyle/>
           <a:p>
             <a:r>
-              <a:rPr sz="1900" b="1">
+              <a:rPr sz="2000" b="1">
                 <a:solidFill>
                   <a:srgbClr val="FFFFFF"/>
                 </a:solidFill>
                 <a:latin typeface="Calibri"/>
               </a:rPr>
-              <a:t>Qué se sabe (1): PM₂.₅ es el contaminante mejor resuelto</a:t>
+              <a:t>Conceptos clave en 30 segundos</a:t>
             </a:r>
             <a:endParaRPr lang="es-ES" dirty="0"/>
           </a:p>
@@ -5401,8 +6127,8 @@
         </p:nvSpPr>
         <p:spPr>
           <a:xfrm>
-            <a:off x="457200" y="1115568"/>
-            <a:ext cx="4005072" cy="1133856"/>
+            <a:off x="457200" y="1188720"/>
+            <a:ext cx="2679192" cy="1353312"/>
           </a:xfrm>
           <a:prstGeom prst="roundRect">
             <a:avLst>
@@ -5447,8 +6173,8 @@
         </p:nvSpPr>
         <p:spPr>
           <a:xfrm>
-            <a:off x="603504" y="1207008"/>
-            <a:ext cx="2331720" cy="365760"/>
+            <a:off x="603504" y="1298448"/>
+            <a:ext cx="2377440" cy="237744"/>
           </a:xfrm>
           <a:prstGeom prst="rect">
             <a:avLst/>
@@ -5461,41 +6187,76 @@
           </a:bodyPr>
           <a:lstStyle/>
           <a:p>
+            <a:pPr algn="l"/>
+            <a:r>
+              <a:rPr sz="1050" b="1" i="0">
+                <a:solidFill>
+                  <a:srgbClr val="1F497D"/>
+                </a:solidFill>
+                <a:latin typeface="Calibri"/>
+              </a:rPr>
+              <a:t>SINCA</a:t>
+            </a:r>
+          </a:p>
+        </p:txBody>
+      </p:sp>
+      <p:sp>
+        <p:nvSpPr>
+          <p:cNvPr id="5" name="TextBox 4"/>
+          <p:cNvSpPr txBox="1"/>
+          <p:nvPr/>
+        </p:nvSpPr>
+        <p:spPr>
+          <a:xfrm>
+            <a:off x="603504" y="1572768"/>
+            <a:ext cx="2395728" cy="914400"/>
+          </a:xfrm>
+          <a:prstGeom prst="rect">
+            <a:avLst/>
+          </a:prstGeom>
+          <a:noFill/>
+        </p:spPr>
+        <p:txBody>
+          <a:bodyPr wrap="square" anchor="t" lIns="0" rIns="0" tIns="0" bIns="0">
+            <a:spAutoFit/>
+          </a:bodyPr>
+          <a:lstStyle/>
+          <a:p>
             <a:pPr algn="l">
               <a:lnSpc>
-                <a:spcPct val="90000"/>
+                <a:spcPct val="98000"/>
               </a:lnSpc>
             </a:pPr>
             <a:r>
-              <a:rPr sz="980" b="1" i="0">
-                <a:solidFill>
-                  <a:srgbClr val="1F497D"/>
+              <a:rPr sz="819" b="0" i="0">
+                <a:solidFill>
+                  <a:srgbClr val="52514E"/>
                 </a:solidFill>
                 <a:latin typeface="Calibri"/>
               </a:rPr>
-              <a:t>Global, mensual y con incertidumbre</a:t>
-            </a:r>
-          </a:p>
-        </p:txBody>
-      </p:sp>
-      <p:sp>
-        <p:nvSpPr>
-          <p:cNvPr id="5" name="Rounded Rectangle 4"/>
+              <a:t>Sistema de Información Nacional de Calidad del Aire (MMA): concentra la información de las estaciones que monitorean el aire en Chile.</a:t>
+            </a:r>
+          </a:p>
+        </p:txBody>
+      </p:sp>
+      <p:sp>
+        <p:nvSpPr>
+          <p:cNvPr id="6" name="Rounded Rectangle 5"/>
           <p:cNvSpPr/>
           <p:nvPr/>
         </p:nvSpPr>
         <p:spPr>
           <a:xfrm>
-            <a:off x="2944368" y="1207008"/>
-            <a:ext cx="1389888" cy="219456"/>
+            <a:off x="3264408" y="1188720"/>
+            <a:ext cx="2679192" cy="1353312"/>
           </a:xfrm>
           <a:prstGeom prst="roundRect">
             <a:avLst>
-              <a:gd name="adj" fmla="val 30000"/>
+              <a:gd name="adj" fmla="val 10000"/>
             </a:avLst>
           </a:prstGeom>
           <a:solidFill>
-            <a:srgbClr val="EAF2FD"/>
+            <a:srgbClr val="F2F6FC"/>
           </a:solidFill>
           <a:ln>
             <a:noFill/>
@@ -5526,49 +6287,14 @@
       </p:sp>
       <p:sp>
         <p:nvSpPr>
-          <p:cNvPr id="6" name="TextBox 5"/>
-          <p:cNvSpPr txBox="1"/>
-          <p:nvPr/>
-        </p:nvSpPr>
-        <p:spPr>
-          <a:xfrm>
-            <a:off x="2944368" y="1207008"/>
-            <a:ext cx="1389888" cy="219456"/>
-          </a:xfrm>
-          <a:prstGeom prst="rect">
-            <a:avLst/>
-          </a:prstGeom>
-          <a:noFill/>
-        </p:spPr>
-        <p:txBody>
-          <a:bodyPr wrap="square" anchor="ctr" lIns="0" rIns="0" tIns="0" bIns="0">
-            <a:spAutoFit/>
-          </a:bodyPr>
-          <a:lstStyle/>
-          <a:p>
-            <a:pPr algn="ctr"/>
-            <a:r>
-              <a:rPr sz="620" b="1" i="0">
-                <a:solidFill>
-                  <a:srgbClr val="1F497D"/>
-                </a:solidFill>
-                <a:latin typeface="Calibri"/>
-              </a:rPr>
-              <a:t>van Donkelaar 2021 · ACAG</a:t>
-            </a:r>
-          </a:p>
-        </p:txBody>
-      </p:sp>
-      <p:sp>
-        <p:nvSpPr>
           <p:cNvPr id="7" name="TextBox 6"/>
           <p:cNvSpPr txBox="1"/>
           <p:nvPr/>
         </p:nvSpPr>
         <p:spPr>
           <a:xfrm>
-            <a:off x="603504" y="1554480"/>
-            <a:ext cx="3712463" cy="658368"/>
+            <a:off x="3410712" y="1298448"/>
+            <a:ext cx="2377440" cy="237744"/>
           </a:xfrm>
           <a:prstGeom prst="rect">
             <a:avLst/>
@@ -5581,33 +6307,68 @@
           </a:bodyPr>
           <a:lstStyle/>
           <a:p>
+            <a:pPr algn="l"/>
+            <a:r>
+              <a:rPr sz="1050" b="1" i="0">
+                <a:solidFill>
+                  <a:srgbClr val="1F497D"/>
+                </a:solidFill>
+                <a:latin typeface="Calibri"/>
+              </a:rPr>
+              <a:t>Contaminante normado</a:t>
+            </a:r>
+          </a:p>
+        </p:txBody>
+      </p:sp>
+      <p:sp>
+        <p:nvSpPr>
+          <p:cNvPr id="8" name="TextBox 7"/>
+          <p:cNvSpPr txBox="1"/>
+          <p:nvPr/>
+        </p:nvSpPr>
+        <p:spPr>
+          <a:xfrm>
+            <a:off x="3410712" y="1572768"/>
+            <a:ext cx="2395728" cy="914400"/>
+          </a:xfrm>
+          <a:prstGeom prst="rect">
+            <a:avLst/>
+          </a:prstGeom>
+          <a:noFill/>
+        </p:spPr>
+        <p:txBody>
+          <a:bodyPr wrap="square" anchor="t" lIns="0" rIns="0" tIns="0" bIns="0">
+            <a:spAutoFit/>
+          </a:bodyPr>
+          <a:lstStyle/>
+          <a:p>
             <a:pPr algn="l">
               <a:lnSpc>
-                <a:spcPct val="95000"/>
+                <a:spcPct val="98000"/>
               </a:lnSpc>
             </a:pPr>
             <a:r>
-              <a:rPr sz="800" b="0" i="0">
+              <a:rPr sz="819" b="0" i="0">
                 <a:solidFill>
                   <a:srgbClr val="52514E"/>
                 </a:solidFill>
                 <a:latin typeface="Calibri"/>
               </a:rPr>
-              <a:t>Estimaciones globales de PM₂.₅ combinando satélite, modelo químico y estaciones; es la base del producto de superficie que usamos.¹</a:t>
-            </a:r>
-          </a:p>
-        </p:txBody>
-      </p:sp>
-      <p:sp>
-        <p:nvSpPr>
-          <p:cNvPr id="8" name="Rounded Rectangle 7"/>
+              <a:t>Contaminante con norma de calidad ambiental vigente en Chile, es decir, con límites legales de concentración.</a:t>
+            </a:r>
+          </a:p>
+        </p:txBody>
+      </p:sp>
+      <p:sp>
+        <p:nvSpPr>
+          <p:cNvPr id="9" name="Rounded Rectangle 8"/>
           <p:cNvSpPr/>
           <p:nvPr/>
         </p:nvSpPr>
         <p:spPr>
           <a:xfrm>
-            <a:off x="4681728" y="1115568"/>
-            <a:ext cx="4005072" cy="1133856"/>
+            <a:off x="6071616" y="1188720"/>
+            <a:ext cx="2679192" cy="1353312"/>
           </a:xfrm>
           <a:prstGeom prst="roundRect">
             <a:avLst>
@@ -5646,14 +6407,14 @@
       </p:sp>
       <p:sp>
         <p:nvSpPr>
-          <p:cNvPr id="9" name="TextBox 8"/>
+          <p:cNvPr id="10" name="TextBox 9"/>
           <p:cNvSpPr txBox="1"/>
           <p:nvPr/>
         </p:nvSpPr>
         <p:spPr>
           <a:xfrm>
-            <a:off x="4828032" y="1207008"/>
-            <a:ext cx="2331720" cy="365760"/>
+            <a:off x="6217920" y="1298448"/>
+            <a:ext cx="2377440" cy="237744"/>
           </a:xfrm>
           <a:prstGeom prst="rect">
             <a:avLst/>
@@ -5666,41 +6427,76 @@
           </a:bodyPr>
           <a:lstStyle/>
           <a:p>
+            <a:pPr algn="l"/>
+            <a:r>
+              <a:rPr sz="1050" b="1" i="0">
+                <a:solidFill>
+                  <a:srgbClr val="1F497D"/>
+                </a:solidFill>
+                <a:latin typeface="Calibri"/>
+              </a:rPr>
+              <a:t>Reanálisis</a:t>
+            </a:r>
+          </a:p>
+        </p:txBody>
+      </p:sp>
+      <p:sp>
+        <p:nvSpPr>
+          <p:cNvPr id="11" name="TextBox 10"/>
+          <p:cNvSpPr txBox="1"/>
+          <p:nvPr/>
+        </p:nvSpPr>
+        <p:spPr>
+          <a:xfrm>
+            <a:off x="6217920" y="1572768"/>
+            <a:ext cx="2395728" cy="914400"/>
+          </a:xfrm>
+          <a:prstGeom prst="rect">
+            <a:avLst/>
+          </a:prstGeom>
+          <a:noFill/>
+        </p:spPr>
+        <p:txBody>
+          <a:bodyPr wrap="square" anchor="t" lIns="0" rIns="0" tIns="0" bIns="0">
+            <a:spAutoFit/>
+          </a:bodyPr>
+          <a:lstStyle/>
+          <a:p>
             <a:pPr algn="l">
               <a:lnSpc>
-                <a:spcPct val="90000"/>
+                <a:spcPct val="98000"/>
               </a:lnSpc>
             </a:pPr>
             <a:r>
-              <a:rPr sz="980" b="1" i="0">
-                <a:solidFill>
-                  <a:srgbClr val="1F497D"/>
+              <a:rPr sz="819" b="0" i="0">
+                <a:solidFill>
+                  <a:srgbClr val="52514E"/>
                 </a:solidFill>
                 <a:latin typeface="Calibri"/>
               </a:rPr>
-              <a:t>El salto: híbrido geofísico + estadístico</a:t>
-            </a:r>
-          </a:p>
-        </p:txBody>
-      </p:sp>
-      <p:sp>
-        <p:nvSpPr>
-          <p:cNvPr id="10" name="Rounded Rectangle 9"/>
+              <a:t>Reconstrucción retrospectiva de la atmósfera que combina un modelo físico con observaciones históricas (p. ej. CAMS, MERRA-2).</a:t>
+            </a:r>
+          </a:p>
+        </p:txBody>
+      </p:sp>
+      <p:sp>
+        <p:nvSpPr>
+          <p:cNvPr id="12" name="Rounded Rectangle 11"/>
           <p:cNvSpPr/>
           <p:nvPr/>
         </p:nvSpPr>
         <p:spPr>
           <a:xfrm>
-            <a:off x="7168896" y="1207008"/>
-            <a:ext cx="1389888" cy="219456"/>
+            <a:off x="457200" y="2670048"/>
+            <a:ext cx="2679192" cy="1353312"/>
           </a:xfrm>
           <a:prstGeom prst="roundRect">
             <a:avLst>
-              <a:gd name="adj" fmla="val 30000"/>
+              <a:gd name="adj" fmla="val 10000"/>
             </a:avLst>
           </a:prstGeom>
           <a:solidFill>
-            <a:srgbClr val="EAF2FD"/>
+            <a:srgbClr val="F2F6FC"/>
           </a:solidFill>
           <a:ln>
             <a:noFill/>
@@ -5731,49 +6527,14 @@
       </p:sp>
       <p:sp>
         <p:nvSpPr>
-          <p:cNvPr id="11" name="TextBox 10"/>
+          <p:cNvPr id="13" name="TextBox 12"/>
           <p:cNvSpPr txBox="1"/>
           <p:nvPr/>
         </p:nvSpPr>
         <p:spPr>
           <a:xfrm>
-            <a:off x="7168896" y="1207008"/>
-            <a:ext cx="1389888" cy="219456"/>
-          </a:xfrm>
-          <a:prstGeom prst="rect">
-            <a:avLst/>
-          </a:prstGeom>
-          <a:noFill/>
-        </p:spPr>
-        <p:txBody>
-          <a:bodyPr wrap="square" anchor="ctr" lIns="0" rIns="0" tIns="0" bIns="0">
-            <a:spAutoFit/>
-          </a:bodyPr>
-          <a:lstStyle/>
-          <a:p>
-            <a:pPr algn="ctr"/>
-            <a:r>
-              <a:rPr sz="620" b="1" i="0">
-                <a:solidFill>
-                  <a:srgbClr val="1F497D"/>
-                </a:solidFill>
-                <a:latin typeface="Calibri"/>
-              </a:rPr>
-              <a:t>van Donkelaar 2016</a:t>
-            </a:r>
-          </a:p>
-        </p:txBody>
-      </p:sp>
-      <p:sp>
-        <p:nvSpPr>
-          <p:cNvPr id="12" name="TextBox 11"/>
-          <p:cNvSpPr txBox="1"/>
-          <p:nvPr/>
-        </p:nvSpPr>
-        <p:spPr>
-          <a:xfrm>
-            <a:off x="4828032" y="1554480"/>
-            <a:ext cx="3712463" cy="658368"/>
+            <a:off x="603504" y="2779776"/>
+            <a:ext cx="2377440" cy="237744"/>
           </a:xfrm>
           <a:prstGeom prst="rect">
             <a:avLst/>
@@ -5786,33 +6547,68 @@
           </a:bodyPr>
           <a:lstStyle/>
           <a:p>
+            <a:pPr algn="l"/>
+            <a:r>
+              <a:rPr sz="1050" b="1" i="0">
+                <a:solidFill>
+                  <a:srgbClr val="1F497D"/>
+                </a:solidFill>
+                <a:latin typeface="Calibri"/>
+              </a:rPr>
+              <a:t>Columna satelital</a:t>
+            </a:r>
+          </a:p>
+        </p:txBody>
+      </p:sp>
+      <p:sp>
+        <p:nvSpPr>
+          <p:cNvPr id="14" name="TextBox 13"/>
+          <p:cNvSpPr txBox="1"/>
+          <p:nvPr/>
+        </p:nvSpPr>
+        <p:spPr>
+          <a:xfrm>
+            <a:off x="603504" y="3054096"/>
+            <a:ext cx="2395728" cy="914400"/>
+          </a:xfrm>
+          <a:prstGeom prst="rect">
+            <a:avLst/>
+          </a:prstGeom>
+          <a:noFill/>
+        </p:spPr>
+        <p:txBody>
+          <a:bodyPr wrap="square" anchor="t" lIns="0" rIns="0" tIns="0" bIns="0">
+            <a:spAutoFit/>
+          </a:bodyPr>
+          <a:lstStyle/>
+          <a:p>
             <a:pPr algn="l">
               <a:lnSpc>
-                <a:spcPct val="95000"/>
+                <a:spcPct val="98000"/>
               </a:lnSpc>
             </a:pPr>
             <a:r>
-              <a:rPr sz="800" b="0" i="0">
+              <a:rPr sz="819" b="0" i="0">
                 <a:solidFill>
                   <a:srgbClr val="52514E"/>
                 </a:solidFill>
                 <a:latin typeface="Calibri"/>
               </a:rPr>
-              <a:t>AOD satelital + GEOS-Chem, corregido con regresión geográficamente ponderada contra estaciones: R² 0.81 en validación cruzada global.²</a:t>
-            </a:r>
-          </a:p>
-        </p:txBody>
-      </p:sp>
-      <p:sp>
-        <p:nvSpPr>
-          <p:cNvPr id="13" name="Rounded Rectangle 12"/>
+              <a:t>Cantidad total de un gas en la vertical que observa el satélite; no es la concentración a nivel de superficie.</a:t>
+            </a:r>
+          </a:p>
+        </p:txBody>
+      </p:sp>
+      <p:sp>
+        <p:nvSpPr>
+          <p:cNvPr id="15" name="Rounded Rectangle 14"/>
           <p:cNvSpPr/>
           <p:nvPr/>
         </p:nvSpPr>
         <p:spPr>
           <a:xfrm>
-            <a:off x="457200" y="2377439"/>
-            <a:ext cx="4005072" cy="1133856"/>
+            <a:off x="3264408" y="2670048"/>
+            <a:ext cx="2679192" cy="1353312"/>
           </a:xfrm>
           <a:prstGeom prst="roundRect">
             <a:avLst>
@@ -5851,14 +6647,14 @@
       </p:sp>
       <p:sp>
         <p:nvSpPr>
-          <p:cNvPr id="14" name="TextBox 13"/>
+          <p:cNvPr id="16" name="TextBox 15"/>
           <p:cNvSpPr txBox="1"/>
           <p:nvPr/>
         </p:nvSpPr>
         <p:spPr>
           <a:xfrm>
-            <a:off x="603504" y="2468879"/>
-            <a:ext cx="2331720" cy="365760"/>
+            <a:off x="3410712" y="2779776"/>
+            <a:ext cx="2377440" cy="237744"/>
           </a:xfrm>
           <a:prstGeom prst="rect">
             <a:avLst/>
@@ -5871,41 +6667,76 @@
           </a:bodyPr>
           <a:lstStyle/>
           <a:p>
+            <a:pPr algn="l"/>
+            <a:r>
+              <a:rPr sz="1050" b="1" i="0">
+                <a:solidFill>
+                  <a:srgbClr val="1F497D"/>
+                </a:solidFill>
+                <a:latin typeface="Calibri"/>
+              </a:rPr>
+              <a:t>Nivel L2 / L3</a:t>
+            </a:r>
+          </a:p>
+        </p:txBody>
+      </p:sp>
+      <p:sp>
+        <p:nvSpPr>
+          <p:cNvPr id="17" name="TextBox 16"/>
+          <p:cNvSpPr txBox="1"/>
+          <p:nvPr/>
+        </p:nvSpPr>
+        <p:spPr>
+          <a:xfrm>
+            <a:off x="3410712" y="3054096"/>
+            <a:ext cx="2395728" cy="914400"/>
+          </a:xfrm>
+          <a:prstGeom prst="rect">
+            <a:avLst/>
+          </a:prstGeom>
+          <a:noFill/>
+        </p:spPr>
+        <p:txBody>
+          <a:bodyPr wrap="square" anchor="t" lIns="0" rIns="0" tIns="0" bIns="0">
+            <a:spAutoFit/>
+          </a:bodyPr>
+          <a:lstStyle/>
+          <a:p>
             <a:pPr algn="l">
               <a:lnSpc>
-                <a:spcPct val="90000"/>
+                <a:spcPct val="98000"/>
               </a:lnSpc>
             </a:pPr>
             <a:r>
-              <a:rPr sz="980" b="1" i="0">
-                <a:solidFill>
-                  <a:srgbClr val="1F497D"/>
+              <a:rPr sz="819" b="0" i="0">
+                <a:solidFill>
+                  <a:srgbClr val="52514E"/>
                 </a:solidFill>
                 <a:latin typeface="Calibri"/>
               </a:rPr>
-              <a:t>Ensambles de aprendizaje automático</a:t>
-            </a:r>
-          </a:p>
-        </p:txBody>
-      </p:sp>
-      <p:sp>
-        <p:nvSpPr>
-          <p:cNvPr id="15" name="Rounded Rectangle 14"/>
+              <a:t>L2: producto por pasada del satélite, en su grilla original. L3: producto regrillado y agregado en el tiempo, listo para análisis.</a:t>
+            </a:r>
+          </a:p>
+        </p:txBody>
+      </p:sp>
+      <p:sp>
+        <p:nvSpPr>
+          <p:cNvPr id="18" name="Rounded Rectangle 17"/>
           <p:cNvSpPr/>
           <p:nvPr/>
         </p:nvSpPr>
         <p:spPr>
           <a:xfrm>
-            <a:off x="2944368" y="2468879"/>
-            <a:ext cx="1389888" cy="219456"/>
+            <a:off x="6071616" y="2670048"/>
+            <a:ext cx="2679192" cy="1353312"/>
           </a:xfrm>
           <a:prstGeom prst="roundRect">
             <a:avLst>
-              <a:gd name="adj" fmla="val 30000"/>
+              <a:gd name="adj" fmla="val 10000"/>
             </a:avLst>
           </a:prstGeom>
           <a:solidFill>
-            <a:srgbClr val="EAF2FD"/>
+            <a:srgbClr val="F2F6FC"/>
           </a:solidFill>
           <a:ln>
             <a:noFill/>
@@ -5936,49 +6767,14 @@
       </p:sp>
       <p:sp>
         <p:nvSpPr>
-          <p:cNvPr id="16" name="TextBox 15"/>
+          <p:cNvPr id="19" name="TextBox 18"/>
           <p:cNvSpPr txBox="1"/>
           <p:nvPr/>
         </p:nvSpPr>
         <p:spPr>
           <a:xfrm>
-            <a:off x="2944368" y="2468879"/>
-            <a:ext cx="1389888" cy="219456"/>
-          </a:xfrm>
-          <a:prstGeom prst="rect">
-            <a:avLst/>
-          </a:prstGeom>
-          <a:noFill/>
-        </p:spPr>
-        <p:txBody>
-          <a:bodyPr wrap="square" anchor="ctr" lIns="0" rIns="0" tIns="0" bIns="0">
-            <a:spAutoFit/>
-          </a:bodyPr>
-          <a:lstStyle/>
-          <a:p>
-            <a:pPr algn="ctr"/>
-            <a:r>
-              <a:rPr sz="620" b="1" i="0">
-                <a:solidFill>
-                  <a:srgbClr val="1F497D"/>
-                </a:solidFill>
-                <a:latin typeface="Calibri"/>
-              </a:rPr>
-              <a:t>Di 2019</a:t>
-            </a:r>
-          </a:p>
-        </p:txBody>
-      </p:sp>
-      <p:sp>
-        <p:nvSpPr>
-          <p:cNvPr id="17" name="TextBox 16"/>
-          <p:cNvSpPr txBox="1"/>
-          <p:nvPr/>
-        </p:nvSpPr>
-        <p:spPr>
-          <a:xfrm>
-            <a:off x="603504" y="2816351"/>
-            <a:ext cx="3712463" cy="658368"/>
+            <a:off x="6217920" y="2779776"/>
+            <a:ext cx="2377440" cy="237744"/>
           </a:xfrm>
           <a:prstGeom prst="rect">
             <a:avLst/>
@@ -5991,79 +6787,29 @@
           </a:bodyPr>
           <a:lstStyle/>
           <a:p>
-            <a:pPr algn="l">
-              <a:lnSpc>
-                <a:spcPct val="95000"/>
-              </a:lnSpc>
-            </a:pPr>
-            <a:r>
-              <a:rPr sz="800" b="0" i="0">
-                <a:solidFill>
-                  <a:srgbClr val="52514E"/>
+            <a:pPr algn="l"/>
+            <a:r>
+              <a:rPr sz="1050" b="1" i="0">
+                <a:solidFill>
+                  <a:srgbClr val="1F497D"/>
                 </a:solidFill>
                 <a:latin typeface="Calibri"/>
               </a:rPr>
-              <a:t>EE. UU. a 1 km y resolución diaria con un ensamble de redes neuronales, boosting y bosques aleatorios: el estándar de ingeniería actual.³</a:t>
-            </a:r>
-          </a:p>
-        </p:txBody>
-      </p:sp>
-      <p:sp>
-        <p:nvSpPr>
-          <p:cNvPr id="18" name="Rounded Rectangle 17"/>
-          <p:cNvSpPr/>
-          <p:nvPr/>
-        </p:nvSpPr>
-        <p:spPr>
-          <a:xfrm>
-            <a:off x="4681728" y="2377439"/>
-            <a:ext cx="4005072" cy="1133856"/>
-          </a:xfrm>
-          <a:prstGeom prst="roundRect">
-            <a:avLst>
-              <a:gd name="adj" fmla="val 10000"/>
-            </a:avLst>
-          </a:prstGeom>
-          <a:solidFill>
-            <a:srgbClr val="F2F6FC"/>
-          </a:solidFill>
-          <a:ln>
-            <a:noFill/>
-          </a:ln>
-          <a:effectLst/>
-        </p:spPr>
-        <p:style>
-          <a:lnRef idx="1">
-            <a:schemeClr val="accent1"/>
-          </a:lnRef>
-          <a:fillRef idx="3">
-            <a:schemeClr val="accent1"/>
-          </a:fillRef>
-          <a:effectRef idx="2">
-            <a:schemeClr val="accent1"/>
-          </a:effectRef>
-          <a:fontRef idx="minor">
-            <a:schemeClr val="lt1"/>
-          </a:fontRef>
-        </p:style>
-        <p:txBody>
-          <a:bodyPr rtlCol="0" anchor="ctr"/>
-          <a:lstStyle/>
-          <a:p>
-            <a:pPr algn="ctr"/>
-          </a:p>
-        </p:txBody>
-      </p:sp>
-      <p:sp>
-        <p:nvSpPr>
-          <p:cNvPr id="19" name="TextBox 18"/>
+              <a:t>Mediciones de referencia</a:t>
+            </a:r>
+          </a:p>
+        </p:txBody>
+      </p:sp>
+      <p:sp>
+        <p:nvSpPr>
+          <p:cNvPr id="20" name="TextBox 19"/>
           <p:cNvSpPr txBox="1"/>
           <p:nvPr/>
         </p:nvSpPr>
         <p:spPr>
           <a:xfrm>
-            <a:off x="4828032" y="2468879"/>
-            <a:ext cx="2331720" cy="365760"/>
+            <a:off x="6217920" y="3054096"/>
+            <a:ext cx="2395728" cy="914400"/>
           </a:xfrm>
           <a:prstGeom prst="rect">
             <a:avLst/>
@@ -6078,284 +6824,17 @@
           <a:p>
             <a:pPr algn="l">
               <a:lnSpc>
-                <a:spcPct val="90000"/>
+                <a:spcPct val="98000"/>
               </a:lnSpc>
             </a:pPr>
             <a:r>
-              <a:rPr sz="980" b="1" i="0">
-                <a:solidFill>
-                  <a:srgbClr val="1F497D"/>
+              <a:rPr sz="819" b="0" i="0">
+                <a:solidFill>
+                  <a:srgbClr val="52514E"/>
                 </a:solidFill>
                 <a:latin typeface="Calibri"/>
               </a:rPr>
-              <a:t>Chile: composición y fuentes locales</a:t>
-            </a:r>
-          </a:p>
-        </p:txBody>
-      </p:sp>
-      <p:sp>
-        <p:nvSpPr>
-          <p:cNvPr id="20" name="Rounded Rectangle 19"/>
-          <p:cNvSpPr/>
-          <p:nvPr/>
-        </p:nvSpPr>
-        <p:spPr>
-          <a:xfrm>
-            <a:off x="7168896" y="2468879"/>
-            <a:ext cx="1389888" cy="219456"/>
-          </a:xfrm>
-          <a:prstGeom prst="roundRect">
-            <a:avLst>
-              <a:gd name="adj" fmla="val 30000"/>
-            </a:avLst>
-          </a:prstGeom>
-          <a:solidFill>
-            <a:srgbClr val="EAF2FD"/>
-          </a:solidFill>
-          <a:ln>
-            <a:noFill/>
-          </a:ln>
-          <a:effectLst/>
-        </p:spPr>
-        <p:style>
-          <a:lnRef idx="1">
-            <a:schemeClr val="accent1"/>
-          </a:lnRef>
-          <a:fillRef idx="3">
-            <a:schemeClr val="accent1"/>
-          </a:fillRef>
-          <a:effectRef idx="2">
-            <a:schemeClr val="accent1"/>
-          </a:effectRef>
-          <a:fontRef idx="minor">
-            <a:schemeClr val="lt1"/>
-          </a:fontRef>
-        </p:style>
-        <p:txBody>
-          <a:bodyPr rtlCol="0" anchor="ctr"/>
-          <a:lstStyle/>
-          <a:p>
-            <a:pPr algn="ctr"/>
-          </a:p>
-        </p:txBody>
-      </p:sp>
-      <p:sp>
-        <p:nvSpPr>
-          <p:cNvPr id="21" name="TextBox 20"/>
-          <p:cNvSpPr txBox="1"/>
-          <p:nvPr/>
-        </p:nvSpPr>
-        <p:spPr>
-          <a:xfrm>
-            <a:off x="7168896" y="2468879"/>
-            <a:ext cx="1389888" cy="219456"/>
-          </a:xfrm>
-          <a:prstGeom prst="rect">
-            <a:avLst/>
-          </a:prstGeom>
-          <a:noFill/>
-        </p:spPr>
-        <p:txBody>
-          <a:bodyPr wrap="square" anchor="ctr" lIns="0" rIns="0" tIns="0" bIns="0">
-            <a:spAutoFit/>
-          </a:bodyPr>
-          <a:lstStyle/>
-          <a:p>
-            <a:pPr algn="ctr"/>
-            <a:r>
-              <a:rPr sz="620" b="1" i="0">
-                <a:solidFill>
-                  <a:srgbClr val="1F497D"/>
-                </a:solidFill>
-                <a:latin typeface="Calibri"/>
-              </a:rPr>
-              <a:t>Villalobos 2017 · Barraza 2017</a:t>
-            </a:r>
-          </a:p>
-        </p:txBody>
-      </p:sp>
-      <p:sp>
-        <p:nvSpPr>
-          <p:cNvPr id="22" name="TextBox 21"/>
-          <p:cNvSpPr txBox="1"/>
-          <p:nvPr/>
-        </p:nvSpPr>
-        <p:spPr>
-          <a:xfrm>
-            <a:off x="4828032" y="2816351"/>
-            <a:ext cx="3712463" cy="658368"/>
-          </a:xfrm>
-          <a:prstGeom prst="rect">
-            <a:avLst/>
-          </a:prstGeom>
-          <a:noFill/>
-        </p:spPr>
-        <p:txBody>
-          <a:bodyPr wrap="square" anchor="t" lIns="0" rIns="0" tIns="0" bIns="0">
-            <a:spAutoFit/>
-          </a:bodyPr>
-          <a:lstStyle/>
-          <a:p>
-            <a:pPr algn="l">
-              <a:lnSpc>
-                <a:spcPct val="95000"/>
-              </a:lnSpc>
-            </a:pPr>
-            <a:r>
-              <a:rPr sz="800" b="0" i="0">
-                <a:solidFill>
-                  <a:srgbClr val="52514E"/>
-                </a:solidFill>
-                <a:latin typeface="Calibri"/>
-              </a:rPr>
-              <a:t>La leña domina el PM₂.₅ invernal del centro-sur⁴ y las fuentes de Santiago evolucionaron durante 15 años⁵: contexto para interpretar nuestras superficies.</a:t>
-            </a:r>
-          </a:p>
-        </p:txBody>
-      </p:sp>
-      <p:sp>
-        <p:nvSpPr>
-          <p:cNvPr id="23" name="TextBox 22"/>
-          <p:cNvSpPr txBox="1"/>
-          <p:nvPr/>
-        </p:nvSpPr>
-        <p:spPr>
-          <a:xfrm>
-            <a:off x="457200" y="3712463"/>
-            <a:ext cx="8229600" cy="274320"/>
-          </a:xfrm>
-          <a:prstGeom prst="rect">
-            <a:avLst/>
-          </a:prstGeom>
-          <a:noFill/>
-        </p:spPr>
-        <p:txBody>
-          <a:bodyPr wrap="square" anchor="t" lIns="0" rIns="0" tIns="0" bIns="0">
-            <a:spAutoFit/>
-          </a:bodyPr>
-          <a:lstStyle/>
-          <a:p>
-            <a:pPr algn="l"/>
-            <a:r>
-              <a:rPr sz="930" b="1" i="0">
-                <a:solidFill>
-                  <a:srgbClr val="1F497D"/>
-                </a:solidFill>
-                <a:latin typeface="Calibri"/>
-              </a:rPr>
-              <a:t>La receta madura: </a:t>
-            </a:r>
-            <a:r>
-              <a:rPr sz="930" b="0" i="0">
-                <a:solidFill>
-                  <a:srgbClr val="52514E"/>
-                </a:solidFill>
-                <a:latin typeface="Calibri"/>
-              </a:rPr>
-              <a:t>AOD satelital + modelo químico + predictores locales + calibración contra estaciones.</a:t>
-            </a:r>
-          </a:p>
-        </p:txBody>
-      </p:sp>
-      <p:sp>
-        <p:nvSpPr>
-          <p:cNvPr id="24" name="TextBox 23"/>
-          <p:cNvSpPr txBox="1"/>
-          <p:nvPr/>
-        </p:nvSpPr>
-        <p:spPr>
-          <a:xfrm>
-            <a:off x="457200" y="4041648"/>
-            <a:ext cx="6446520" cy="850391"/>
-          </a:xfrm>
-          <a:prstGeom prst="rect">
-            <a:avLst/>
-          </a:prstGeom>
-          <a:noFill/>
-        </p:spPr>
-        <p:txBody>
-          <a:bodyPr wrap="square" anchor="t" lIns="0" rIns="0" tIns="0" bIns="0">
-            <a:spAutoFit/>
-          </a:bodyPr>
-          <a:lstStyle/>
-          <a:p>
-            <a:pPr algn="l">
-              <a:spcAft>
-                <a:spcPts val="100"/>
-              </a:spcAft>
-            </a:pPr>
-            <a:r>
-              <a:rPr sz="620" b="0" i="0">
-                <a:solidFill>
-                  <a:srgbClr val="898781"/>
-                </a:solidFill>
-                <a:latin typeface="Calibri"/>
-              </a:rPr>
-              <a:t>¹ van Donkelaar A. et al. Monthly global estimates of fine particulate matter and their uncertainty. Environ. Sci. Technol. 55 (2021). doi:10.1021/acs.est.1c05309</a:t>
-            </a:r>
-          </a:p>
-          <a:p>
-            <a:pPr algn="l">
-              <a:spcAft>
-                <a:spcPts val="100"/>
-              </a:spcAft>
-            </a:pPr>
-            <a:r>
-              <a:rPr sz="620" b="0" i="0">
-                <a:solidFill>
-                  <a:srgbClr val="898781"/>
-                </a:solidFill>
-                <a:latin typeface="Calibri"/>
-              </a:rPr>
-              <a:t>² van Donkelaar A. et al. Global estimates of fine particulate matter using a combined geophysical-statistical method with information from satellites, models, and monitors. Environ. Sci. Technol. 50 (2016). doi:10.1021/acs.est.5b05833</a:t>
-            </a:r>
-          </a:p>
-          <a:p>
-            <a:pPr algn="l">
-              <a:spcAft>
-                <a:spcPts val="100"/>
-              </a:spcAft>
-            </a:pPr>
-            <a:r>
-              <a:rPr sz="620" b="0" i="0">
-                <a:solidFill>
-                  <a:srgbClr val="898781"/>
-                </a:solidFill>
-                <a:latin typeface="Calibri"/>
-              </a:rPr>
-              <a:t>³ Di Q. et al. An ensemble-based model of PM2.5 concentration across the contiguous United States with high spatiotemporal resolution. Environment International (2019). doi:10.1016/j.envint.2019.104909</a:t>
-            </a:r>
-          </a:p>
-          <a:p>
-            <a:pPr algn="l">
-              <a:spcAft>
-                <a:spcPts val="100"/>
-              </a:spcAft>
-            </a:pPr>
-            <a:r>
-              <a:rPr sz="620" b="0" i="0">
-                <a:solidFill>
-                  <a:srgbClr val="898781"/>
-                </a:solidFill>
-                <a:latin typeface="Calibri"/>
-              </a:rPr>
-              <a:t>⁴ Villalobos A.M. et al. Wood burning pollution in southern Chile: PM2.5 source apportionment using CMB and molecular markers. Environmental Pollution 225 (2017). doi:10.1016/j.envpol.2017.02.069</a:t>
-            </a:r>
-          </a:p>
-          <a:p>
-            <a:pPr algn="l">
-              <a:spcAft>
-                <a:spcPts val="100"/>
-              </a:spcAft>
-            </a:pPr>
-            <a:r>
-              <a:rPr sz="620" b="0" i="0">
-                <a:solidFill>
-                  <a:srgbClr val="898781"/>
-                </a:solidFill>
-                <a:latin typeface="Calibri"/>
-              </a:rPr>
-              <a:t>⁵ Barraza F. et al. Temporal evolution of main ambient PM2.5 sources in Santiago, Chile, 1998–2012. Atmos. Chem. Phys. 17 (2017). doi:10.5194/acp-17-10093-2017</a:t>
+              <a:t>Observaciones de las estaciones de monitoreo que se usan para entrenar los modelos y evaluar su desempeño.</a:t>
             </a:r>
           </a:p>
         </p:txBody>
@@ -6412,7 +6891,7 @@
                 </a:solidFill>
                 <a:latin typeface="Calibri"/>
               </a:rPr>
-              <a:t>Qué se sabe (2): los gases van una década más atrás</a:t>
+              <a:t>La brecha de monitoreo: qué cubre la red SINCA</a:t>
             </a:r>
             <a:endParaRPr lang="es-ES" dirty="0"/>
           </a:p>
@@ -6420,60 +6899,14 @@
       </p:sp>
       <p:sp>
         <p:nvSpPr>
-          <p:cNvPr id="3" name="Rounded Rectangle 2"/>
-          <p:cNvSpPr/>
-          <p:nvPr/>
-        </p:nvSpPr>
-        <p:spPr>
-          <a:xfrm>
-            <a:off x="457200" y="1115568"/>
-            <a:ext cx="4041648" cy="2377440"/>
-          </a:xfrm>
-          <a:prstGeom prst="roundRect">
-            <a:avLst>
-              <a:gd name="adj" fmla="val 10000"/>
-            </a:avLst>
-          </a:prstGeom>
-          <a:solidFill>
-            <a:srgbClr val="F2F6FC"/>
-          </a:solidFill>
-          <a:ln>
-            <a:noFill/>
-          </a:ln>
-          <a:effectLst/>
-        </p:spPr>
-        <p:style>
-          <a:lnRef idx="1">
-            <a:schemeClr val="accent1"/>
-          </a:lnRef>
-          <a:fillRef idx="3">
-            <a:schemeClr val="accent1"/>
-          </a:fillRef>
-          <a:effectRef idx="2">
-            <a:schemeClr val="accent1"/>
-          </a:effectRef>
-          <a:fontRef idx="minor">
-            <a:schemeClr val="lt1"/>
-          </a:fontRef>
-        </p:style>
-        <p:txBody>
-          <a:bodyPr rtlCol="0" anchor="ctr"/>
-          <a:lstStyle/>
-          <a:p>
-            <a:pPr algn="ctr"/>
-          </a:p>
-        </p:txBody>
-      </p:sp>
-      <p:sp>
-        <p:nvSpPr>
-          <p:cNvPr id="4" name="TextBox 3"/>
+          <p:cNvPr id="3" name="TextBox 2"/>
           <p:cNvSpPr txBox="1"/>
           <p:nvPr/>
         </p:nvSpPr>
         <p:spPr>
           <a:xfrm>
-            <a:off x="621792" y="1225296"/>
-            <a:ext cx="3749039" cy="237744"/>
+            <a:off x="457200" y="1097280"/>
+            <a:ext cx="8229600" cy="320040"/>
           </a:xfrm>
           <a:prstGeom prst="rect">
             <a:avLst/>
@@ -6488,508 +6921,50 @@
           <a:p>
             <a:pPr algn="l"/>
             <a:r>
-              <a:rPr sz="1050" b="1" i="0">
-                <a:solidFill>
-                  <a:srgbClr val="3366CC"/>
+              <a:rPr sz="1100" b="1" i="0">
+                <a:solidFill>
+                  <a:srgbClr val="1F497D"/>
                 </a:solidFill>
                 <a:latin typeface="Calibri"/>
               </a:rPr>
-              <a:t>NO₂ y O₃: el camino ya está trazado</a:t>
-            </a:r>
-          </a:p>
-        </p:txBody>
-      </p:sp>
-      <p:sp>
-        <p:nvSpPr>
-          <p:cNvPr id="5" name="TextBox 4"/>
-          <p:cNvSpPr txBox="1"/>
+              <a:t>284 de las 345 comunas no tienen ninguna estación; </a:t>
+            </a:r>
+            <a:r>
+              <a:rPr sz="1100" b="0" i="0">
+                <a:solidFill>
+                  <a:srgbClr val="52514E"/>
+                </a:solidFill>
+                <a:latin typeface="Calibri"/>
+              </a:rPr>
+              <a:t>y para los gases la red efectiva es cerca de la mitad que para el material particulado.</a:t>
+            </a:r>
+          </a:p>
+        </p:txBody>
+      </p:sp>
+      <p:pic>
+        <p:nvPicPr>
+          <p:cNvPr id="4" name="Picture 3" descr="brecha_sinca.png"/>
+          <p:cNvPicPr>
+            <a:picLocks noChangeAspect="1"/>
+          </p:cNvPicPr>
           <p:nvPr/>
-        </p:nvSpPr>
-        <p:spPr>
-          <a:xfrm>
-            <a:off x="621792" y="1536192"/>
-            <a:ext cx="3712463" cy="1828800"/>
+        </p:nvPicPr>
+        <p:blipFill>
+          <a:blip r:embed="rId2"/>
+          <a:stretch>
+            <a:fillRect/>
+          </a:stretch>
+        </p:blipFill>
+        <p:spPr>
+          <a:xfrm>
+            <a:off x="251460" y="1426464"/>
+            <a:ext cx="8641080" cy="2713900"/>
           </a:xfrm>
           <a:prstGeom prst="rect">
             <a:avLst/>
           </a:prstGeom>
-          <a:noFill/>
-        </p:spPr>
-        <p:txBody>
-          <a:bodyPr wrap="square" lIns="0" rIns="0" tIns="0" bIns="0">
-            <a:spAutoFit/>
-          </a:bodyPr>
-          <a:lstStyle/>
-          <a:p>
-            <a:pPr>
-              <a:lnSpc>
-                <a:spcPct val="98000"/>
-              </a:lnSpc>
-              <a:spcAft>
-                <a:spcPts val="500"/>
-              </a:spcAft>
-            </a:pPr>
-            <a:r>
-              <a:rPr sz="840">
-                <a:solidFill>
-                  <a:srgbClr val="52514E"/>
-                </a:solidFill>
-                <a:latin typeface="Calibri"/>
-              </a:rPr>
-              <a:t>• LUR global de NO₂ anual: el precedente de escalar un gas a todo el planeta¹</a:t>
-            </a:r>
-          </a:p>
-          <a:p>
-            <a:pPr>
-              <a:lnSpc>
-                <a:spcPct val="98000"/>
-              </a:lnSpc>
-              <a:spcAft>
-                <a:spcPts val="500"/>
-              </a:spcAft>
-            </a:pPr>
-            <a:r>
-              <a:rPr sz="840">
-                <a:solidFill>
-                  <a:srgbClr val="52514E"/>
-                </a:solidFill>
-                <a:latin typeface="Calibri"/>
-              </a:rPr>
-              <a:t>• NO₂ diario sin huecos para China con IA espaciotemporal interpretable²</a:t>
-            </a:r>
-          </a:p>
-          <a:p>
-            <a:pPr>
-              <a:lnSpc>
-                <a:spcPct val="98000"/>
-              </a:lnSpc>
-              <a:spcAft>
-                <a:spcPts val="500"/>
-              </a:spcAft>
-            </a:pPr>
-            <a:r>
-              <a:rPr sz="840">
-                <a:solidFill>
-                  <a:srgbClr val="52514E"/>
-                </a:solidFill>
-                <a:latin typeface="Calibri"/>
-              </a:rPr>
-              <a:t>• Las superficies alimentan decisiones: asma pediátrica por NO₂³ y mortalidad por O₃ de largo plazo⁴</a:t>
-            </a:r>
-          </a:p>
-        </p:txBody>
-      </p:sp>
-      <p:sp>
-        <p:nvSpPr>
-          <p:cNvPr id="6" name="Rounded Rectangle 5"/>
-          <p:cNvSpPr/>
-          <p:nvPr/>
-        </p:nvSpPr>
-        <p:spPr>
-          <a:xfrm>
-            <a:off x="4645152" y="1115568"/>
-            <a:ext cx="4041648" cy="2377440"/>
-          </a:xfrm>
-          <a:prstGeom prst="roundRect">
-            <a:avLst>
-              <a:gd name="adj" fmla="val 10000"/>
-            </a:avLst>
-          </a:prstGeom>
-          <a:solidFill>
-            <a:srgbClr val="FDF2EC"/>
-          </a:solidFill>
-          <a:ln w="12700">
-            <a:solidFill>
-              <a:srgbClr val="B24E1C"/>
-            </a:solidFill>
-          </a:ln>
-          <a:effectLst/>
-        </p:spPr>
-        <p:style>
-          <a:lnRef idx="1">
-            <a:schemeClr val="accent1"/>
-          </a:lnRef>
-          <a:fillRef idx="3">
-            <a:schemeClr val="accent1"/>
-          </a:fillRef>
-          <a:effectRef idx="2">
-            <a:schemeClr val="accent1"/>
-          </a:effectRef>
-          <a:fontRef idx="minor">
-            <a:schemeClr val="lt1"/>
-          </a:fontRef>
-        </p:style>
-        <p:txBody>
-          <a:bodyPr rtlCol="0" anchor="ctr"/>
-          <a:lstStyle/>
-          <a:p>
-            <a:pPr algn="ctr"/>
-          </a:p>
-        </p:txBody>
-      </p:sp>
-      <p:sp>
-        <p:nvSpPr>
-          <p:cNvPr id="7" name="TextBox 6"/>
-          <p:cNvSpPr txBox="1"/>
-          <p:nvPr/>
-        </p:nvSpPr>
-        <p:spPr>
-          <a:xfrm>
-            <a:off x="4809744" y="1225296"/>
-            <a:ext cx="3749039" cy="237744"/>
-          </a:xfrm>
-          <a:prstGeom prst="rect">
-            <a:avLst/>
-          </a:prstGeom>
-          <a:noFill/>
-        </p:spPr>
-        <p:txBody>
-          <a:bodyPr wrap="square" anchor="t" lIns="0" rIns="0" tIns="0" bIns="0">
-            <a:spAutoFit/>
-          </a:bodyPr>
-          <a:lstStyle/>
-          <a:p>
-            <a:pPr algn="l"/>
-            <a:r>
-              <a:rPr sz="1050" b="1" i="0">
-                <a:solidFill>
-                  <a:srgbClr val="B24E1C"/>
-                </a:solidFill>
-                <a:latin typeface="Calibri"/>
-              </a:rPr>
-              <a:t>SO₂ y CO: los menos estudiados</a:t>
-            </a:r>
-          </a:p>
-        </p:txBody>
-      </p:sp>
-      <p:sp>
-        <p:nvSpPr>
-          <p:cNvPr id="8" name="TextBox 7"/>
-          <p:cNvSpPr txBox="1"/>
-          <p:nvPr/>
-        </p:nvSpPr>
-        <p:spPr>
-          <a:xfrm>
-            <a:off x="4809744" y="1536192"/>
-            <a:ext cx="3712463" cy="1828800"/>
-          </a:xfrm>
-          <a:prstGeom prst="rect">
-            <a:avLst/>
-          </a:prstGeom>
-          <a:noFill/>
-        </p:spPr>
-        <p:txBody>
-          <a:bodyPr wrap="square" lIns="0" rIns="0" tIns="0" bIns="0">
-            <a:spAutoFit/>
-          </a:bodyPr>
-          <a:lstStyle/>
-          <a:p>
-            <a:pPr>
-              <a:lnSpc>
-                <a:spcPct val="98000"/>
-              </a:lnSpc>
-              <a:spcAft>
-                <a:spcPts val="500"/>
-              </a:spcAft>
-            </a:pPr>
-            <a:r>
-              <a:rPr sz="840">
-                <a:solidFill>
-                  <a:srgbClr val="52514E"/>
-                </a:solidFill>
-                <a:latin typeface="Calibri"/>
-              </a:rPr>
-              <a:t>• Primer mapeo diario y sin huecos de NO₂, SO₂ y CO para China recién en 2023⁵</a:t>
-            </a:r>
-          </a:p>
-          <a:p>
-            <a:pPr>
-              <a:lnSpc>
-                <a:spcPct val="98000"/>
-              </a:lnSpc>
-              <a:spcAft>
-                <a:spcPts val="500"/>
-              </a:spcAft>
-            </a:pPr>
-            <a:r>
-              <a:rPr sz="840">
-                <a:solidFill>
-                  <a:srgbClr val="52514E"/>
-                </a:solidFill>
-                <a:latin typeface="Calibri"/>
-              </a:rPr>
-              <a:t>• La base instrumental existe: algoritmo SO₂ de TROPOMI⁶ y 20+ años de CO desde MOPITT⁷</a:t>
-            </a:r>
-          </a:p>
-          <a:p>
-            <a:pPr>
-              <a:lnSpc>
-                <a:spcPct val="98000"/>
-              </a:lnSpc>
-              <a:spcAft>
-                <a:spcPts val="500"/>
-              </a:spcAft>
-            </a:pPr>
-            <a:r>
-              <a:rPr sz="840">
-                <a:solidFill>
-                  <a:srgbClr val="52514E"/>
-                </a:solidFill>
-                <a:latin typeface="Calibri"/>
-              </a:rPr>
-              <a:t>• Fuera de estación el desempeño cae a R² 0.6 a 0.7⁵: medir esa caída importa</a:t>
-            </a:r>
-          </a:p>
-        </p:txBody>
-      </p:sp>
-      <p:sp>
-        <p:nvSpPr>
-          <p:cNvPr id="9" name="Rounded Rectangle 8"/>
-          <p:cNvSpPr/>
-          <p:nvPr/>
-        </p:nvSpPr>
-        <p:spPr>
-          <a:xfrm>
-            <a:off x="457200" y="3657600"/>
-            <a:ext cx="8229600" cy="402336"/>
-          </a:xfrm>
-          <a:prstGeom prst="roundRect">
-            <a:avLst>
-              <a:gd name="adj" fmla="val 10000"/>
-            </a:avLst>
-          </a:prstGeom>
-          <a:solidFill>
-            <a:srgbClr val="EAF2FD"/>
-          </a:solidFill>
-          <a:ln>
-            <a:noFill/>
-          </a:ln>
-          <a:effectLst/>
-        </p:spPr>
-        <p:style>
-          <a:lnRef idx="1">
-            <a:schemeClr val="accent1"/>
-          </a:lnRef>
-          <a:fillRef idx="3">
-            <a:schemeClr val="accent1"/>
-          </a:fillRef>
-          <a:effectRef idx="2">
-            <a:schemeClr val="accent1"/>
-          </a:effectRef>
-          <a:fontRef idx="minor">
-            <a:schemeClr val="lt1"/>
-          </a:fontRef>
-        </p:style>
-        <p:txBody>
-          <a:bodyPr rtlCol="0" anchor="ctr"/>
-          <a:lstStyle/>
-          <a:p>
-            <a:pPr algn="ctr"/>
-          </a:p>
-        </p:txBody>
-      </p:sp>
-      <p:sp>
-        <p:nvSpPr>
-          <p:cNvPr id="10" name="TextBox 9"/>
-          <p:cNvSpPr txBox="1"/>
-          <p:nvPr/>
-        </p:nvSpPr>
-        <p:spPr>
-          <a:xfrm>
-            <a:off x="621792" y="3712463"/>
-            <a:ext cx="7909560" cy="292608"/>
-          </a:xfrm>
-          <a:prstGeom prst="rect">
-            <a:avLst/>
-          </a:prstGeom>
-          <a:noFill/>
-        </p:spPr>
-        <p:txBody>
-          <a:bodyPr wrap="square" anchor="t" lIns="0" rIns="0" tIns="0" bIns="0">
-            <a:spAutoFit/>
-          </a:bodyPr>
-          <a:lstStyle/>
-          <a:p>
-            <a:pPr algn="l"/>
-            <a:r>
-              <a:rPr sz="919" b="1" i="0">
-                <a:solidFill>
-                  <a:srgbClr val="1F497D"/>
-                </a:solidFill>
-                <a:latin typeface="Calibri"/>
-              </a:rPr>
-              <a:t>Patrón geográfico: </a:t>
-            </a:r>
-            <a:r>
-              <a:rPr sz="919" b="0" i="0">
-                <a:solidFill>
-                  <a:srgbClr val="52514E"/>
-                </a:solidFill>
-                <a:latin typeface="Calibri"/>
-              </a:rPr>
-              <a:t>casi toda esta literatura se concentra en China, EE. UU. y Europa; Sudamérica no tiene un producto propio equivalente.</a:t>
-            </a:r>
-          </a:p>
-        </p:txBody>
-      </p:sp>
-      <p:sp>
-        <p:nvSpPr>
-          <p:cNvPr id="11" name="TextBox 10"/>
-          <p:cNvSpPr txBox="1"/>
-          <p:nvPr/>
-        </p:nvSpPr>
-        <p:spPr>
-          <a:xfrm>
-            <a:off x="457200" y="4114800"/>
-            <a:ext cx="4069080" cy="777239"/>
-          </a:xfrm>
-          <a:prstGeom prst="rect">
-            <a:avLst/>
-          </a:prstGeom>
-          <a:noFill/>
-        </p:spPr>
-        <p:txBody>
-          <a:bodyPr wrap="square" anchor="t" lIns="0" rIns="0" tIns="0" bIns="0">
-            <a:spAutoFit/>
-          </a:bodyPr>
-          <a:lstStyle/>
-          <a:p>
-            <a:pPr algn="l">
-              <a:spcAft>
-                <a:spcPts val="100"/>
-              </a:spcAft>
-            </a:pPr>
-            <a:r>
-              <a:rPr sz="590" b="0" i="0">
-                <a:solidFill>
-                  <a:srgbClr val="898781"/>
-                </a:solidFill>
-                <a:latin typeface="Calibri"/>
-              </a:rPr>
-              <a:t>¹ Larkin A. et al. Global land use regression model for nitrogen dioxide air pollution. Environ. Sci. Technol. 51 (2017). doi:10.1021/acs.est.7b01148</a:t>
-            </a:r>
-          </a:p>
-          <a:p>
-            <a:pPr algn="l">
-              <a:spcAft>
-                <a:spcPts val="100"/>
-              </a:spcAft>
-            </a:pPr>
-            <a:r>
-              <a:rPr sz="590" b="0" i="0">
-                <a:solidFill>
-                  <a:srgbClr val="898781"/>
-                </a:solidFill>
-                <a:latin typeface="Calibri"/>
-              </a:rPr>
-              <a:t>² Wei J. et al. Ground-level NO2 surveillance from space across China using interpretable spatiotemporally weighted artificial intelligence. Environ. Sci. Technol. 56 (2022). doi:10.1021/acs.est.2c03834</a:t>
-            </a:r>
-          </a:p>
-          <a:p>
-            <a:pPr algn="l">
-              <a:spcAft>
-                <a:spcPts val="100"/>
-              </a:spcAft>
-            </a:pPr>
-            <a:r>
-              <a:rPr sz="590" b="0" i="0">
-                <a:solidFill>
-                  <a:srgbClr val="898781"/>
-                </a:solidFill>
-                <a:latin typeface="Calibri"/>
-              </a:rPr>
-              <a:t>³ Anenberg S.C. et al. Long-term trends in urban NO2 concentrations and associated paediatric asthma incidence. The Lancet Planetary Health 6 (2022). doi:10.1016/S2542-5196(21)00255-2</a:t>
-            </a:r>
-          </a:p>
-          <a:p>
-            <a:pPr algn="l">
-              <a:spcAft>
-                <a:spcPts val="100"/>
-              </a:spcAft>
-            </a:pPr>
-            <a:r>
-              <a:rPr sz="590" b="0" i="0">
-                <a:solidFill>
-                  <a:srgbClr val="898781"/>
-                </a:solidFill>
-                <a:latin typeface="Calibri"/>
-              </a:rPr>
-              <a:t>⁴ Turner M.C. et al. Long-term ozone exposure and mortality in a large prospective study. Am. J. Respir. Crit. Care Med. 193 (2016). doi:10.1164/rccm.201508-1633OC</a:t>
-            </a:r>
-          </a:p>
-        </p:txBody>
-      </p:sp>
-      <p:sp>
-        <p:nvSpPr>
-          <p:cNvPr id="12" name="TextBox 11"/>
-          <p:cNvSpPr txBox="1"/>
-          <p:nvPr/>
-        </p:nvSpPr>
-        <p:spPr>
-          <a:xfrm>
-            <a:off x="4663440" y="4114800"/>
-            <a:ext cx="4023360" cy="777239"/>
-          </a:xfrm>
-          <a:prstGeom prst="rect">
-            <a:avLst/>
-          </a:prstGeom>
-          <a:noFill/>
-        </p:spPr>
-        <p:txBody>
-          <a:bodyPr wrap="square" anchor="t" lIns="0" rIns="0" tIns="0" bIns="0">
-            <a:spAutoFit/>
-          </a:bodyPr>
-          <a:lstStyle/>
-          <a:p>
-            <a:pPr algn="l">
-              <a:spcAft>
-                <a:spcPts val="100"/>
-              </a:spcAft>
-            </a:pPr>
-            <a:r>
-              <a:rPr sz="590" b="0" i="0">
-                <a:solidFill>
-                  <a:srgbClr val="898781"/>
-                </a:solidFill>
-                <a:latin typeface="Calibri"/>
-              </a:rPr>
-              <a:t>⁵ Wei J. et al. Ground-level gaseous pollutants (NO2, SO2, and CO) in China: daily seamless mapping and spatiotemporal variations. Atmos. Chem. Phys. 23, 1511–1532 (2023). doi:10.5194/acp-23-1511-2023</a:t>
-            </a:r>
-          </a:p>
-          <a:p>
-            <a:pPr algn="l">
-              <a:spcAft>
-                <a:spcPts val="100"/>
-              </a:spcAft>
-            </a:pPr>
-            <a:r>
-              <a:rPr sz="590" b="0" i="0">
-                <a:solidFill>
-                  <a:srgbClr val="898781"/>
-                </a:solidFill>
-                <a:latin typeface="Calibri"/>
-              </a:rPr>
-              <a:t>⁶ Theys N. et al. Sulfur dioxide retrievals from TROPOMI onboard Sentinel-5 Precursor: algorithm theoretical basis. Atmos. Meas. Tech. 10, 119–153 (2017). doi:10.5194/amt-10-119-2017</a:t>
-            </a:r>
-          </a:p>
-          <a:p>
-            <a:pPr algn="l">
-              <a:spcAft>
-                <a:spcPts val="100"/>
-              </a:spcAft>
-            </a:pPr>
-            <a:r>
-              <a:rPr sz="590" b="0" i="0">
-                <a:solidFill>
-                  <a:srgbClr val="898781"/>
-                </a:solidFill>
-                <a:latin typeface="Calibri"/>
-              </a:rPr>
-              <a:t>⁷ Deeter M.N. et al. The MOPITT Version 9 CO product. Atmos. Meas. Tech. 15 (2022). doi:10.5194/amt-15-2325-2022</a:t>
-            </a:r>
-          </a:p>
-        </p:txBody>
-      </p:sp>
+        </p:spPr>
+      </p:pic>
     </p:spTree>
     <p:extLst>
       <p:ext uri="{BB962C8B-B14F-4D97-AF65-F5344CB8AC3E}">
@@ -7042,7 +7017,7 @@
                 </a:solidFill>
                 <a:latin typeface="Calibri"/>
               </a:rPr>
-              <a:t>Cómo se ha hecho: cuatro familias de métodos</a:t>
+              <a:t>Trabajos relacionados (1): estado del arte internacional</a:t>
             </a:r>
             <a:endParaRPr lang="es-ES" dirty="0"/>
           </a:p>
@@ -7057,8 +7032,8 @@
           <p:nvPr/>
         </p:nvGraphicFramePr>
         <p:xfrm>
-          <a:off x="457200" y="1115568"/>
-          <a:ext cx="8229600" cy="1737360"/>
+          <a:off x="457200" y="1133856"/>
+          <a:ext cx="8229600" cy="1956816"/>
         </p:xfrm>
         <a:graphic>
           <a:graphicData uri="http://schemas.openxmlformats.org/drawingml/2006/table">
@@ -7067,11 +7042,11 @@
                 <a:tableStyleId>{5C22544A-7EE6-4342-B048-85BDC9FD1C3A}</a:tableStyleId>
               </a:tblPr>
               <a:tblGrid>
-                <a:gridCol w="2103120"/>
-                <a:gridCol w="3154680"/>
-                <a:gridCol w="2971800"/>
+                <a:gridCol w="1188720"/>
+                <a:gridCol w="4663440"/>
+                <a:gridCol w="2377440"/>
               </a:tblGrid>
-              <a:tr h="274320">
+              <a:tr h="310896">
                 <a:tc>
                   <a:txBody>
                     <a:bodyPr/>
@@ -7084,11 +7059,11 @@
                           </a:solidFill>
                           <a:latin typeface="Calibri"/>
                         </a:rPr>
-                        <a:t>Familia</a:t>
+                        <a:t>Contaminante</a:t>
                       </a:r>
                     </a:p>
                   </a:txBody>
-                  <a:tcPr marL="64008" marR="45720" marT="18288" marB="18288" anchor="ctr">
+                  <a:tcPr marL="64008" marR="45720" marT="27432" marB="27432" anchor="ctr">
                     <a:solidFill>
                       <a:srgbClr val="1F497D"/>
                     </a:solidFill>
@@ -7106,11 +7081,11 @@
                           </a:solidFill>
                           <a:latin typeface="Calibri"/>
                         </a:rPr>
-                        <a:t>Idea central</a:t>
+                        <a:t>Qué existe hoy</a:t>
                       </a:r>
                     </a:p>
                   </a:txBody>
-                  <a:tcPr marL="64008" marR="45720" marT="18288" marB="18288" anchor="ctr">
+                  <a:tcPr marL="64008" marR="45720" marT="27432" marB="27432" anchor="ctr">
                     <a:solidFill>
                       <a:srgbClr val="1F497D"/>
                     </a:solidFill>
@@ -7128,18 +7103,18 @@
                           </a:solidFill>
                           <a:latin typeface="Calibri"/>
                         </a:rPr>
-                        <a:t>Ejemplos verificados</a:t>
+                        <a:t>Desempeño reportado</a:t>
                       </a:r>
                     </a:p>
                   </a:txBody>
-                  <a:tcPr marL="64008" marR="45720" marT="18288" marB="18288" anchor="ctr">
+                  <a:tcPr marL="64008" marR="45720" marT="27432" marB="27432" anchor="ctr">
                     <a:solidFill>
                       <a:srgbClr val="1F497D"/>
                     </a:solidFill>
                   </a:tcPr>
                 </a:tc>
               </a:tr>
-              <a:tr h="365760">
+              <a:tr h="548640">
                 <a:tc>
                   <a:txBody>
                     <a:bodyPr/>
@@ -7152,11 +7127,11 @@
                           </a:solidFill>
                           <a:latin typeface="Calibri"/>
                         </a:rPr>
-                        <a:t>Regresión de uso de suelo (LUR)</a:t>
+                        <a:t>PM₂.₅</a:t>
                       </a:r>
                     </a:p>
                   </a:txBody>
-                  <a:tcPr marL="64008" marR="45720" marT="18288" marB="18288" anchor="ctr">
+                  <a:tcPr marL="64008" marR="45720" marT="27432" marB="27432" anchor="ctr">
                     <a:solidFill>
                       <a:srgbClr val="FFFFFF"/>
                     </a:solidFill>
@@ -7174,11 +7149,11 @@
                           </a:solidFill>
                           <a:latin typeface="Calibri"/>
                         </a:rPr>
-                        <a:t>predictores de suelo, vías y población explican el gradiente espacial</a:t>
+                        <a:t>Superficies globales mensuales con incertidumbre¹ ² y EE. UU. diario a 1 km con ensambles de aprendizaje automático³</a:t>
                       </a:r>
                     </a:p>
                   </a:txBody>
-                  <a:tcPr marL="64008" marR="45720" marT="18288" marB="18288" anchor="ctr">
+                  <a:tcPr marL="64008" marR="45720" marT="27432" marB="27432" anchor="ctr">
                     <a:solidFill>
                       <a:srgbClr val="FFFFFF"/>
                     </a:solidFill>
@@ -7196,18 +7171,18 @@
                           </a:solidFill>
                           <a:latin typeface="Calibri"/>
                         </a:rPr>
-                        <a:t>Hoek 2008 (revisión canónica)¹ · Larkin 2017²</a:t>
+                        <a:t>R² 0.81 en validación cruzada global²</a:t>
                       </a:r>
                     </a:p>
                   </a:txBody>
-                  <a:tcPr marL="64008" marR="45720" marT="18288" marB="18288" anchor="ctr">
+                  <a:tcPr marL="64008" marR="45720" marT="27432" marB="27432" anchor="ctr">
                     <a:solidFill>
                       <a:srgbClr val="FFFFFF"/>
                     </a:solidFill>
                   </a:tcPr>
                 </a:tc>
               </a:tr>
-              <a:tr h="365760">
+              <a:tr h="548640">
                 <a:tc>
                   <a:txBody>
                     <a:bodyPr/>
@@ -7220,11 +7195,11 @@
                           </a:solidFill>
                           <a:latin typeface="Calibri"/>
                         </a:rPr>
-                        <a:t>Geoestadística y GWR</a:t>
+                        <a:t>NO₂ y O₃</a:t>
                       </a:r>
                     </a:p>
                   </a:txBody>
-                  <a:tcPr marL="64008" marR="45720" marT="18288" marB="18288" anchor="ctr">
+                  <a:tcPr marL="64008" marR="45720" marT="27432" marB="27432" anchor="ctr">
                     <a:solidFill>
                       <a:srgbClr val="F2F6FC"/>
                     </a:solidFill>
@@ -7242,11 +7217,11 @@
                           </a:solidFill>
                           <a:latin typeface="Calibri"/>
                         </a:rPr>
-                        <a:t>coeficientes que varían en el espacio; kriging de residuos</a:t>
+                        <a:t>Regresión de uso de suelo global⁴ y productos diarios sin huecos para China con IA espaciotemporal⁵</a:t>
                       </a:r>
                     </a:p>
                   </a:txBody>
-                  <a:tcPr marL="64008" marR="45720" marT="18288" marB="18288" anchor="ctr">
+                  <a:tcPr marL="64008" marR="45720" marT="27432" marB="27432" anchor="ctr">
                     <a:solidFill>
                       <a:srgbClr val="F2F6FC"/>
                     </a:solidFill>
@@ -7264,18 +7239,18 @@
                           </a:solidFill>
                           <a:latin typeface="Calibri"/>
                         </a:rPr>
-                        <a:t>van Donkelaar 2016³</a:t>
+                        <a:t>R² ≈ 0.84 diario en CV⁶</a:t>
                       </a:r>
                     </a:p>
                   </a:txBody>
-                  <a:tcPr marL="64008" marR="45720" marT="18288" marB="18288" anchor="ctr">
+                  <a:tcPr marL="64008" marR="45720" marT="27432" marB="27432" anchor="ctr">
                     <a:solidFill>
                       <a:srgbClr val="F2F6FC"/>
                     </a:solidFill>
                   </a:tcPr>
                 </a:tc>
               </a:tr>
-              <a:tr h="365760">
+              <a:tr h="548640">
                 <a:tc>
                   <a:txBody>
                     <a:bodyPr/>
@@ -7288,11 +7263,11 @@
                           </a:solidFill>
                           <a:latin typeface="Calibri"/>
                         </a:rPr>
-                        <a:t>Aprendizaje automático</a:t>
+                        <a:t>SO₂ y CO</a:t>
                       </a:r>
                     </a:p>
                   </a:txBody>
-                  <a:tcPr marL="64008" marR="45720" marT="18288" marB="18288" anchor="ctr">
+                  <a:tcPr marL="64008" marR="45720" marT="27432" marB="27432" anchor="ctr">
                     <a:solidFill>
                       <a:srgbClr val="FFFFFF"/>
                     </a:solidFill>
@@ -7310,11 +7285,11 @@
                           </a:solidFill>
                           <a:latin typeface="Calibri"/>
                         </a:rPr>
-                        <a:t>boosting, bosques y ensambles espaciotemporales</a:t>
+                        <a:t>Los menos estudiados: el primer mapeo diario continuo (China) apareció recién en 2023⁶</a:t>
                       </a:r>
                     </a:p>
                   </a:txBody>
-                  <a:tcPr marL="64008" marR="45720" marT="18288" marB="18288" anchor="ctr">
+                  <a:tcPr marL="64008" marR="45720" marT="27432" marB="27432" anchor="ctr">
                     <a:solidFill>
                       <a:srgbClr val="FFFFFF"/>
                     </a:solidFill>
@@ -7332,81 +7307,13 @@
                           </a:solidFill>
                           <a:latin typeface="Calibri"/>
                         </a:rPr>
-                        <a:t>Di 2019⁴ · Wei 2022⁵ · Wei 2023⁶</a:t>
+                        <a:t>R² 0.80 a 0.84 en CV; 0.61 a 0.70 fuera de estación⁶</a:t>
                       </a:r>
                     </a:p>
                   </a:txBody>
-                  <a:tcPr marL="64008" marR="45720" marT="18288" marB="18288" anchor="ctr">
+                  <a:tcPr marL="64008" marR="45720" marT="27432" marB="27432" anchor="ctr">
                     <a:solidFill>
                       <a:srgbClr val="FFFFFF"/>
-                    </a:solidFill>
-                  </a:tcPr>
-                </a:tc>
-              </a:tr>
-              <a:tr h="365760">
-                <a:tc>
-                  <a:txBody>
-                    <a:bodyPr/>
-                    <a:lstStyle/>
-                    <a:p>
-                      <a:r>
-                        <a:rPr sz="860" b="1">
-                          <a:solidFill>
-                            <a:srgbClr val="1A1A1A"/>
-                          </a:solidFill>
-                          <a:latin typeface="Calibri"/>
-                        </a:rPr>
-                        <a:t>Híbridos físico-estadísticos</a:t>
-                      </a:r>
-                    </a:p>
-                  </a:txBody>
-                  <a:tcPr marL="64008" marR="45720" marT="18288" marB="18288" anchor="ctr">
-                    <a:solidFill>
-                      <a:srgbClr val="F2F6FC"/>
-                    </a:solidFill>
-                  </a:tcPr>
-                </a:tc>
-                <a:tc>
-                  <a:txBody>
-                    <a:bodyPr/>
-                    <a:lstStyle/>
-                    <a:p>
-                      <a:r>
-                        <a:rPr sz="860" b="0">
-                          <a:solidFill>
-                            <a:srgbClr val="1A1A1A"/>
-                          </a:solidFill>
-                          <a:latin typeface="Calibri"/>
-                        </a:rPr>
-                        <a:t>modelo químico + satélite + corrección con estaciones</a:t>
-                      </a:r>
-                    </a:p>
-                  </a:txBody>
-                  <a:tcPr marL="64008" marR="45720" marT="18288" marB="18288" anchor="ctr">
-                    <a:solidFill>
-                      <a:srgbClr val="F2F6FC"/>
-                    </a:solidFill>
-                  </a:tcPr>
-                </a:tc>
-                <a:tc>
-                  <a:txBody>
-                    <a:bodyPr/>
-                    <a:lstStyle/>
-                    <a:p>
-                      <a:r>
-                        <a:rPr sz="860" b="0">
-                          <a:solidFill>
-                            <a:srgbClr val="1A1A1A"/>
-                          </a:solidFill>
-                          <a:latin typeface="Calibri"/>
-                        </a:rPr>
-                        <a:t>van Donkelaar 2016³ y 2021⁷ · CAMS⁸ / GEOS-CF⁹ como insumo</a:t>
-                      </a:r>
-                    </a:p>
-                  </a:txBody>
-                  <a:tcPr marL="64008" marR="45720" marT="18288" marB="18288" anchor="ctr">
-                    <a:solidFill>
-                      <a:srgbClr val="F2F6FC"/>
                     </a:solidFill>
                   </a:tcPr>
                 </a:tc>
@@ -7423,8 +7330,8 @@
         </p:nvSpPr>
         <p:spPr>
           <a:xfrm>
-            <a:off x="457200" y="3255264"/>
-            <a:ext cx="8229600" cy="457200"/>
+            <a:off x="457200" y="3383280"/>
+            <a:ext cx="8229600" cy="548640"/>
           </a:xfrm>
           <a:prstGeom prst="roundRect">
             <a:avLst>
@@ -7469,8 +7376,8 @@
         </p:nvSpPr>
         <p:spPr>
           <a:xfrm>
-            <a:off x="621792" y="3319272"/>
-            <a:ext cx="7909560" cy="347472"/>
+            <a:off x="621792" y="3456432"/>
+            <a:ext cx="7909560" cy="420624"/>
           </a:xfrm>
           <a:prstGeom prst="rect">
             <a:avLst/>
@@ -7495,7 +7402,7 @@
                 </a:solidFill>
                 <a:latin typeface="Calibri"/>
               </a:rPr>
-              <a:t>Validación estándar del área: </a:t>
+              <a:t>Cuatro familias de métodos se repiten: </a:t>
             </a:r>
             <a:r>
               <a:rPr sz="900" b="0" i="0">
@@ -7504,7 +7411,7 @@
                 </a:solidFill>
                 <a:latin typeface="Calibri"/>
               </a:rPr>
-              <a:t>cross-validation espacial dejando estaciones fuera. Nuestra elección de LOSO y de los motores GWR, boosting y kriging sale directamente de estas cuatro familias.</a:t>
+              <a:t>regresión de uso de suelo⁷, geoestadística (GWR y kriging)², aprendizaje automático³ ⁵ e híbridos físico-estadísticos¹ ². La validación estándar es espacial, dejando estaciones fuera.</a:t>
             </a:r>
           </a:p>
         </p:txBody>
@@ -7517,8 +7424,8 @@
         </p:nvSpPr>
         <p:spPr>
           <a:xfrm>
-            <a:off x="457200" y="3858768"/>
-            <a:ext cx="4069080" cy="1033271"/>
+            <a:off x="457200" y="4059936"/>
+            <a:ext cx="4069080" cy="832103"/>
           </a:xfrm>
           <a:prstGeom prst="rect">
             <a:avLst/>
@@ -7537,13 +7444,13 @@
               </a:spcAft>
             </a:pPr>
             <a:r>
-              <a:rPr sz="620" b="0" i="0">
+              <a:rPr sz="590" b="0" i="0">
                 <a:solidFill>
                   <a:srgbClr val="898781"/>
                 </a:solidFill>
                 <a:latin typeface="Calibri"/>
               </a:rPr>
-              <a:t>¹ Hoek G. et al. A review of land-use regression models to assess spatial variation of outdoor air pollution. Atmospheric Environment 42 (2008). doi:10.1016/j.atmosenv.2008.05.057</a:t>
+              <a:t>¹ van Donkelaar A. et al. Global estimates of fine particulate matter using a combined geophysical-statistical method with information from satellites, models, and monitors. Environ. Sci. Technol. 50 (2016). doi:10.1021/acs.est.5b05833</a:t>
             </a:r>
           </a:p>
           <a:p>
@@ -7553,13 +7460,13 @@
               </a:spcAft>
             </a:pPr>
             <a:r>
-              <a:rPr sz="620" b="0" i="0">
+              <a:rPr sz="590" b="0" i="0">
                 <a:solidFill>
                   <a:srgbClr val="898781"/>
                 </a:solidFill>
                 <a:latin typeface="Calibri"/>
               </a:rPr>
-              <a:t>² Larkin A. et al. Global land use regression model for nitrogen dioxide air pollution. Environ. Sci. Technol. 51 (2017). doi:10.1021/acs.est.7b01148</a:t>
+              <a:t>² van Donkelaar A. et al. Monthly global estimates of fine particulate matter and their uncertainty. Environ. Sci. Technol. 55 (2021). doi:10.1021/acs.est.1c05309</a:t>
             </a:r>
           </a:p>
           <a:p>
@@ -7569,13 +7476,13 @@
               </a:spcAft>
             </a:pPr>
             <a:r>
-              <a:rPr sz="620" b="0" i="0">
+              <a:rPr sz="590" b="0" i="0">
                 <a:solidFill>
                   <a:srgbClr val="898781"/>
                 </a:solidFill>
                 <a:latin typeface="Calibri"/>
               </a:rPr>
-              <a:t>³ van Donkelaar A. et al. Global estimates of fine particulate matter using a combined geophysical-statistical method with information from satellites, models, and monitors. Environ. Sci. Technol. 50 (2016). doi:10.1021/acs.est.5b05833</a:t>
+              <a:t>³ Di Q. et al. An ensemble-based model of PM2.5 concentration across the contiguous United States with high spatiotemporal resolution. Environment International (2019). doi:10.1016/j.envint.2019.104909</a:t>
             </a:r>
           </a:p>
           <a:p>
@@ -7585,15 +7492,38 @@
               </a:spcAft>
             </a:pPr>
             <a:r>
-              <a:rPr sz="620" b="0" i="0">
+              <a:rPr sz="590" b="0" i="0">
                 <a:solidFill>
                   <a:srgbClr val="898781"/>
                 </a:solidFill>
                 <a:latin typeface="Calibri"/>
               </a:rPr>
-              <a:t>⁴ Di Q. et al. An ensemble-based model of PM2.5 concentration across the contiguous United States with high spatiotemporal resolution. Environment International (2019). doi:10.1016/j.envint.2019.104909</a:t>
-            </a:r>
-          </a:p>
+              <a:t>⁴ Larkin A. et al. Global land use regression model for nitrogen dioxide air pollution. Environ. Sci. Technol. 51 (2017). doi:10.1021/acs.est.7b01148</a:t>
+            </a:r>
+          </a:p>
+        </p:txBody>
+      </p:sp>
+      <p:sp>
+        <p:nvSpPr>
+          <p:cNvPr id="7" name="TextBox 6"/>
+          <p:cNvSpPr txBox="1"/>
+          <p:nvPr/>
+        </p:nvSpPr>
+        <p:spPr>
+          <a:xfrm>
+            <a:off x="4663440" y="4059936"/>
+            <a:ext cx="4023360" cy="832103"/>
+          </a:xfrm>
+          <a:prstGeom prst="rect">
+            <a:avLst/>
+          </a:prstGeom>
+          <a:noFill/>
+        </p:spPr>
+        <p:txBody>
+          <a:bodyPr wrap="square" anchor="t" lIns="0" rIns="0" tIns="0" bIns="0">
+            <a:spAutoFit/>
+          </a:bodyPr>
+          <a:lstStyle/>
           <a:p>
             <a:pPr algn="l">
               <a:spcAft>
@@ -7601,7 +7531,7 @@
               </a:spcAft>
             </a:pPr>
             <a:r>
-              <a:rPr sz="620" b="0" i="0">
+              <a:rPr sz="590" b="0" i="0">
                 <a:solidFill>
                   <a:srgbClr val="898781"/>
                 </a:solidFill>
@@ -7610,29 +7540,6 @@
               <a:t>⁵ Wei J. et al. Ground-level NO2 surveillance from space across China using interpretable spatiotemporally weighted artificial intelligence. Environ. Sci. Technol. 56 (2022). doi:10.1021/acs.est.2c03834</a:t>
             </a:r>
           </a:p>
-        </p:txBody>
-      </p:sp>
-      <p:sp>
-        <p:nvSpPr>
-          <p:cNvPr id="7" name="TextBox 6"/>
-          <p:cNvSpPr txBox="1"/>
-          <p:nvPr/>
-        </p:nvSpPr>
-        <p:spPr>
-          <a:xfrm>
-            <a:off x="4663440" y="3858768"/>
-            <a:ext cx="4023360" cy="1033271"/>
-          </a:xfrm>
-          <a:prstGeom prst="rect">
-            <a:avLst/>
-          </a:prstGeom>
-          <a:noFill/>
-        </p:spPr>
-        <p:txBody>
-          <a:bodyPr wrap="square" anchor="t" lIns="0" rIns="0" tIns="0" bIns="0">
-            <a:spAutoFit/>
-          </a:bodyPr>
-          <a:lstStyle/>
           <a:p>
             <a:pPr algn="l">
               <a:spcAft>
@@ -7640,7 +7547,7 @@
               </a:spcAft>
             </a:pPr>
             <a:r>
-              <a:rPr sz="620" b="0" i="0">
+              <a:rPr sz="590" b="0" i="0">
                 <a:solidFill>
                   <a:srgbClr val="898781"/>
                 </a:solidFill>
@@ -7656,45 +7563,13 @@
               </a:spcAft>
             </a:pPr>
             <a:r>
-              <a:rPr sz="620" b="0" i="0">
+              <a:rPr sz="590" b="0" i="0">
                 <a:solidFill>
                   <a:srgbClr val="898781"/>
                 </a:solidFill>
                 <a:latin typeface="Calibri"/>
               </a:rPr>
-              <a:t>⁷ van Donkelaar A. et al. Monthly global estimates of fine particulate matter and their uncertainty. Environ. Sci. Technol. 55 (2021). doi:10.1021/acs.est.1c05309</a:t>
-            </a:r>
-          </a:p>
-          <a:p>
-            <a:pPr algn="l">
-              <a:spcAft>
-                <a:spcPts val="100"/>
-              </a:spcAft>
-            </a:pPr>
-            <a:r>
-              <a:rPr sz="620" b="0" i="0">
-                <a:solidFill>
-                  <a:srgbClr val="898781"/>
-                </a:solidFill>
-                <a:latin typeface="Calibri"/>
-              </a:rPr>
-              <a:t>⁸ Inness A. et al. The CAMS reanalysis of atmospheric composition. Atmos. Chem. Phys. 19 (2019). doi:10.5194/acp-19-3515-2019</a:t>
-            </a:r>
-          </a:p>
-          <a:p>
-            <a:pPr algn="l">
-              <a:spcAft>
-                <a:spcPts val="100"/>
-              </a:spcAft>
-            </a:pPr>
-            <a:r>
-              <a:rPr sz="620" b="0" i="0">
-                <a:solidFill>
-                  <a:srgbClr val="898781"/>
-                </a:solidFill>
-                <a:latin typeface="Calibri"/>
-              </a:rPr>
-              <a:t>⁹ Keller C.A. et al. Description of the NASA GEOS-CF v1.0. J. Adv. Model. Earth Syst. 13 (2021). doi:10.1029/2020MS002413</a:t>
+              <a:t>⁷ Hoek G. et al. A review of land-use regression models to assess spatial variation of outdoor air pollution. Atmospheric Environment 42 (2008). doi:10.1016/j.atmosenv.2008.05.057</a:t>
             </a:r>
           </a:p>
         </p:txBody>
@@ -7751,22 +7626,1124 @@
                 </a:solidFill>
                 <a:latin typeface="Calibri"/>
               </a:rPr>
-              <a:t>Qué no se sabe: brechas y nuestro posicionamiento</a:t>
+              <a:t>Trabajos relacionados (2): estado del arte en Chile</a:t>
             </a:r>
             <a:endParaRPr lang="es-ES" dirty="0"/>
           </a:p>
         </p:txBody>
       </p:sp>
-      <p:sp>
-        <p:nvSpPr>
-          <p:cNvPr id="3" name="Rounded Rectangle 2"/>
+      <p:graphicFrame>
+        <p:nvGraphicFramePr>
+          <p:cNvPr id="3" name="Table 2"/>
+          <p:cNvGraphicFramePr>
+            <a:graphicFrameLocks noGrp="1"/>
+          </p:cNvGraphicFramePr>
+          <p:nvPr/>
+        </p:nvGraphicFramePr>
+        <p:xfrm>
+          <a:off x="457200" y="1097280"/>
+          <a:ext cx="8229600" cy="2002536"/>
+        </p:xfrm>
+        <a:graphic>
+          <a:graphicData uri="http://schemas.openxmlformats.org/drawingml/2006/table">
+            <a:tbl>
+              <a:tblPr firstRow="1" bandRow="1">
+                <a:tableStyleId>{5C22544A-7EE6-4342-B048-85BDC9FD1C3A}</a:tableStyleId>
+              </a:tblPr>
+              <a:tblGrid>
+                <a:gridCol w="1572768"/>
+                <a:gridCol w="932688"/>
+                <a:gridCol w="841248"/>
+                <a:gridCol w="1389888"/>
+                <a:gridCol w="1298448"/>
+                <a:gridCol w="2194560"/>
+              </a:tblGrid>
+              <a:tr h="274320">
+                <a:tc>
+                  <a:txBody>
+                    <a:bodyPr/>
+                    <a:lstStyle/>
+                    <a:p>
+                      <a:r>
+                        <a:rPr sz="819" b="1">
+                          <a:solidFill>
+                            <a:srgbClr val="FFFFFF"/>
+                          </a:solidFill>
+                          <a:latin typeface="Calibri"/>
+                        </a:rPr>
+                        <a:t>Trabajo</a:t>
+                      </a:r>
+                    </a:p>
+                  </a:txBody>
+                  <a:tcPr marL="45720" marR="27432" marT="9144" marB="9144" anchor="ctr">
+                    <a:solidFill>
+                      <a:srgbClr val="1F497D"/>
+                    </a:solidFill>
+                  </a:tcPr>
+                </a:tc>
+                <a:tc>
+                  <a:txBody>
+                    <a:bodyPr/>
+                    <a:lstStyle/>
+                    <a:p>
+                      <a:r>
+                        <a:rPr sz="819" b="1">
+                          <a:solidFill>
+                            <a:srgbClr val="FFFFFF"/>
+                          </a:solidFill>
+                          <a:latin typeface="Calibri"/>
+                        </a:rPr>
+                        <a:t>Contaminante</a:t>
+                      </a:r>
+                    </a:p>
+                  </a:txBody>
+                  <a:tcPr marL="45720" marR="27432" marT="9144" marB="9144" anchor="ctr">
+                    <a:solidFill>
+                      <a:srgbClr val="1F497D"/>
+                    </a:solidFill>
+                  </a:tcPr>
+                </a:tc>
+                <a:tc>
+                  <a:txBody>
+                    <a:bodyPr/>
+                    <a:lstStyle/>
+                    <a:p>
+                      <a:r>
+                        <a:rPr sz="819" b="1">
+                          <a:solidFill>
+                            <a:srgbClr val="FFFFFF"/>
+                          </a:solidFill>
+                          <a:latin typeface="Calibri"/>
+                        </a:rPr>
+                        <a:t>Zona</a:t>
+                      </a:r>
+                    </a:p>
+                  </a:txBody>
+                  <a:tcPr marL="45720" marR="27432" marT="9144" marB="9144" anchor="ctr">
+                    <a:solidFill>
+                      <a:srgbClr val="1F497D"/>
+                    </a:solidFill>
+                  </a:tcPr>
+                </a:tc>
+                <a:tc>
+                  <a:txBody>
+                    <a:bodyPr/>
+                    <a:lstStyle/>
+                    <a:p>
+                      <a:r>
+                        <a:rPr sz="819" b="1">
+                          <a:solidFill>
+                            <a:srgbClr val="FFFFFF"/>
+                          </a:solidFill>
+                          <a:latin typeface="Calibri"/>
+                        </a:rPr>
+                        <a:t>Datos</a:t>
+                      </a:r>
+                    </a:p>
+                  </a:txBody>
+                  <a:tcPr marL="45720" marR="27432" marT="9144" marB="9144" anchor="ctr">
+                    <a:solidFill>
+                      <a:srgbClr val="1F497D"/>
+                    </a:solidFill>
+                  </a:tcPr>
+                </a:tc>
+                <a:tc>
+                  <a:txBody>
+                    <a:bodyPr/>
+                    <a:lstStyle/>
+                    <a:p>
+                      <a:r>
+                        <a:rPr sz="819" b="1">
+                          <a:solidFill>
+                            <a:srgbClr val="FFFFFF"/>
+                          </a:solidFill>
+                          <a:latin typeface="Calibri"/>
+                        </a:rPr>
+                        <a:t>Método</a:t>
+                      </a:r>
+                    </a:p>
+                  </a:txBody>
+                  <a:tcPr marL="45720" marR="27432" marT="9144" marB="9144" anchor="ctr">
+                    <a:solidFill>
+                      <a:srgbClr val="1F497D"/>
+                    </a:solidFill>
+                  </a:tcPr>
+                </a:tc>
+                <a:tc>
+                  <a:txBody>
+                    <a:bodyPr/>
+                    <a:lstStyle/>
+                    <a:p>
+                      <a:r>
+                        <a:rPr sz="819" b="1">
+                          <a:solidFill>
+                            <a:srgbClr val="FFFFFF"/>
+                          </a:solidFill>
+                          <a:latin typeface="Calibri"/>
+                        </a:rPr>
+                        <a:t>Principal limitación</a:t>
+                      </a:r>
+                    </a:p>
+                  </a:txBody>
+                  <a:tcPr marL="45720" marR="27432" marT="9144" marB="9144" anchor="ctr">
+                    <a:solidFill>
+                      <a:srgbClr val="1F497D"/>
+                    </a:solidFill>
+                  </a:tcPr>
+                </a:tc>
+              </a:tr>
+              <a:tr h="246888">
+                <a:tc>
+                  <a:txBody>
+                    <a:bodyPr/>
+                    <a:lstStyle/>
+                    <a:p>
+                      <a:r>
+                        <a:rPr sz="720" b="1">
+                          <a:solidFill>
+                            <a:srgbClr val="1A1A1A"/>
+                          </a:solidFill>
+                          <a:latin typeface="Calibri"/>
+                        </a:rPr>
+                        <a:t>Pérez 2000¹</a:t>
+                      </a:r>
+                    </a:p>
+                  </a:txBody>
+                  <a:tcPr marL="45720" marR="27432" marT="9144" marB="9144" anchor="ctr">
+                    <a:solidFill>
+                      <a:srgbClr val="FFFFFF"/>
+                    </a:solidFill>
+                  </a:tcPr>
+                </a:tc>
+                <a:tc>
+                  <a:txBody>
+                    <a:bodyPr/>
+                    <a:lstStyle/>
+                    <a:p>
+                      <a:r>
+                        <a:rPr sz="720" b="0">
+                          <a:solidFill>
+                            <a:srgbClr val="1A1A1A"/>
+                          </a:solidFill>
+                          <a:latin typeface="Calibri"/>
+                        </a:rPr>
+                        <a:t>PM₂.₅</a:t>
+                      </a:r>
+                    </a:p>
+                  </a:txBody>
+                  <a:tcPr marL="45720" marR="27432" marT="9144" marB="9144" anchor="ctr">
+                    <a:solidFill>
+                      <a:srgbClr val="FFFFFF"/>
+                    </a:solidFill>
+                  </a:tcPr>
+                </a:tc>
+                <a:tc>
+                  <a:txBody>
+                    <a:bodyPr/>
+                    <a:lstStyle/>
+                    <a:p>
+                      <a:r>
+                        <a:rPr sz="720" b="0">
+                          <a:solidFill>
+                            <a:srgbClr val="1A1A1A"/>
+                          </a:solidFill>
+                          <a:latin typeface="Calibri"/>
+                        </a:rPr>
+                        <a:t>Santiago</a:t>
+                      </a:r>
+                    </a:p>
+                  </a:txBody>
+                  <a:tcPr marL="45720" marR="27432" marT="9144" marB="9144" anchor="ctr">
+                    <a:solidFill>
+                      <a:srgbClr val="FFFFFF"/>
+                    </a:solidFill>
+                  </a:tcPr>
+                </a:tc>
+                <a:tc>
+                  <a:txBody>
+                    <a:bodyPr/>
+                    <a:lstStyle/>
+                    <a:p>
+                      <a:r>
+                        <a:rPr sz="720" b="0">
+                          <a:solidFill>
+                            <a:srgbClr val="1A1A1A"/>
+                          </a:solidFill>
+                          <a:latin typeface="Calibri"/>
+                        </a:rPr>
+                        <a:t>1 estación, horario</a:t>
+                      </a:r>
+                    </a:p>
+                  </a:txBody>
+                  <a:tcPr marL="45720" marR="27432" marT="9144" marB="9144" anchor="ctr">
+                    <a:solidFill>
+                      <a:srgbClr val="FFFFFF"/>
+                    </a:solidFill>
+                  </a:tcPr>
+                </a:tc>
+                <a:tc>
+                  <a:txBody>
+                    <a:bodyPr/>
+                    <a:lstStyle/>
+                    <a:p>
+                      <a:r>
+                        <a:rPr sz="720" b="0">
+                          <a:solidFill>
+                            <a:srgbClr val="1A1A1A"/>
+                          </a:solidFill>
+                          <a:latin typeface="Calibri"/>
+                        </a:rPr>
+                        <a:t>red neuronal</a:t>
+                      </a:r>
+                    </a:p>
+                  </a:txBody>
+                  <a:tcPr marL="45720" marR="27432" marT="9144" marB="9144" anchor="ctr">
+                    <a:solidFill>
+                      <a:srgbClr val="FFFFFF"/>
+                    </a:solidFill>
+                  </a:tcPr>
+                </a:tc>
+                <a:tc>
+                  <a:txBody>
+                    <a:bodyPr/>
+                    <a:lstStyle/>
+                    <a:p>
+                      <a:r>
+                        <a:rPr sz="720" b="0">
+                          <a:solidFill>
+                            <a:srgbClr val="1A1A1A"/>
+                          </a:solidFill>
+                          <a:latin typeface="Calibri"/>
+                        </a:rPr>
+                        <a:t>pronóstico temporal en un punto</a:t>
+                      </a:r>
+                    </a:p>
+                  </a:txBody>
+                  <a:tcPr marL="45720" marR="27432" marT="9144" marB="9144" anchor="ctr">
+                    <a:solidFill>
+                      <a:srgbClr val="FFFFFF"/>
+                    </a:solidFill>
+                  </a:tcPr>
+                </a:tc>
+              </a:tr>
+              <a:tr h="246888">
+                <a:tc>
+                  <a:txBody>
+                    <a:bodyPr/>
+                    <a:lstStyle/>
+                    <a:p>
+                      <a:r>
+                        <a:rPr sz="720" b="1">
+                          <a:solidFill>
+                            <a:srgbClr val="1A1A1A"/>
+                          </a:solidFill>
+                          <a:latin typeface="Calibri"/>
+                        </a:rPr>
+                        <a:t>Pérez y Gramsch 2016²</a:t>
+                      </a:r>
+                    </a:p>
+                  </a:txBody>
+                  <a:tcPr marL="45720" marR="27432" marT="9144" marB="9144" anchor="ctr">
+                    <a:solidFill>
+                      <a:srgbClr val="F2F6FC"/>
+                    </a:solidFill>
+                  </a:tcPr>
+                </a:tc>
+                <a:tc>
+                  <a:txBody>
+                    <a:bodyPr/>
+                    <a:lstStyle/>
+                    <a:p>
+                      <a:r>
+                        <a:rPr sz="720" b="0">
+                          <a:solidFill>
+                            <a:srgbClr val="1A1A1A"/>
+                          </a:solidFill>
+                          <a:latin typeface="Calibri"/>
+                        </a:rPr>
+                        <a:t>PM₂.₅</a:t>
+                      </a:r>
+                    </a:p>
+                  </a:txBody>
+                  <a:tcPr marL="45720" marR="27432" marT="9144" marB="9144" anchor="ctr">
+                    <a:solidFill>
+                      <a:srgbClr val="F2F6FC"/>
+                    </a:solidFill>
+                  </a:tcPr>
+                </a:tc>
+                <a:tc>
+                  <a:txBody>
+                    <a:bodyPr/>
+                    <a:lstStyle/>
+                    <a:p>
+                      <a:r>
+                        <a:rPr sz="720" b="0">
+                          <a:solidFill>
+                            <a:srgbClr val="1A1A1A"/>
+                          </a:solidFill>
+                          <a:latin typeface="Calibri"/>
+                        </a:rPr>
+                        <a:t>Santiago</a:t>
+                      </a:r>
+                    </a:p>
+                  </a:txBody>
+                  <a:tcPr marL="45720" marR="27432" marT="9144" marB="9144" anchor="ctr">
+                    <a:solidFill>
+                      <a:srgbClr val="F2F6FC"/>
+                    </a:solidFill>
+                  </a:tcPr>
+                </a:tc>
+                <a:tc>
+                  <a:txBody>
+                    <a:bodyPr/>
+                    <a:lstStyle/>
+                    <a:p>
+                      <a:r>
+                        <a:rPr sz="720" b="0">
+                          <a:solidFill>
+                            <a:srgbClr val="1A1A1A"/>
+                          </a:solidFill>
+                          <a:latin typeface="Calibri"/>
+                        </a:rPr>
+                        <a:t>estaciones + meteorología</a:t>
+                      </a:r>
+                    </a:p>
+                  </a:txBody>
+                  <a:tcPr marL="45720" marR="27432" marT="9144" marB="9144" anchor="ctr">
+                    <a:solidFill>
+                      <a:srgbClr val="F2F6FC"/>
+                    </a:solidFill>
+                  </a:tcPr>
+                </a:tc>
+                <a:tc>
+                  <a:txBody>
+                    <a:bodyPr/>
+                    <a:lstStyle/>
+                    <a:p>
+                      <a:r>
+                        <a:rPr sz="720" b="0">
+                          <a:solidFill>
+                            <a:srgbClr val="1A1A1A"/>
+                          </a:solidFill>
+                          <a:latin typeface="Calibri"/>
+                        </a:rPr>
+                        <a:t>red neuronal</a:t>
+                      </a:r>
+                    </a:p>
+                  </a:txBody>
+                  <a:tcPr marL="45720" marR="27432" marT="9144" marB="9144" anchor="ctr">
+                    <a:solidFill>
+                      <a:srgbClr val="F2F6FC"/>
+                    </a:solidFill>
+                  </a:tcPr>
+                </a:tc>
+                <a:tc>
+                  <a:txBody>
+                    <a:bodyPr/>
+                    <a:lstStyle/>
+                    <a:p>
+                      <a:r>
+                        <a:rPr sz="720" b="0">
+                          <a:solidFill>
+                            <a:srgbClr val="1A1A1A"/>
+                          </a:solidFill>
+                          <a:latin typeface="Calibri"/>
+                        </a:rPr>
+                        <a:t>episodios nocturnos; sin superficie espacial</a:t>
+                      </a:r>
+                    </a:p>
+                  </a:txBody>
+                  <a:tcPr marL="45720" marR="27432" marT="9144" marB="9144" anchor="ctr">
+                    <a:solidFill>
+                      <a:srgbClr val="F2F6FC"/>
+                    </a:solidFill>
+                  </a:tcPr>
+                </a:tc>
+              </a:tr>
+              <a:tr h="246888">
+                <a:tc>
+                  <a:txBody>
+                    <a:bodyPr/>
+                    <a:lstStyle/>
+                    <a:p>
+                      <a:r>
+                        <a:rPr sz="720" b="1">
+                          <a:solidFill>
+                            <a:srgbClr val="1A1A1A"/>
+                          </a:solidFill>
+                          <a:latin typeface="Calibri"/>
+                        </a:rPr>
+                        <a:t>Menares 2021³</a:t>
+                      </a:r>
+                    </a:p>
+                  </a:txBody>
+                  <a:tcPr marL="45720" marR="27432" marT="9144" marB="9144" anchor="ctr">
+                    <a:solidFill>
+                      <a:srgbClr val="FFFFFF"/>
+                    </a:solidFill>
+                  </a:tcPr>
+                </a:tc>
+                <a:tc>
+                  <a:txBody>
+                    <a:bodyPr/>
+                    <a:lstStyle/>
+                    <a:p>
+                      <a:r>
+                        <a:rPr sz="720" b="0">
+                          <a:solidFill>
+                            <a:srgbClr val="1A1A1A"/>
+                          </a:solidFill>
+                          <a:latin typeface="Calibri"/>
+                        </a:rPr>
+                        <a:t>PM₂.₅</a:t>
+                      </a:r>
+                    </a:p>
+                  </a:txBody>
+                  <a:tcPr marL="45720" marR="27432" marT="9144" marB="9144" anchor="ctr">
+                    <a:solidFill>
+                      <a:srgbClr val="FFFFFF"/>
+                    </a:solidFill>
+                  </a:tcPr>
+                </a:tc>
+                <a:tc>
+                  <a:txBody>
+                    <a:bodyPr/>
+                    <a:lstStyle/>
+                    <a:p>
+                      <a:r>
+                        <a:rPr sz="720" b="0">
+                          <a:solidFill>
+                            <a:srgbClr val="1A1A1A"/>
+                          </a:solidFill>
+                          <a:latin typeface="Calibri"/>
+                        </a:rPr>
+                        <a:t>Santiago</a:t>
+                      </a:r>
+                    </a:p>
+                  </a:txBody>
+                  <a:tcPr marL="45720" marR="27432" marT="9144" marB="9144" anchor="ctr">
+                    <a:solidFill>
+                      <a:srgbClr val="FFFFFF"/>
+                    </a:solidFill>
+                  </a:tcPr>
+                </a:tc>
+                <a:tc>
+                  <a:txBody>
+                    <a:bodyPr/>
+                    <a:lstStyle/>
+                    <a:p>
+                      <a:r>
+                        <a:rPr sz="720" b="0">
+                          <a:solidFill>
+                            <a:srgbClr val="1A1A1A"/>
+                          </a:solidFill>
+                          <a:latin typeface="Calibri"/>
+                        </a:rPr>
+                        <a:t>10 años, 3 zonas</a:t>
+                      </a:r>
+                    </a:p>
+                  </a:txBody>
+                  <a:tcPr marL="45720" marR="27432" marT="9144" marB="9144" anchor="ctr">
+                    <a:solidFill>
+                      <a:srgbClr val="FFFFFF"/>
+                    </a:solidFill>
+                  </a:tcPr>
+                </a:tc>
+                <a:tc>
+                  <a:txBody>
+                    <a:bodyPr/>
+                    <a:lstStyle/>
+                    <a:p>
+                      <a:r>
+                        <a:rPr sz="720" b="0">
+                          <a:solidFill>
+                            <a:srgbClr val="1A1A1A"/>
+                          </a:solidFill>
+                          <a:latin typeface="Calibri"/>
+                        </a:rPr>
+                        <a:t>LSTM / deep learning</a:t>
+                      </a:r>
+                    </a:p>
+                  </a:txBody>
+                  <a:tcPr marL="45720" marR="27432" marT="9144" marB="9144" anchor="ctr">
+                    <a:solidFill>
+                      <a:srgbClr val="FFFFFF"/>
+                    </a:solidFill>
+                  </a:tcPr>
+                </a:tc>
+                <a:tc>
+                  <a:txBody>
+                    <a:bodyPr/>
+                    <a:lstStyle/>
+                    <a:p>
+                      <a:r>
+                        <a:rPr sz="720" b="0">
+                          <a:solidFill>
+                            <a:srgbClr val="1A1A1A"/>
+                          </a:solidFill>
+                          <a:latin typeface="Calibri"/>
+                        </a:rPr>
+                        <a:t>solo zonas ya monitoreadas</a:t>
+                      </a:r>
+                    </a:p>
+                  </a:txBody>
+                  <a:tcPr marL="45720" marR="27432" marT="9144" marB="9144" anchor="ctr">
+                    <a:solidFill>
+                      <a:srgbClr val="FFFFFF"/>
+                    </a:solidFill>
+                  </a:tcPr>
+                </a:tc>
+              </a:tr>
+              <a:tr h="246888">
+                <a:tc>
+                  <a:txBody>
+                    <a:bodyPr/>
+                    <a:lstStyle/>
+                    <a:p>
+                      <a:r>
+                        <a:rPr sz="720" b="1">
+                          <a:solidFill>
+                            <a:srgbClr val="1A1A1A"/>
+                          </a:solidFill>
+                          <a:latin typeface="Calibri"/>
+                        </a:rPr>
+                        <a:t>Peralta 2022⁴</a:t>
+                      </a:r>
+                    </a:p>
+                  </a:txBody>
+                  <a:tcPr marL="45720" marR="27432" marT="9144" marB="9144" anchor="ctr">
+                    <a:solidFill>
+                      <a:srgbClr val="F2F6FC"/>
+                    </a:solidFill>
+                  </a:tcPr>
+                </a:tc>
+                <a:tc>
+                  <a:txBody>
+                    <a:bodyPr/>
+                    <a:lstStyle/>
+                    <a:p>
+                      <a:r>
+                        <a:rPr sz="720" b="0">
+                          <a:solidFill>
+                            <a:srgbClr val="1A1A1A"/>
+                          </a:solidFill>
+                          <a:latin typeface="Calibri"/>
+                        </a:rPr>
+                        <a:t>PM₂.₅</a:t>
+                      </a:r>
+                    </a:p>
+                  </a:txBody>
+                  <a:tcPr marL="45720" marR="27432" marT="9144" marB="9144" anchor="ctr">
+                    <a:solidFill>
+                      <a:srgbClr val="F2F6FC"/>
+                    </a:solidFill>
+                  </a:tcPr>
+                </a:tc>
+                <a:tc>
+                  <a:txBody>
+                    <a:bodyPr/>
+                    <a:lstStyle/>
+                    <a:p>
+                      <a:r>
+                        <a:rPr sz="720" b="0">
+                          <a:solidFill>
+                            <a:srgbClr val="1A1A1A"/>
+                          </a:solidFill>
+                          <a:latin typeface="Calibri"/>
+                        </a:rPr>
+                        <a:t>Santiago</a:t>
+                      </a:r>
+                    </a:p>
+                  </a:txBody>
+                  <a:tcPr marL="45720" marR="27432" marT="9144" marB="9144" anchor="ctr">
+                    <a:solidFill>
+                      <a:srgbClr val="F2F6FC"/>
+                    </a:solidFill>
+                  </a:tcPr>
+                </a:tc>
+                <a:tc>
+                  <a:txBody>
+                    <a:bodyPr/>
+                    <a:lstStyle/>
+                    <a:p>
+                      <a:r>
+                        <a:rPr sz="720" b="0">
+                          <a:solidFill>
+                            <a:srgbClr val="1A1A1A"/>
+                          </a:solidFill>
+                          <a:latin typeface="Calibri"/>
+                        </a:rPr>
+                        <a:t>7 estaciones</a:t>
+                      </a:r>
+                    </a:p>
+                  </a:txBody>
+                  <a:tcPr marL="45720" marR="27432" marT="9144" marB="9144" anchor="ctr">
+                    <a:solidFill>
+                      <a:srgbClr val="F2F6FC"/>
+                    </a:solidFill>
+                  </a:tcPr>
+                </a:tc>
+                <a:tc>
+                  <a:txBody>
+                    <a:bodyPr/>
+                    <a:lstStyle/>
+                    <a:p>
+                      <a:r>
+                        <a:rPr sz="720" b="0">
+                          <a:solidFill>
+                            <a:srgbClr val="1A1A1A"/>
+                          </a:solidFill>
+                          <a:latin typeface="Calibri"/>
+                        </a:rPr>
+                        <a:t>LSTM espacio-temporal</a:t>
+                      </a:r>
+                    </a:p>
+                  </a:txBody>
+                  <a:tcPr marL="45720" marR="27432" marT="9144" marB="9144" anchor="ctr">
+                    <a:solidFill>
+                      <a:srgbClr val="F2F6FC"/>
+                    </a:solidFill>
+                  </a:tcPr>
+                </a:tc>
+                <a:tc>
+                  <a:txBody>
+                    <a:bodyPr/>
+                    <a:lstStyle/>
+                    <a:p>
+                      <a:r>
+                        <a:rPr sz="720" b="0">
+                          <a:solidFill>
+                            <a:srgbClr val="1A1A1A"/>
+                          </a:solidFill>
+                          <a:latin typeface="Calibri"/>
+                        </a:rPr>
+                        <a:t>R² cae de 0.74 (1 h) a 0.38 (24 h)</a:t>
+                      </a:r>
+                    </a:p>
+                  </a:txBody>
+                  <a:tcPr marL="45720" marR="27432" marT="9144" marB="9144" anchor="ctr">
+                    <a:solidFill>
+                      <a:srgbClr val="F2F6FC"/>
+                    </a:solidFill>
+                  </a:tcPr>
+                </a:tc>
+              </a:tr>
+              <a:tr h="246888">
+                <a:tc>
+                  <a:txBody>
+                    <a:bodyPr/>
+                    <a:lstStyle/>
+                    <a:p>
+                      <a:r>
+                        <a:rPr sz="720" b="1">
+                          <a:solidFill>
+                            <a:srgbClr val="1A1A1A"/>
+                          </a:solidFill>
+                          <a:latin typeface="Calibri"/>
+                        </a:rPr>
+                        <a:t>Pérez y Menares 2020⁵</a:t>
+                      </a:r>
+                    </a:p>
+                  </a:txBody>
+                  <a:tcPr marL="45720" marR="27432" marT="9144" marB="9144" anchor="ctr">
+                    <a:solidFill>
+                      <a:srgbClr val="FFFFFF"/>
+                    </a:solidFill>
+                  </a:tcPr>
+                </a:tc>
+                <a:tc>
+                  <a:txBody>
+                    <a:bodyPr/>
+                    <a:lstStyle/>
+                    <a:p>
+                      <a:r>
+                        <a:rPr sz="720" b="0">
+                          <a:solidFill>
+                            <a:srgbClr val="1A1A1A"/>
+                          </a:solidFill>
+                          <a:latin typeface="Calibri"/>
+                        </a:rPr>
+                        <a:t>PM₂.₅</a:t>
+                      </a:r>
+                    </a:p>
+                  </a:txBody>
+                  <a:tcPr marL="45720" marR="27432" marT="9144" marB="9144" anchor="ctr">
+                    <a:solidFill>
+                      <a:srgbClr val="FFFFFF"/>
+                    </a:solidFill>
+                  </a:tcPr>
+                </a:tc>
+                <a:tc>
+                  <a:txBody>
+                    <a:bodyPr/>
+                    <a:lstStyle/>
+                    <a:p>
+                      <a:r>
+                        <a:rPr sz="720" b="0">
+                          <a:solidFill>
+                            <a:srgbClr val="1A1A1A"/>
+                          </a:solidFill>
+                          <a:latin typeface="Calibri"/>
+                        </a:rPr>
+                        <a:t>Coyhaique</a:t>
+                      </a:r>
+                    </a:p>
+                  </a:txBody>
+                  <a:tcPr marL="45720" marR="27432" marT="9144" marB="9144" anchor="ctr">
+                    <a:solidFill>
+                      <a:srgbClr val="FFFFFF"/>
+                    </a:solidFill>
+                  </a:tcPr>
+                </a:tc>
+                <a:tc>
+                  <a:txBody>
+                    <a:bodyPr/>
+                    <a:lstStyle/>
+                    <a:p>
+                      <a:r>
+                        <a:rPr sz="720" b="0">
+                          <a:solidFill>
+                            <a:srgbClr val="1A1A1A"/>
+                          </a:solidFill>
+                          <a:latin typeface="Calibri"/>
+                        </a:rPr>
+                        <a:t>estaciones + meteorología</a:t>
+                      </a:r>
+                    </a:p>
+                  </a:txBody>
+                  <a:tcPr marL="45720" marR="27432" marT="9144" marB="9144" anchor="ctr">
+                    <a:solidFill>
+                      <a:srgbClr val="FFFFFF"/>
+                    </a:solidFill>
+                  </a:tcPr>
+                </a:tc>
+                <a:tc>
+                  <a:txBody>
+                    <a:bodyPr/>
+                    <a:lstStyle/>
+                    <a:p>
+                      <a:r>
+                        <a:rPr sz="720" b="0">
+                          <a:solidFill>
+                            <a:srgbClr val="1A1A1A"/>
+                          </a:solidFill>
+                          <a:latin typeface="Calibri"/>
+                        </a:rPr>
+                        <a:t>red neuronal</a:t>
+                      </a:r>
+                    </a:p>
+                  </a:txBody>
+                  <a:tcPr marL="45720" marR="27432" marT="9144" marB="9144" anchor="ctr">
+                    <a:solidFill>
+                      <a:srgbClr val="FFFFFF"/>
+                    </a:solidFill>
+                  </a:tcPr>
+                </a:tc>
+                <a:tc>
+                  <a:txBody>
+                    <a:bodyPr/>
+                    <a:lstStyle/>
+                    <a:p>
+                      <a:r>
+                        <a:rPr sz="720" b="0">
+                          <a:solidFill>
+                            <a:srgbClr val="1A1A1A"/>
+                          </a:solidFill>
+                          <a:latin typeface="Calibri"/>
+                        </a:rPr>
+                        <a:t>una ciudad; episodios de leña</a:t>
+                      </a:r>
+                    </a:p>
+                  </a:txBody>
+                  <a:tcPr marL="45720" marR="27432" marT="9144" marB="9144" anchor="ctr">
+                    <a:solidFill>
+                      <a:srgbClr val="FFFFFF"/>
+                    </a:solidFill>
+                  </a:tcPr>
+                </a:tc>
+              </a:tr>
+              <a:tr h="246888">
+                <a:tc>
+                  <a:txBody>
+                    <a:bodyPr/>
+                    <a:lstStyle/>
+                    <a:p>
+                      <a:r>
+                        <a:rPr sz="720" b="1">
+                          <a:solidFill>
+                            <a:srgbClr val="1A1A1A"/>
+                          </a:solidFill>
+                          <a:latin typeface="Calibri"/>
+                        </a:rPr>
+                        <a:t>Escribano 2014⁶</a:t>
+                      </a:r>
+                    </a:p>
+                  </a:txBody>
+                  <a:tcPr marL="45720" marR="27432" marT="9144" marB="9144" anchor="ctr">
+                    <a:solidFill>
+                      <a:srgbClr val="F2F6FC"/>
+                    </a:solidFill>
+                  </a:tcPr>
+                </a:tc>
+                <a:tc>
+                  <a:txBody>
+                    <a:bodyPr/>
+                    <a:lstStyle/>
+                    <a:p>
+                      <a:r>
+                        <a:rPr sz="720" b="0">
+                          <a:solidFill>
+                            <a:srgbClr val="1A1A1A"/>
+                          </a:solidFill>
+                          <a:latin typeface="Calibri"/>
+                        </a:rPr>
+                        <a:t>AOD · PM</a:t>
+                      </a:r>
+                    </a:p>
+                  </a:txBody>
+                  <a:tcPr marL="45720" marR="27432" marT="9144" marB="9144" anchor="ctr">
+                    <a:solidFill>
+                      <a:srgbClr val="F2F6FC"/>
+                    </a:solidFill>
+                  </a:tcPr>
+                </a:tc>
+                <a:tc>
+                  <a:txBody>
+                    <a:bodyPr/>
+                    <a:lstStyle/>
+                    <a:p>
+                      <a:r>
+                        <a:rPr sz="720" b="0">
+                          <a:solidFill>
+                            <a:srgbClr val="1A1A1A"/>
+                          </a:solidFill>
+                          <a:latin typeface="Calibri"/>
+                        </a:rPr>
+                        <a:t>Santiago</a:t>
+                      </a:r>
+                    </a:p>
+                  </a:txBody>
+                  <a:tcPr marL="45720" marR="27432" marT="9144" marB="9144" anchor="ctr">
+                    <a:solidFill>
+                      <a:srgbClr val="F2F6FC"/>
+                    </a:solidFill>
+                  </a:tcPr>
+                </a:tc>
+                <a:tc>
+                  <a:txBody>
+                    <a:bodyPr/>
+                    <a:lstStyle/>
+                    <a:p>
+                      <a:r>
+                        <a:rPr sz="720" b="0">
+                          <a:solidFill>
+                            <a:srgbClr val="1A1A1A"/>
+                          </a:solidFill>
+                          <a:latin typeface="Calibri"/>
+                        </a:rPr>
+                        <a:t>MODIS + AERONET</a:t>
+                      </a:r>
+                    </a:p>
+                  </a:txBody>
+                  <a:tcPr marL="45720" marR="27432" marT="9144" marB="9144" anchor="ctr">
+                    <a:solidFill>
+                      <a:srgbClr val="F2F6FC"/>
+                    </a:solidFill>
+                  </a:tcPr>
+                </a:tc>
+                <a:tc>
+                  <a:txBody>
+                    <a:bodyPr/>
+                    <a:lstStyle/>
+                    <a:p>
+                      <a:r>
+                        <a:rPr sz="720" b="0">
+                          <a:solidFill>
+                            <a:srgbClr val="1A1A1A"/>
+                          </a:solidFill>
+                          <a:latin typeface="Calibri"/>
+                        </a:rPr>
+                        <a:t>modelo físico simple</a:t>
+                      </a:r>
+                    </a:p>
+                  </a:txBody>
+                  <a:tcPr marL="45720" marR="27432" marT="9144" marB="9144" anchor="ctr">
+                    <a:solidFill>
+                      <a:srgbClr val="F2F6FC"/>
+                    </a:solidFill>
+                  </a:tcPr>
+                </a:tc>
+                <a:tc>
+                  <a:txBody>
+                    <a:bodyPr/>
+                    <a:lstStyle/>
+                    <a:p>
+                      <a:r>
+                        <a:rPr sz="720" b="0">
+                          <a:solidFill>
+                            <a:srgbClr val="1A1A1A"/>
+                          </a:solidFill>
+                          <a:latin typeface="Calibri"/>
+                        </a:rPr>
+                        <a:t>el AOD solo no basta como proxy en Santiago</a:t>
+                      </a:r>
+                    </a:p>
+                  </a:txBody>
+                  <a:tcPr marL="45720" marR="27432" marT="9144" marB="9144" anchor="ctr">
+                    <a:solidFill>
+                      <a:srgbClr val="F2F6FC"/>
+                    </a:solidFill>
+                  </a:tcPr>
+                </a:tc>
+              </a:tr>
+              <a:tr h="246888">
+                <a:tc>
+                  <a:txBody>
+                    <a:bodyPr/>
+                    <a:lstStyle/>
+                    <a:p>
+                      <a:r>
+                        <a:rPr sz="720" b="1">
+                          <a:solidFill>
+                            <a:srgbClr val="1A1A1A"/>
+                          </a:solidFill>
+                          <a:latin typeface="Calibri"/>
+                        </a:rPr>
+                        <a:t>Villalobos 2017⁷ · Barraza 2017⁸</a:t>
+                      </a:r>
+                    </a:p>
+                  </a:txBody>
+                  <a:tcPr marL="45720" marR="27432" marT="9144" marB="9144" anchor="ctr">
+                    <a:solidFill>
+                      <a:srgbClr val="FFFFFF"/>
+                    </a:solidFill>
+                  </a:tcPr>
+                </a:tc>
+                <a:tc>
+                  <a:txBody>
+                    <a:bodyPr/>
+                    <a:lstStyle/>
+                    <a:p>
+                      <a:r>
+                        <a:rPr sz="720" b="0">
+                          <a:solidFill>
+                            <a:srgbClr val="1A1A1A"/>
+                          </a:solidFill>
+                          <a:latin typeface="Calibri"/>
+                        </a:rPr>
+                        <a:t>PM₂.₅ (fuentes)</a:t>
+                      </a:r>
+                    </a:p>
+                  </a:txBody>
+                  <a:tcPr marL="45720" marR="27432" marT="9144" marB="9144" anchor="ctr">
+                    <a:solidFill>
+                      <a:srgbClr val="FFFFFF"/>
+                    </a:solidFill>
+                  </a:tcPr>
+                </a:tc>
+                <a:tc>
+                  <a:txBody>
+                    <a:bodyPr/>
+                    <a:lstStyle/>
+                    <a:p>
+                      <a:r>
+                        <a:rPr sz="720" b="0">
+                          <a:solidFill>
+                            <a:srgbClr val="1A1A1A"/>
+                          </a:solidFill>
+                          <a:latin typeface="Calibri"/>
+                        </a:rPr>
+                        <a:t>Temuco · Santiago</a:t>
+                      </a:r>
+                    </a:p>
+                  </a:txBody>
+                  <a:tcPr marL="45720" marR="27432" marT="9144" marB="9144" anchor="ctr">
+                    <a:solidFill>
+                      <a:srgbClr val="FFFFFF"/>
+                    </a:solidFill>
+                  </a:tcPr>
+                </a:tc>
+                <a:tc>
+                  <a:txBody>
+                    <a:bodyPr/>
+                    <a:lstStyle/>
+                    <a:p>
+                      <a:r>
+                        <a:rPr sz="720" b="0">
+                          <a:solidFill>
+                            <a:srgbClr val="1A1A1A"/>
+                          </a:solidFill>
+                          <a:latin typeface="Calibri"/>
+                        </a:rPr>
+                        <a:t>filtros, especiación</a:t>
+                      </a:r>
+                    </a:p>
+                  </a:txBody>
+                  <a:tcPr marL="45720" marR="27432" marT="9144" marB="9144" anchor="ctr">
+                    <a:solidFill>
+                      <a:srgbClr val="FFFFFF"/>
+                    </a:solidFill>
+                  </a:tcPr>
+                </a:tc>
+                <a:tc>
+                  <a:txBody>
+                    <a:bodyPr/>
+                    <a:lstStyle/>
+                    <a:p>
+                      <a:r>
+                        <a:rPr sz="720" b="0">
+                          <a:solidFill>
+                            <a:srgbClr val="1A1A1A"/>
+                          </a:solidFill>
+                          <a:latin typeface="Calibri"/>
+                        </a:rPr>
+                        <a:t>modelo receptor (CMB)</a:t>
+                      </a:r>
+                    </a:p>
+                  </a:txBody>
+                  <a:tcPr marL="45720" marR="27432" marT="9144" marB="9144" anchor="ctr">
+                    <a:solidFill>
+                      <a:srgbClr val="FFFFFF"/>
+                    </a:solidFill>
+                  </a:tcPr>
+                </a:tc>
+                <a:tc>
+                  <a:txBody>
+                    <a:bodyPr/>
+                    <a:lstStyle/>
+                    <a:p>
+                      <a:r>
+                        <a:rPr sz="720" b="0">
+                          <a:solidFill>
+                            <a:srgbClr val="1A1A1A"/>
+                          </a:solidFill>
+                          <a:latin typeface="Calibri"/>
+                        </a:rPr>
+                        <a:t>caracterizan fuentes; no estiman superficies</a:t>
+                      </a:r>
+                    </a:p>
+                  </a:txBody>
+                  <a:tcPr marL="45720" marR="27432" marT="9144" marB="9144" anchor="ctr">
+                    <a:solidFill>
+                      <a:srgbClr val="FFFFFF"/>
+                    </a:solidFill>
+                  </a:tcPr>
+                </a:tc>
+              </a:tr>
+            </a:tbl>
+          </a:graphicData>
+        </a:graphic>
+      </p:graphicFrame>
+      <p:sp>
+        <p:nvSpPr>
+          <p:cNvPr id="4" name="Rounded Rectangle 3"/>
           <p:cNvSpPr/>
           <p:nvPr/>
         </p:nvSpPr>
         <p:spPr>
           <a:xfrm>
-            <a:off x="457200" y="1115568"/>
-            <a:ext cx="4297680" cy="658368"/>
+            <a:off x="457200" y="3401568"/>
+            <a:ext cx="8229600" cy="566928"/>
           </a:xfrm>
           <a:prstGeom prst="roundRect">
             <a:avLst>
@@ -7774,7 +8751,7 @@
             </a:avLst>
           </a:prstGeom>
           <a:solidFill>
-            <a:srgbClr val="F2F6FC"/>
+            <a:srgbClr val="17375D"/>
           </a:solidFill>
           <a:ln>
             <a:noFill/>
@@ -7805,72 +8782,52 @@
       </p:sp>
       <p:sp>
         <p:nvSpPr>
-          <p:cNvPr id="4" name="Oval 3"/>
-          <p:cNvSpPr/>
+          <p:cNvPr id="5" name="TextBox 4"/>
+          <p:cNvSpPr txBox="1"/>
           <p:nvPr/>
         </p:nvSpPr>
         <p:spPr>
           <a:xfrm>
-            <a:off x="566928" y="1243584"/>
-            <a:ext cx="402336" cy="402336"/>
-          </a:xfrm>
-          <a:prstGeom prst="ellipse">
-            <a:avLst/>
-          </a:prstGeom>
-          <a:solidFill>
-            <a:srgbClr val="1F497D"/>
-          </a:solidFill>
-          <a:ln>
-            <a:noFill/>
-          </a:ln>
-          <a:effectLst/>
-        </p:spPr>
-        <p:style>
-          <a:lnRef idx="1">
-            <a:schemeClr val="accent1"/>
-          </a:lnRef>
-          <a:fillRef idx="3">
-            <a:schemeClr val="accent1"/>
-          </a:fillRef>
-          <a:effectRef idx="2">
-            <a:schemeClr val="accent1"/>
-          </a:effectRef>
-          <a:fontRef idx="minor">
-            <a:schemeClr val="lt1"/>
-          </a:fontRef>
-        </p:style>
-        <p:txBody>
-          <a:bodyPr rtlCol="0" anchor="ctr"/>
-          <a:lstStyle/>
-          <a:p>
-            <a:pPr algn="ctr"/>
-          </a:p>
-        </p:txBody>
-      </p:sp>
-      <p:pic>
-        <p:nvPicPr>
-          <p:cNvPr id="5" name="Picture 4" descr="map_w.png"/>
-          <p:cNvPicPr>
-            <a:picLocks noChangeAspect="1"/>
-          </p:cNvPicPr>
-          <p:nvPr/>
-        </p:nvPicPr>
-        <p:blipFill>
-          <a:blip r:embed="rId2"/>
-          <a:stretch>
-            <a:fillRect/>
-          </a:stretch>
-        </p:blipFill>
-        <p:spPr>
-          <a:xfrm>
-            <a:off x="663488" y="1340144"/>
-            <a:ext cx="209214" cy="209214"/>
+            <a:off x="621792" y="3474720"/>
+            <a:ext cx="7909560" cy="438912"/>
           </a:xfrm>
           <a:prstGeom prst="rect">
             <a:avLst/>
           </a:prstGeom>
-        </p:spPr>
-      </p:pic>
+          <a:noFill/>
+        </p:spPr>
+        <p:txBody>
+          <a:bodyPr wrap="square" anchor="t" lIns="0" rIns="0" tIns="0" bIns="0">
+            <a:spAutoFit/>
+          </a:bodyPr>
+          <a:lstStyle/>
+          <a:p>
+            <a:pPr algn="l">
+              <a:lnSpc>
+                <a:spcPct val="98000"/>
+              </a:lnSpc>
+            </a:pPr>
+            <a:r>
+              <a:rPr sz="919" b="1" i="0">
+                <a:solidFill>
+                  <a:srgbClr val="FFE200"/>
+                </a:solidFill>
+                <a:latin typeface="Calibri"/>
+              </a:rPr>
+              <a:t>La contribución: </a:t>
+            </a:r>
+            <a:r>
+              <a:rPr sz="919" b="0" i="0">
+                <a:solidFill>
+                  <a:srgbClr val="FFFFFF"/>
+                </a:solidFill>
+                <a:latin typeface="Calibri"/>
+              </a:rPr>
+              <a:t>en Chile existen pronósticos temporales por estación y estudios de fuentes, pero no una superficie espacial continua, multi-contaminante y validada para todo el territorio. Eso es lo que este proyecto cubre.</a:t>
+            </a:r>
+          </a:p>
+        </p:txBody>
+      </p:sp>
       <p:sp>
         <p:nvSpPr>
           <p:cNvPr id="6" name="TextBox 5"/>
@@ -7879,806 +8836,8 @@
         </p:nvSpPr>
         <p:spPr>
           <a:xfrm>
-            <a:off x="1115568" y="1179576"/>
-            <a:ext cx="3566160" cy="201168"/>
-          </a:xfrm>
-          <a:prstGeom prst="rect">
-            <a:avLst/>
-          </a:prstGeom>
-          <a:noFill/>
-        </p:spPr>
-        <p:txBody>
-          <a:bodyPr wrap="square" anchor="t" lIns="0" rIns="0" tIns="0" bIns="0">
-            <a:spAutoFit/>
-          </a:bodyPr>
-          <a:lstStyle/>
-          <a:p>
-            <a:pPr algn="l"/>
-            <a:r>
-              <a:rPr sz="930" b="1" i="0">
-                <a:solidFill>
-                  <a:srgbClr val="1F497D"/>
-                </a:solidFill>
-                <a:latin typeface="Calibri"/>
-              </a:rPr>
-              <a:t>Cobertura geográfica</a:t>
-            </a:r>
-          </a:p>
-        </p:txBody>
-      </p:sp>
-      <p:sp>
-        <p:nvSpPr>
-          <p:cNvPr id="7" name="TextBox 6"/>
-          <p:cNvSpPr txBox="1"/>
-          <p:nvPr/>
-        </p:nvSpPr>
-        <p:spPr>
-          <a:xfrm>
-            <a:off x="1115568" y="1371600"/>
-            <a:ext cx="3529584" cy="384048"/>
-          </a:xfrm>
-          <a:prstGeom prst="rect">
-            <a:avLst/>
-          </a:prstGeom>
-          <a:noFill/>
-        </p:spPr>
-        <p:txBody>
-          <a:bodyPr wrap="square" anchor="t" lIns="0" rIns="0" tIns="0" bIns="0">
-            <a:spAutoFit/>
-          </a:bodyPr>
-          <a:lstStyle/>
-          <a:p>
-            <a:pPr algn="l">
-              <a:lnSpc>
-                <a:spcPct val="92000"/>
-              </a:lnSpc>
-            </a:pPr>
-            <a:r>
-              <a:rPr sz="750" b="0" i="0">
-                <a:solidFill>
-                  <a:srgbClr val="52514E"/>
-                </a:solidFill>
-                <a:latin typeface="Calibri"/>
-              </a:rPr>
-              <a:t>Hay productos multi-gas continuos para China, EE. UU. y Europa; para Chile y Sudamérica no existe un equivalente público y validado.</a:t>
-            </a:r>
-          </a:p>
-        </p:txBody>
-      </p:sp>
-      <p:sp>
-        <p:nvSpPr>
-          <p:cNvPr id="8" name="Rounded Rectangle 7"/>
-          <p:cNvSpPr/>
-          <p:nvPr/>
-        </p:nvSpPr>
-        <p:spPr>
-          <a:xfrm>
-            <a:off x="457200" y="1865376"/>
-            <a:ext cx="4297680" cy="658368"/>
-          </a:xfrm>
-          <a:prstGeom prst="roundRect">
-            <a:avLst>
-              <a:gd name="adj" fmla="val 10000"/>
-            </a:avLst>
-          </a:prstGeom>
-          <a:solidFill>
-            <a:srgbClr val="F2F6FC"/>
-          </a:solidFill>
-          <a:ln>
-            <a:noFill/>
-          </a:ln>
-          <a:effectLst/>
-        </p:spPr>
-        <p:style>
-          <a:lnRef idx="1">
-            <a:schemeClr val="accent1"/>
-          </a:lnRef>
-          <a:fillRef idx="3">
-            <a:schemeClr val="accent1"/>
-          </a:fillRef>
-          <a:effectRef idx="2">
-            <a:schemeClr val="accent1"/>
-          </a:effectRef>
-          <a:fontRef idx="minor">
-            <a:schemeClr val="lt1"/>
-          </a:fontRef>
-        </p:style>
-        <p:txBody>
-          <a:bodyPr rtlCol="0" anchor="ctr"/>
-          <a:lstStyle/>
-          <a:p>
-            <a:pPr algn="ctr"/>
-          </a:p>
-        </p:txBody>
-      </p:sp>
-      <p:sp>
-        <p:nvSpPr>
-          <p:cNvPr id="9" name="Oval 8"/>
-          <p:cNvSpPr/>
-          <p:nvPr/>
-        </p:nvSpPr>
-        <p:spPr>
-          <a:xfrm>
-            <a:off x="566928" y="1993392"/>
-            <a:ext cx="402336" cy="402336"/>
-          </a:xfrm>
-          <a:prstGeom prst="ellipse">
-            <a:avLst/>
-          </a:prstGeom>
-          <a:solidFill>
-            <a:srgbClr val="1F497D"/>
-          </a:solidFill>
-          <a:ln>
-            <a:noFill/>
-          </a:ln>
-          <a:effectLst/>
-        </p:spPr>
-        <p:style>
-          <a:lnRef idx="1">
-            <a:schemeClr val="accent1"/>
-          </a:lnRef>
-          <a:fillRef idx="3">
-            <a:schemeClr val="accent1"/>
-          </a:fillRef>
-          <a:effectRef idx="2">
-            <a:schemeClr val="accent1"/>
-          </a:effectRef>
-          <a:fontRef idx="minor">
-            <a:schemeClr val="lt1"/>
-          </a:fontRef>
-        </p:style>
-        <p:txBody>
-          <a:bodyPr rtlCol="0" anchor="ctr"/>
-          <a:lstStyle/>
-          <a:p>
-            <a:pPr algn="ctr"/>
-          </a:p>
-        </p:txBody>
-      </p:sp>
-      <p:pic>
-        <p:nvPicPr>
-          <p:cNvPr id="10" name="Picture 9" descr="warning_w.png"/>
-          <p:cNvPicPr>
-            <a:picLocks noChangeAspect="1"/>
-          </p:cNvPicPr>
-          <p:nvPr/>
-        </p:nvPicPr>
-        <p:blipFill>
-          <a:blip r:embed="rId3"/>
-          <a:stretch>
-            <a:fillRect/>
-          </a:stretch>
-        </p:blipFill>
-        <p:spPr>
-          <a:xfrm>
-            <a:off x="663488" y="2089952"/>
-            <a:ext cx="209214" cy="209214"/>
-          </a:xfrm>
-          <a:prstGeom prst="rect">
-            <a:avLst/>
-          </a:prstGeom>
-        </p:spPr>
-      </p:pic>
-      <p:sp>
-        <p:nvSpPr>
-          <p:cNvPr id="11" name="TextBox 10"/>
-          <p:cNvSpPr txBox="1"/>
-          <p:nvPr/>
-        </p:nvSpPr>
-        <p:spPr>
-          <a:xfrm>
-            <a:off x="1115568" y="1929384"/>
-            <a:ext cx="3566160" cy="201168"/>
-          </a:xfrm>
-          <a:prstGeom prst="rect">
-            <a:avLst/>
-          </a:prstGeom>
-          <a:noFill/>
-        </p:spPr>
-        <p:txBody>
-          <a:bodyPr wrap="square" anchor="t" lIns="0" rIns="0" tIns="0" bIns="0">
-            <a:spAutoFit/>
-          </a:bodyPr>
-          <a:lstStyle/>
-          <a:p>
-            <a:pPr algn="l"/>
-            <a:r>
-              <a:rPr sz="930" b="1" i="0">
-                <a:solidFill>
-                  <a:srgbClr val="1F497D"/>
-                </a:solidFill>
-                <a:latin typeface="Calibri"/>
-              </a:rPr>
-              <a:t>SO₂ y CO</a:t>
-            </a:r>
-          </a:p>
-        </p:txBody>
-      </p:sp>
-      <p:sp>
-        <p:nvSpPr>
-          <p:cNvPr id="12" name="TextBox 11"/>
-          <p:cNvSpPr txBox="1"/>
-          <p:nvPr/>
-        </p:nvSpPr>
-        <p:spPr>
-          <a:xfrm>
-            <a:off x="1115568" y="2121408"/>
-            <a:ext cx="3529584" cy="384048"/>
-          </a:xfrm>
-          <a:prstGeom prst="rect">
-            <a:avLst/>
-          </a:prstGeom>
-          <a:noFill/>
-        </p:spPr>
-        <p:txBody>
-          <a:bodyPr wrap="square" anchor="t" lIns="0" rIns="0" tIns="0" bIns="0">
-            <a:spAutoFit/>
-          </a:bodyPr>
-          <a:lstStyle/>
-          <a:p>
-            <a:pPr algn="l">
-              <a:lnSpc>
-                <a:spcPct val="92000"/>
-              </a:lnSpc>
-            </a:pPr>
-            <a:r>
-              <a:rPr sz="750" b="0" i="0">
-                <a:solidFill>
-                  <a:srgbClr val="52514E"/>
-                </a:solidFill>
-                <a:latin typeface="Calibri"/>
-              </a:rPr>
-              <a:t>Son los contaminantes menos modelados: el primer producto diario chino apareció recién en 2023.¹</a:t>
-            </a:r>
-          </a:p>
-        </p:txBody>
-      </p:sp>
-      <p:sp>
-        <p:nvSpPr>
-          <p:cNvPr id="13" name="Rounded Rectangle 12"/>
-          <p:cNvSpPr/>
-          <p:nvPr/>
-        </p:nvSpPr>
-        <p:spPr>
-          <a:xfrm>
-            <a:off x="457200" y="2615184"/>
-            <a:ext cx="4297680" cy="658368"/>
-          </a:xfrm>
-          <a:prstGeom prst="roundRect">
-            <a:avLst>
-              <a:gd name="adj" fmla="val 10000"/>
-            </a:avLst>
-          </a:prstGeom>
-          <a:solidFill>
-            <a:srgbClr val="F2F6FC"/>
-          </a:solidFill>
-          <a:ln>
-            <a:noFill/>
-          </a:ln>
-          <a:effectLst/>
-        </p:spPr>
-        <p:style>
-          <a:lnRef idx="1">
-            <a:schemeClr val="accent1"/>
-          </a:lnRef>
-          <a:fillRef idx="3">
-            <a:schemeClr val="accent1"/>
-          </a:fillRef>
-          <a:effectRef idx="2">
-            <a:schemeClr val="accent1"/>
-          </a:effectRef>
-          <a:fontRef idx="minor">
-            <a:schemeClr val="lt1"/>
-          </a:fontRef>
-        </p:style>
-        <p:txBody>
-          <a:bodyPr rtlCol="0" anchor="ctr"/>
-          <a:lstStyle/>
-          <a:p>
-            <a:pPr algn="ctr"/>
-          </a:p>
-        </p:txBody>
-      </p:sp>
-      <p:sp>
-        <p:nvSpPr>
-          <p:cNvPr id="14" name="Oval 13"/>
-          <p:cNvSpPr/>
-          <p:nvPr/>
-        </p:nvSpPr>
-        <p:spPr>
-          <a:xfrm>
-            <a:off x="566928" y="2743200"/>
-            <a:ext cx="402336" cy="402336"/>
-          </a:xfrm>
-          <a:prstGeom prst="ellipse">
-            <a:avLst/>
-          </a:prstGeom>
-          <a:solidFill>
-            <a:srgbClr val="1F497D"/>
-          </a:solidFill>
-          <a:ln>
-            <a:noFill/>
-          </a:ln>
-          <a:effectLst/>
-        </p:spPr>
-        <p:style>
-          <a:lnRef idx="1">
-            <a:schemeClr val="accent1"/>
-          </a:lnRef>
-          <a:fillRef idx="3">
-            <a:schemeClr val="accent1"/>
-          </a:fillRef>
-          <a:effectRef idx="2">
-            <a:schemeClr val="accent1"/>
-          </a:effectRef>
-          <a:fontRef idx="minor">
-            <a:schemeClr val="lt1"/>
-          </a:fontRef>
-        </p:style>
-        <p:txBody>
-          <a:bodyPr rtlCol="0" anchor="ctr"/>
-          <a:lstStyle/>
-          <a:p>
-            <a:pPr algn="ctr"/>
-          </a:p>
-        </p:txBody>
-      </p:sp>
-      <p:pic>
-        <p:nvPicPr>
-          <p:cNvPr id="15" name="Picture 14" descr="target_w.png"/>
-          <p:cNvPicPr>
-            <a:picLocks noChangeAspect="1"/>
-          </p:cNvPicPr>
-          <p:nvPr/>
-        </p:nvPicPr>
-        <p:blipFill>
-          <a:blip r:embed="rId4"/>
-          <a:stretch>
-            <a:fillRect/>
-          </a:stretch>
-        </p:blipFill>
-        <p:spPr>
-          <a:xfrm>
-            <a:off x="663488" y="2839760"/>
-            <a:ext cx="209214" cy="209214"/>
-          </a:xfrm>
-          <a:prstGeom prst="rect">
-            <a:avLst/>
-          </a:prstGeom>
-        </p:spPr>
-      </p:pic>
-      <p:sp>
-        <p:nvSpPr>
-          <p:cNvPr id="16" name="TextBox 15"/>
-          <p:cNvSpPr txBox="1"/>
-          <p:nvPr/>
-        </p:nvSpPr>
-        <p:spPr>
-          <a:xfrm>
-            <a:off x="1115568" y="2679191"/>
-            <a:ext cx="3566160" cy="201168"/>
-          </a:xfrm>
-          <a:prstGeom prst="rect">
-            <a:avLst/>
-          </a:prstGeom>
-          <a:noFill/>
-        </p:spPr>
-        <p:txBody>
-          <a:bodyPr wrap="square" anchor="t" lIns="0" rIns="0" tIns="0" bIns="0">
-            <a:spAutoFit/>
-          </a:bodyPr>
-          <a:lstStyle/>
-          <a:p>
-            <a:pPr algn="l"/>
-            <a:r>
-              <a:rPr sz="930" b="1" i="0">
-                <a:solidFill>
-                  <a:srgbClr val="1F497D"/>
-                </a:solidFill>
-                <a:latin typeface="Calibri"/>
-              </a:rPr>
-              <a:t>Redes ralas</a:t>
-            </a:r>
-          </a:p>
-        </p:txBody>
-      </p:sp>
-      <p:sp>
-        <p:nvSpPr>
-          <p:cNvPr id="17" name="TextBox 16"/>
-          <p:cNvSpPr txBox="1"/>
-          <p:nvPr/>
-        </p:nvSpPr>
-        <p:spPr>
-          <a:xfrm>
-            <a:off x="1115568" y="2871215"/>
-            <a:ext cx="3529584" cy="384048"/>
-          </a:xfrm>
-          <a:prstGeom prst="rect">
-            <a:avLst/>
-          </a:prstGeom>
-          <a:noFill/>
-        </p:spPr>
-        <p:txBody>
-          <a:bodyPr wrap="square" anchor="t" lIns="0" rIns="0" tIns="0" bIns="0">
-            <a:spAutoFit/>
-          </a:bodyPr>
-          <a:lstStyle/>
-          <a:p>
-            <a:pPr algn="l">
-              <a:lnSpc>
-                <a:spcPct val="92000"/>
-              </a:lnSpc>
-            </a:pPr>
-            <a:r>
-              <a:rPr sz="750" b="0" i="0">
-                <a:solidFill>
-                  <a:srgbClr val="52514E"/>
-                </a:solidFill>
-                <a:latin typeface="Calibri"/>
-              </a:rPr>
-              <a:t>Fuera de estación el R² cae a 0.6 a 0.7 incluso en China¹; las macrozonas extremas de Chile son justo ese caso difícil.</a:t>
-            </a:r>
-          </a:p>
-        </p:txBody>
-      </p:sp>
-      <p:sp>
-        <p:nvSpPr>
-          <p:cNvPr id="18" name="Rounded Rectangle 17"/>
-          <p:cNvSpPr/>
-          <p:nvPr/>
-        </p:nvSpPr>
-        <p:spPr>
-          <a:xfrm>
-            <a:off x="457200" y="3364991"/>
-            <a:ext cx="4297680" cy="658368"/>
-          </a:xfrm>
-          <a:prstGeom prst="roundRect">
-            <a:avLst>
-              <a:gd name="adj" fmla="val 10000"/>
-            </a:avLst>
-          </a:prstGeom>
-          <a:solidFill>
-            <a:srgbClr val="F2F6FC"/>
-          </a:solidFill>
-          <a:ln>
-            <a:noFill/>
-          </a:ln>
-          <a:effectLst/>
-        </p:spPr>
-        <p:style>
-          <a:lnRef idx="1">
-            <a:schemeClr val="accent1"/>
-          </a:lnRef>
-          <a:fillRef idx="3">
-            <a:schemeClr val="accent1"/>
-          </a:fillRef>
-          <a:effectRef idx="2">
-            <a:schemeClr val="accent1"/>
-          </a:effectRef>
-          <a:fontRef idx="minor">
-            <a:schemeClr val="lt1"/>
-          </a:fontRef>
-        </p:style>
-        <p:txBody>
-          <a:bodyPr rtlCol="0" anchor="ctr"/>
-          <a:lstStyle/>
-          <a:p>
-            <a:pPr algn="ctr"/>
-          </a:p>
-        </p:txBody>
-      </p:sp>
-      <p:sp>
-        <p:nvSpPr>
-          <p:cNvPr id="19" name="Oval 18"/>
-          <p:cNvSpPr/>
-          <p:nvPr/>
-        </p:nvSpPr>
-        <p:spPr>
-          <a:xfrm>
-            <a:off x="566928" y="3493008"/>
-            <a:ext cx="402336" cy="402336"/>
-          </a:xfrm>
-          <a:prstGeom prst="ellipse">
-            <a:avLst/>
-          </a:prstGeom>
-          <a:solidFill>
-            <a:srgbClr val="1F497D"/>
-          </a:solidFill>
-          <a:ln>
-            <a:noFill/>
-          </a:ln>
-          <a:effectLst/>
-        </p:spPr>
-        <p:style>
-          <a:lnRef idx="1">
-            <a:schemeClr val="accent1"/>
-          </a:lnRef>
-          <a:fillRef idx="3">
-            <a:schemeClr val="accent1"/>
-          </a:fillRef>
-          <a:effectRef idx="2">
-            <a:schemeClr val="accent1"/>
-          </a:effectRef>
-          <a:fontRef idx="minor">
-            <a:schemeClr val="lt1"/>
-          </a:fontRef>
-        </p:style>
-        <p:txBody>
-          <a:bodyPr rtlCol="0" anchor="ctr"/>
-          <a:lstStyle/>
-          <a:p>
-            <a:pPr algn="ctr"/>
-          </a:p>
-        </p:txBody>
-      </p:sp>
-      <p:pic>
-        <p:nvPicPr>
-          <p:cNvPr id="20" name="Picture 19" descr="calendar_w.png"/>
-          <p:cNvPicPr>
-            <a:picLocks noChangeAspect="1"/>
-          </p:cNvPicPr>
-          <p:nvPr/>
-        </p:nvPicPr>
-        <p:blipFill>
-          <a:blip r:embed="rId5"/>
-          <a:stretch>
-            <a:fillRect/>
-          </a:stretch>
-        </p:blipFill>
-        <p:spPr>
-          <a:xfrm>
-            <a:off x="663488" y="3589568"/>
-            <a:ext cx="209214" cy="209214"/>
-          </a:xfrm>
-          <a:prstGeom prst="rect">
-            <a:avLst/>
-          </a:prstGeom>
-        </p:spPr>
-      </p:pic>
-      <p:sp>
-        <p:nvSpPr>
-          <p:cNvPr id="21" name="TextBox 20"/>
-          <p:cNvSpPr txBox="1"/>
-          <p:nvPr/>
-        </p:nvSpPr>
-        <p:spPr>
-          <a:xfrm>
-            <a:off x="1115568" y="3428999"/>
-            <a:ext cx="3566160" cy="201168"/>
-          </a:xfrm>
-          <a:prstGeom prst="rect">
-            <a:avLst/>
-          </a:prstGeom>
-          <a:noFill/>
-        </p:spPr>
-        <p:txBody>
-          <a:bodyPr wrap="square" anchor="t" lIns="0" rIns="0" tIns="0" bIns="0">
-            <a:spAutoFit/>
-          </a:bodyPr>
-          <a:lstStyle/>
-          <a:p>
-            <a:pPr algn="l"/>
-            <a:r>
-              <a:rPr sz="930" b="1" i="0">
-                <a:solidFill>
-                  <a:srgbClr val="1F497D"/>
-                </a:solidFill>
-                <a:latin typeface="Calibri"/>
-              </a:rPr>
-              <a:t>Resolución temporal</a:t>
-            </a:r>
-          </a:p>
-        </p:txBody>
-      </p:sp>
-      <p:sp>
-        <p:nvSpPr>
-          <p:cNvPr id="22" name="TextBox 21"/>
-          <p:cNvSpPr txBox="1"/>
-          <p:nvPr/>
-        </p:nvSpPr>
-        <p:spPr>
-          <a:xfrm>
-            <a:off x="1115568" y="3621024"/>
-            <a:ext cx="3529584" cy="384048"/>
-          </a:xfrm>
-          <a:prstGeom prst="rect">
-            <a:avLst/>
-          </a:prstGeom>
-          <a:noFill/>
-        </p:spPr>
-        <p:txBody>
-          <a:bodyPr wrap="square" anchor="t" lIns="0" rIns="0" tIns="0" bIns="0">
-            <a:spAutoFit/>
-          </a:bodyPr>
-          <a:lstStyle/>
-          <a:p>
-            <a:pPr algn="l">
-              <a:lnSpc>
-                <a:spcPct val="92000"/>
-              </a:lnSpc>
-            </a:pPr>
-            <a:r>
-              <a:rPr sz="750" b="0" i="0">
-                <a:solidFill>
-                  <a:srgbClr val="52514E"/>
-                </a:solidFill>
-                <a:latin typeface="Calibri"/>
-              </a:rPr>
-              <a:t>Predominan productos anuales o mensuales²; lo diario y horario es la frontera actual.³</a:t>
-            </a:r>
-          </a:p>
-        </p:txBody>
-      </p:sp>
-      <p:sp>
-        <p:nvSpPr>
-          <p:cNvPr id="23" name="Rounded Rectangle 22"/>
-          <p:cNvSpPr/>
-          <p:nvPr/>
-        </p:nvSpPr>
-        <p:spPr>
-          <a:xfrm>
-            <a:off x="4956048" y="1115568"/>
-            <a:ext cx="3730752" cy="2999232"/>
-          </a:xfrm>
-          <a:prstGeom prst="roundRect">
-            <a:avLst>
-              <a:gd name="adj" fmla="val 10000"/>
-            </a:avLst>
-          </a:prstGeom>
-          <a:solidFill>
-            <a:srgbClr val="17375D"/>
-          </a:solidFill>
-          <a:ln>
-            <a:noFill/>
-          </a:ln>
-          <a:effectLst/>
-        </p:spPr>
-        <p:style>
-          <a:lnRef idx="1">
-            <a:schemeClr val="accent1"/>
-          </a:lnRef>
-          <a:fillRef idx="3">
-            <a:schemeClr val="accent1"/>
-          </a:fillRef>
-          <a:effectRef idx="2">
-            <a:schemeClr val="accent1"/>
-          </a:effectRef>
-          <a:fontRef idx="minor">
-            <a:schemeClr val="lt1"/>
-          </a:fontRef>
-        </p:style>
-        <p:txBody>
-          <a:bodyPr rtlCol="0" anchor="ctr"/>
-          <a:lstStyle/>
-          <a:p>
-            <a:pPr algn="ctr"/>
-          </a:p>
-        </p:txBody>
-      </p:sp>
-      <p:sp>
-        <p:nvSpPr>
-          <p:cNvPr id="24" name="TextBox 23"/>
-          <p:cNvSpPr txBox="1"/>
-          <p:nvPr/>
-        </p:nvSpPr>
-        <p:spPr>
-          <a:xfrm>
-            <a:off x="5138928" y="1261872"/>
-            <a:ext cx="3383280" cy="274320"/>
-          </a:xfrm>
-          <a:prstGeom prst="rect">
-            <a:avLst/>
-          </a:prstGeom>
-          <a:noFill/>
-        </p:spPr>
-        <p:txBody>
-          <a:bodyPr wrap="square" anchor="t" lIns="0" rIns="0" tIns="0" bIns="0">
-            <a:spAutoFit/>
-          </a:bodyPr>
-          <a:lstStyle/>
-          <a:p>
-            <a:pPr algn="l"/>
-            <a:r>
-              <a:rPr sz="1000" b="1" i="0">
-                <a:solidFill>
-                  <a:srgbClr val="FFE200"/>
-                </a:solidFill>
-                <a:latin typeface="Calibri"/>
-              </a:rPr>
-              <a:t>NUESTRO POSICIONAMIENTO</a:t>
-            </a:r>
-          </a:p>
-        </p:txBody>
-      </p:sp>
-      <p:sp>
-        <p:nvSpPr>
-          <p:cNvPr id="25" name="TextBox 24"/>
-          <p:cNvSpPr txBox="1"/>
-          <p:nvPr/>
-        </p:nvSpPr>
-        <p:spPr>
-          <a:xfrm>
-            <a:off x="5138928" y="1591056"/>
-            <a:ext cx="3364992" cy="2423160"/>
-          </a:xfrm>
-          <a:prstGeom prst="rect">
-            <a:avLst/>
-          </a:prstGeom>
-          <a:noFill/>
-        </p:spPr>
-        <p:txBody>
-          <a:bodyPr wrap="square" anchor="t" lIns="0" rIns="0" tIns="0" bIns="0">
-            <a:spAutoFit/>
-          </a:bodyPr>
-          <a:lstStyle/>
-          <a:p>
-            <a:pPr algn="l">
-              <a:lnSpc>
-                <a:spcPct val="104000"/>
-              </a:lnSpc>
-              <a:spcAft>
-                <a:spcPts val="800"/>
-              </a:spcAft>
-            </a:pPr>
-            <a:r>
-              <a:rPr sz="960" b="0" i="0">
-                <a:solidFill>
-                  <a:srgbClr val="FFFFFF"/>
-                </a:solidFill>
-                <a:latin typeface="Calibri"/>
-              </a:rPr>
-              <a:t>Aplicar la receta madura de PM₂.₅ y la frontera de los gases al territorio chileno completo: </a:t>
-            </a:r>
-            <a:r>
-              <a:rPr sz="960" b="1" i="0">
-                <a:solidFill>
-                  <a:srgbClr val="FFFFFF"/>
-                </a:solidFill>
-                <a:latin typeface="Calibri"/>
-              </a:rPr>
-              <a:t>6 contaminantes, comuna × hora / día, 5 macrozonas</a:t>
-            </a:r>
-            <a:r>
-              <a:rPr sz="960" b="0" i="0">
-                <a:solidFill>
-                  <a:srgbClr val="FFFFFF"/>
-                </a:solidFill>
-                <a:latin typeface="Calibri"/>
-              </a:rPr>
-              <a:t>, con SINCA como única verdad-terreno y validación LOSO por estación.</a:t>
-            </a:r>
-          </a:p>
-          <a:p>
-            <a:pPr algn="l">
-              <a:lnSpc>
-                <a:spcPct val="104000"/>
-              </a:lnSpc>
-              <a:spcAft>
-                <a:spcPts val="800"/>
-              </a:spcAft>
-            </a:pPr>
-            <a:r>
-              <a:rPr sz="960" b="0" i="0">
-                <a:solidFill>
-                  <a:srgbClr val="CDE2FB"/>
-                </a:solidFill>
-                <a:latin typeface="Calibri"/>
-              </a:rPr>
-              <a:t>El aporte es la superficie validada y reproducible; la validación epidemiológica queda explícitamente fuera del alcance, según la recomendación docente.</a:t>
-            </a:r>
-          </a:p>
-        </p:txBody>
-      </p:sp>
-      <p:sp>
-        <p:nvSpPr>
-          <p:cNvPr id="26" name="TextBox 25"/>
-          <p:cNvSpPr txBox="1"/>
-          <p:nvPr/>
-        </p:nvSpPr>
-        <p:spPr>
-          <a:xfrm>
-            <a:off x="457200" y="4224528"/>
-            <a:ext cx="6446520" cy="667511"/>
+            <a:off x="457200" y="4096512"/>
+            <a:ext cx="4069080" cy="795527"/>
           </a:xfrm>
           <a:prstGeom prst="rect">
             <a:avLst/>
@@ -8697,13 +8856,13 @@
               </a:spcAft>
             </a:pPr>
             <a:r>
-              <a:rPr sz="620" b="0" i="0">
+              <a:rPr sz="570" b="0" i="0">
                 <a:solidFill>
                   <a:srgbClr val="898781"/>
                 </a:solidFill>
                 <a:latin typeface="Calibri"/>
               </a:rPr>
-              <a:t>¹ Wei J. et al. Ground-level gaseous pollutants (NO2, SO2, and CO) in China: daily seamless mapping and spatiotemporal variations. Atmos. Chem. Phys. 23, 1511–1532 (2023). doi:10.5194/acp-23-1511-2023</a:t>
+              <a:t>¹ Pérez P. et al. Prediction of PM2.5 concentrations several hours in advance using neural networks in Santiago, Chile. Atmospheric Environment 34 (2000). doi:10.1016/S1352-2310(99)00316-7</a:t>
             </a:r>
           </a:p>
           <a:p>
@@ -8713,13 +8872,13 @@
               </a:spcAft>
             </a:pPr>
             <a:r>
-              <a:rPr sz="620" b="0" i="0">
+              <a:rPr sz="570" b="0" i="0">
                 <a:solidFill>
                   <a:srgbClr val="898781"/>
                 </a:solidFill>
                 <a:latin typeface="Calibri"/>
               </a:rPr>
-              <a:t>² van Donkelaar A. et al. Monthly global estimates of fine particulate matter and their uncertainty. Environ. Sci. Technol. 55 (2021). doi:10.1021/acs.est.1c05309</a:t>
+              <a:t>² Pérez P. y Gramsch E. Forecasting hourly PM2.5 in Santiago de Chile with emphasis on night episodes. Atmospheric Environment 124 (2016). doi:10.1016/j.atmosenv.2015.11.016</a:t>
             </a:r>
           </a:p>
           <a:p>
@@ -8729,13 +8888,116 @@
               </a:spcAft>
             </a:pPr>
             <a:r>
-              <a:rPr sz="620" b="0" i="0">
+              <a:rPr sz="570" b="0" i="0">
                 <a:solidFill>
                   <a:srgbClr val="898781"/>
                 </a:solidFill>
                 <a:latin typeface="Calibri"/>
               </a:rPr>
-              <a:t>³ Wei J. et al. Ground-level NO2 surveillance from space across China using interpretable spatiotemporally weighted artificial intelligence. Environ. Sci. Technol. 56 (2022). doi:10.1021/acs.est.2c03834</a:t>
+              <a:t>³ Menares C. et al. Forecasting PM2.5 levels in Santiago de Chile using deep learning neural networks. Urban Climate 38 (2021). doi:10.1016/j.uclim.2021.100906</a:t>
+            </a:r>
+          </a:p>
+          <a:p>
+            <a:pPr algn="l">
+              <a:spcAft>
+                <a:spcPts val="100"/>
+              </a:spcAft>
+            </a:pPr>
+            <a:r>
+              <a:rPr sz="570" b="0" i="0">
+                <a:solidFill>
+                  <a:srgbClr val="898781"/>
+                </a:solidFill>
+                <a:latin typeface="Calibri"/>
+              </a:rPr>
+              <a:t>⁴ Peralta B. et al. Space-time prediction of PM2.5 concentrations in Santiago de Chile using LSTM networks. Applied Sciences 12, 11317 (2022). doi:10.3390/app122211317</a:t>
+            </a:r>
+          </a:p>
+        </p:txBody>
+      </p:sp>
+      <p:sp>
+        <p:nvSpPr>
+          <p:cNvPr id="7" name="TextBox 6"/>
+          <p:cNvSpPr txBox="1"/>
+          <p:nvPr/>
+        </p:nvSpPr>
+        <p:spPr>
+          <a:xfrm>
+            <a:off x="4663440" y="4096512"/>
+            <a:ext cx="4023360" cy="795527"/>
+          </a:xfrm>
+          <a:prstGeom prst="rect">
+            <a:avLst/>
+          </a:prstGeom>
+          <a:noFill/>
+        </p:spPr>
+        <p:txBody>
+          <a:bodyPr wrap="square" anchor="t" lIns="0" rIns="0" tIns="0" bIns="0">
+            <a:spAutoFit/>
+          </a:bodyPr>
+          <a:lstStyle/>
+          <a:p>
+            <a:pPr algn="l">
+              <a:spcAft>
+                <a:spcPts val="100"/>
+              </a:spcAft>
+            </a:pPr>
+            <a:r>
+              <a:rPr sz="570" b="0" i="0">
+                <a:solidFill>
+                  <a:srgbClr val="898781"/>
+                </a:solidFill>
+                <a:latin typeface="Calibri"/>
+              </a:rPr>
+              <a:t>⁵ Pérez P. y Menares C. PM2.5 forecasting in Coyhaique, the most polluted city in the Americas. Urban Climate 32 (2020). doi:10.1016/j.uclim.2020.100608</a:t>
+            </a:r>
+          </a:p>
+          <a:p>
+            <a:pPr algn="l">
+              <a:spcAft>
+                <a:spcPts val="100"/>
+              </a:spcAft>
+            </a:pPr>
+            <a:r>
+              <a:rPr sz="570" b="0" i="0">
+                <a:solidFill>
+                  <a:srgbClr val="898781"/>
+                </a:solidFill>
+                <a:latin typeface="Calibri"/>
+              </a:rPr>
+              <a:t>⁶ Escribano J. et al. Satellite retrievals of aerosol optical depth over a subtropical urban area: the role of stratification and surface reflectance. Aerosol and Air Quality Research 14 (2014). doi:10.4209/aaqr.2013.03.0082</a:t>
+            </a:r>
+          </a:p>
+          <a:p>
+            <a:pPr algn="l">
+              <a:spcAft>
+                <a:spcPts val="100"/>
+              </a:spcAft>
+            </a:pPr>
+            <a:r>
+              <a:rPr sz="570" b="0" i="0">
+                <a:solidFill>
+                  <a:srgbClr val="898781"/>
+                </a:solidFill>
+                <a:latin typeface="Calibri"/>
+              </a:rPr>
+              <a:t>⁷ Villalobos A.M. et al. Wood burning pollution in southern Chile: PM2.5 source apportionment using CMB and molecular markers. Environmental Pollution 225 (2017). doi:10.1016/j.envpol.2017.02.069</a:t>
+            </a:r>
+          </a:p>
+          <a:p>
+            <a:pPr algn="l">
+              <a:spcAft>
+                <a:spcPts val="100"/>
+              </a:spcAft>
+            </a:pPr>
+            <a:r>
+              <a:rPr sz="570" b="0" i="0">
+                <a:solidFill>
+                  <a:srgbClr val="898781"/>
+                </a:solidFill>
+                <a:latin typeface="Calibri"/>
+              </a:rPr>
+              <a:t>⁸ Barraza F. et al. Temporal evolution of main ambient PM2.5 sources in Santiago, Chile, 1998–2012. Atmos. Chem. Phys. 17 (2017). doi:10.5194/acp-17-10093-2017</a:t>
             </a:r>
           </a:p>
         </p:txBody>
@@ -8792,7 +9054,7 @@
                 </a:solidFill>
                 <a:latin typeface="Calibri"/>
               </a:rPr>
-              <a:t>Qué implica para nuestro diseño: decisiones y líneas base</a:t>
+              <a:t>Hipótesis de trabajo y tipo de problema</a:t>
             </a:r>
             <a:endParaRPr lang="es-ES" dirty="0"/>
           </a:p>
@@ -8807,7 +9069,7 @@
         <p:spPr>
           <a:xfrm>
             <a:off x="457200" y="1115568"/>
-            <a:ext cx="2679192" cy="1591056"/>
+            <a:ext cx="4041648" cy="2450592"/>
           </a:xfrm>
           <a:prstGeom prst="roundRect">
             <a:avLst>
@@ -8815,7 +9077,7 @@
             </a:avLst>
           </a:prstGeom>
           <a:solidFill>
-            <a:srgbClr val="F2F6FC"/>
+            <a:srgbClr val="17375D"/>
           </a:solidFill>
           <a:ln>
             <a:noFill/>
@@ -8846,20 +9108,118 @@
       </p:sp>
       <p:sp>
         <p:nvSpPr>
-          <p:cNvPr id="4" name="Oval 3"/>
+          <p:cNvPr id="4" name="TextBox 3"/>
+          <p:cNvSpPr txBox="1"/>
+          <p:nvPr/>
+        </p:nvSpPr>
+        <p:spPr>
+          <a:xfrm>
+            <a:off x="640080" y="1261872"/>
+            <a:ext cx="3657600" cy="256032"/>
+          </a:xfrm>
+          <a:prstGeom prst="rect">
+            <a:avLst/>
+          </a:prstGeom>
+          <a:noFill/>
+        </p:spPr>
+        <p:txBody>
+          <a:bodyPr wrap="square" anchor="t" lIns="0" rIns="0" tIns="0" bIns="0">
+            <a:spAutoFit/>
+          </a:bodyPr>
+          <a:lstStyle/>
+          <a:p>
+            <a:pPr algn="l"/>
+            <a:r>
+              <a:rPr sz="1000" b="1" i="0">
+                <a:solidFill>
+                  <a:srgbClr val="FFE200"/>
+                </a:solidFill>
+                <a:latin typeface="Calibri"/>
+              </a:rPr>
+              <a:t>HIPÓTESIS DE TRABAJO</a:t>
+            </a:r>
+          </a:p>
+        </p:txBody>
+      </p:sp>
+      <p:sp>
+        <p:nvSpPr>
+          <p:cNvPr id="5" name="TextBox 4"/>
+          <p:cNvSpPr txBox="1"/>
+          <p:nvPr/>
+        </p:nvSpPr>
+        <p:spPr>
+          <a:xfrm>
+            <a:off x="640080" y="1572768"/>
+            <a:ext cx="3675887" cy="1874519"/>
+          </a:xfrm>
+          <a:prstGeom prst="rect">
+            <a:avLst/>
+          </a:prstGeom>
+          <a:noFill/>
+        </p:spPr>
+        <p:txBody>
+          <a:bodyPr wrap="square" anchor="t" lIns="0" rIns="0" tIns="0" bIns="0">
+            <a:spAutoFit/>
+          </a:bodyPr>
+          <a:lstStyle/>
+          <a:p>
+            <a:pPr algn="l">
+              <a:lnSpc>
+                <a:spcPct val="105000"/>
+              </a:lnSpc>
+              <a:spcAft>
+                <a:spcPts val="800"/>
+              </a:spcAft>
+            </a:pPr>
+            <a:r>
+              <a:rPr sz="960" b="0" i="0">
+                <a:solidFill>
+                  <a:srgbClr val="FFFFFF"/>
+                </a:solidFill>
+                <a:latin typeface="Calibri"/>
+              </a:rPr>
+              <a:t>Las variables satelitales, meteorológicas, territoriales y de reanálisis contienen información suficiente para estimar las concentraciones de superficie que observan las estaciones.</a:t>
+            </a:r>
+          </a:p>
+          <a:p>
+            <a:pPr algn="l">
+              <a:lnSpc>
+                <a:spcPct val="105000"/>
+              </a:lnSpc>
+              <a:spcAft>
+                <a:spcPts val="800"/>
+              </a:spcAft>
+            </a:pPr>
+            <a:r>
+              <a:rPr sz="960" b="0" i="0">
+                <a:solidFill>
+                  <a:srgbClr val="CDE2FB"/>
+                </a:solidFill>
+                <a:latin typeface="Calibri"/>
+              </a:rPr>
+              <a:t>Los objetivos dicen qué vamos a hacer; la hipótesis explica por qué creemos que el problema puede resolverse con los datos disponibles.</a:t>
+            </a:r>
+          </a:p>
+        </p:txBody>
+      </p:sp>
+      <p:sp>
+        <p:nvSpPr>
+          <p:cNvPr id="6" name="Rounded Rectangle 5"/>
           <p:cNvSpPr/>
           <p:nvPr/>
         </p:nvSpPr>
         <p:spPr>
           <a:xfrm>
-            <a:off x="603504" y="1243584"/>
-            <a:ext cx="402336" cy="402336"/>
-          </a:xfrm>
-          <a:prstGeom prst="ellipse">
-            <a:avLst/>
+            <a:off x="4645152" y="1115568"/>
+            <a:ext cx="4041648" cy="2450592"/>
+          </a:xfrm>
+          <a:prstGeom prst="roundRect">
+            <a:avLst>
+              <a:gd name="adj" fmla="val 10000"/>
+            </a:avLst>
           </a:prstGeom>
           <a:solidFill>
-            <a:srgbClr val="1F497D"/>
+            <a:srgbClr val="F2F6FC"/>
           </a:solidFill>
           <a:ln>
             <a:noFill/>
@@ -8888,65 +9248,6 @@
           </a:p>
         </p:txBody>
       </p:sp>
-      <p:pic>
-        <p:nvPicPr>
-          <p:cNvPr id="5" name="Picture 4" descr="satellite_w.png"/>
-          <p:cNvPicPr>
-            <a:picLocks noChangeAspect="1"/>
-          </p:cNvPicPr>
-          <p:nvPr/>
-        </p:nvPicPr>
-        <p:blipFill>
-          <a:blip r:embed="rId2"/>
-          <a:stretch>
-            <a:fillRect/>
-          </a:stretch>
-        </p:blipFill>
-        <p:spPr>
-          <a:xfrm>
-            <a:off x="700064" y="1340144"/>
-            <a:ext cx="209214" cy="209214"/>
-          </a:xfrm>
-          <a:prstGeom prst="rect">
-            <a:avLst/>
-          </a:prstGeom>
-        </p:spPr>
-      </p:pic>
-      <p:sp>
-        <p:nvSpPr>
-          <p:cNvPr id="6" name="TextBox 5"/>
-          <p:cNvSpPr txBox="1"/>
-          <p:nvPr/>
-        </p:nvSpPr>
-        <p:spPr>
-          <a:xfrm>
-            <a:off x="1097280" y="1261872"/>
-            <a:ext cx="1920240" cy="365760"/>
-          </a:xfrm>
-          <a:prstGeom prst="rect">
-            <a:avLst/>
-          </a:prstGeom>
-          <a:noFill/>
-        </p:spPr>
-        <p:txBody>
-          <a:bodyPr wrap="square" anchor="ctr" lIns="0" rIns="0" tIns="0" bIns="0">
-            <a:spAutoFit/>
-          </a:bodyPr>
-          <a:lstStyle/>
-          <a:p>
-            <a:pPr algn="l"/>
-            <a:r>
-              <a:rPr sz="1050" b="1" i="0">
-                <a:solidFill>
-                  <a:srgbClr val="1F497D"/>
-                </a:solidFill>
-                <a:latin typeface="Calibri"/>
-              </a:rPr>
-              <a:t>Predictores</a:t>
-            </a:r>
-          </a:p>
-        </p:txBody>
-      </p:sp>
       <p:sp>
         <p:nvSpPr>
           <p:cNvPr id="7" name="TextBox 6"/>
@@ -8955,8 +9256,8 @@
         </p:nvSpPr>
         <p:spPr>
           <a:xfrm>
-            <a:off x="621792" y="1773936"/>
-            <a:ext cx="2377440" cy="868680"/>
+            <a:off x="4809744" y="1225296"/>
+            <a:ext cx="3749039" cy="237744"/>
           </a:xfrm>
           <a:prstGeom prst="rect">
             <a:avLst/>
@@ -8969,33 +9270,399 @@
           </a:bodyPr>
           <a:lstStyle/>
           <a:p>
+            <a:pPr algn="l"/>
+            <a:r>
+              <a:rPr sz="1050" b="1" i="0">
+                <a:solidFill>
+                  <a:srgbClr val="1F497D"/>
+                </a:solidFill>
+                <a:latin typeface="Calibri"/>
+              </a:rPr>
+              <a:t>El problema predictivo, bien definido</a:t>
+            </a:r>
+          </a:p>
+        </p:txBody>
+      </p:sp>
+      <p:sp>
+        <p:nvSpPr>
+          <p:cNvPr id="8" name="TextBox 7"/>
+          <p:cNvSpPr txBox="1"/>
+          <p:nvPr/>
+        </p:nvSpPr>
+        <p:spPr>
+          <a:xfrm>
+            <a:off x="4809744" y="1554480"/>
+            <a:ext cx="1234440" cy="365760"/>
+          </a:xfrm>
+          <a:prstGeom prst="rect">
+            <a:avLst/>
+          </a:prstGeom>
+          <a:noFill/>
+        </p:spPr>
+        <p:txBody>
+          <a:bodyPr wrap="square" anchor="t" lIns="0" rIns="0" tIns="0" bIns="0">
+            <a:spAutoFit/>
+          </a:bodyPr>
+          <a:lstStyle/>
+          <a:p>
+            <a:pPr algn="l"/>
+            <a:r>
+              <a:rPr sz="860" b="1" i="0">
+                <a:solidFill>
+                  <a:srgbClr val="3366CC"/>
+                </a:solidFill>
+                <a:latin typeface="Calibri"/>
+              </a:rPr>
+              <a:t>Tipo</a:t>
+            </a:r>
+          </a:p>
+        </p:txBody>
+      </p:sp>
+      <p:sp>
+        <p:nvSpPr>
+          <p:cNvPr id="9" name="TextBox 8"/>
+          <p:cNvSpPr txBox="1"/>
+          <p:nvPr/>
+        </p:nvSpPr>
+        <p:spPr>
+          <a:xfrm>
+            <a:off x="6089904" y="1554480"/>
+            <a:ext cx="2505456" cy="402336"/>
+          </a:xfrm>
+          <a:prstGeom prst="rect">
+            <a:avLst/>
+          </a:prstGeom>
+          <a:noFill/>
+        </p:spPr>
+        <p:txBody>
+          <a:bodyPr wrap="square" anchor="t" lIns="0" rIns="0" tIns="0" bIns="0">
+            <a:spAutoFit/>
+          </a:bodyPr>
+          <a:lstStyle/>
+          <a:p>
             <a:pPr algn="l">
               <a:lnSpc>
-                <a:spcPct val="96000"/>
+                <a:spcPct val="94000"/>
               </a:lnSpc>
             </a:pPr>
             <a:r>
-              <a:rPr sz="790" b="0" i="0">
+              <a:rPr sz="819" b="0" i="0">
                 <a:solidFill>
                   <a:srgbClr val="52514E"/>
                 </a:solidFill>
                 <a:latin typeface="Calibri"/>
               </a:rPr>
-              <a:t>AOD y columnas troposféricas + meteorología + uso de suelo, vías y luces nocturnas: el conjunto que la literatura repite en las cuatro familias.¹ ²</a:t>
-            </a:r>
-          </a:p>
-        </p:txBody>
-      </p:sp>
-      <p:sp>
-        <p:nvSpPr>
-          <p:cNvPr id="8" name="Rounded Rectangle 7"/>
+              <a:t>regresión espacio-temporal predictiva; no busca explicar causas ni evaluar intervenciones</a:t>
+            </a:r>
+          </a:p>
+        </p:txBody>
+      </p:sp>
+      <p:sp>
+        <p:nvSpPr>
+          <p:cNvPr id="10" name="TextBox 9"/>
+          <p:cNvSpPr txBox="1"/>
+          <p:nvPr/>
+        </p:nvSpPr>
+        <p:spPr>
+          <a:xfrm>
+            <a:off x="4809744" y="1952243"/>
+            <a:ext cx="1234440" cy="365760"/>
+          </a:xfrm>
+          <a:prstGeom prst="rect">
+            <a:avLst/>
+          </a:prstGeom>
+          <a:noFill/>
+        </p:spPr>
+        <p:txBody>
+          <a:bodyPr wrap="square" anchor="t" lIns="0" rIns="0" tIns="0" bIns="0">
+            <a:spAutoFit/>
+          </a:bodyPr>
+          <a:lstStyle/>
+          <a:p>
+            <a:pPr algn="l"/>
+            <a:r>
+              <a:rPr sz="860" b="1" i="0">
+                <a:solidFill>
+                  <a:srgbClr val="3366CC"/>
+                </a:solidFill>
+                <a:latin typeface="Calibri"/>
+              </a:rPr>
+              <a:t>Variable objetivo</a:t>
+            </a:r>
+          </a:p>
+        </p:txBody>
+      </p:sp>
+      <p:sp>
+        <p:nvSpPr>
+          <p:cNvPr id="11" name="TextBox 10"/>
+          <p:cNvSpPr txBox="1"/>
+          <p:nvPr/>
+        </p:nvSpPr>
+        <p:spPr>
+          <a:xfrm>
+            <a:off x="6089904" y="1952243"/>
+            <a:ext cx="2505456" cy="402336"/>
+          </a:xfrm>
+          <a:prstGeom prst="rect">
+            <a:avLst/>
+          </a:prstGeom>
+          <a:noFill/>
+        </p:spPr>
+        <p:txBody>
+          <a:bodyPr wrap="square" anchor="t" lIns="0" rIns="0" tIns="0" bIns="0">
+            <a:spAutoFit/>
+          </a:bodyPr>
+          <a:lstStyle/>
+          <a:p>
+            <a:pPr algn="l">
+              <a:lnSpc>
+                <a:spcPct val="94000"/>
+              </a:lnSpc>
+            </a:pPr>
+            <a:r>
+              <a:rPr sz="819" b="0" i="0">
+                <a:solidFill>
+                  <a:srgbClr val="52514E"/>
+                </a:solidFill>
+                <a:latin typeface="Calibri"/>
+              </a:rPr>
+              <a:t>concentración de superficie por contaminante</a:t>
+            </a:r>
+          </a:p>
+        </p:txBody>
+      </p:sp>
+      <p:sp>
+        <p:nvSpPr>
+          <p:cNvPr id="12" name="TextBox 11"/>
+          <p:cNvSpPr txBox="1"/>
+          <p:nvPr/>
+        </p:nvSpPr>
+        <p:spPr>
+          <a:xfrm>
+            <a:off x="4809744" y="2350008"/>
+            <a:ext cx="1234440" cy="365760"/>
+          </a:xfrm>
+          <a:prstGeom prst="rect">
+            <a:avLst/>
+          </a:prstGeom>
+          <a:noFill/>
+        </p:spPr>
+        <p:txBody>
+          <a:bodyPr wrap="square" anchor="t" lIns="0" rIns="0" tIns="0" bIns="0">
+            <a:spAutoFit/>
+          </a:bodyPr>
+          <a:lstStyle/>
+          <a:p>
+            <a:pPr algn="l"/>
+            <a:r>
+              <a:rPr sz="860" b="1" i="0">
+                <a:solidFill>
+                  <a:srgbClr val="3366CC"/>
+                </a:solidFill>
+                <a:latin typeface="Calibri"/>
+              </a:rPr>
+              <a:t>Unidad</a:t>
+            </a:r>
+          </a:p>
+        </p:txBody>
+      </p:sp>
+      <p:sp>
+        <p:nvSpPr>
+          <p:cNvPr id="13" name="TextBox 12"/>
+          <p:cNvSpPr txBox="1"/>
+          <p:nvPr/>
+        </p:nvSpPr>
+        <p:spPr>
+          <a:xfrm>
+            <a:off x="6089904" y="2350008"/>
+            <a:ext cx="2505456" cy="402336"/>
+          </a:xfrm>
+          <a:prstGeom prst="rect">
+            <a:avLst/>
+          </a:prstGeom>
+          <a:noFill/>
+        </p:spPr>
+        <p:txBody>
+          <a:bodyPr wrap="square" anchor="t" lIns="0" rIns="0" tIns="0" bIns="0">
+            <a:spAutoFit/>
+          </a:bodyPr>
+          <a:lstStyle/>
+          <a:p>
+            <a:pPr algn="l">
+              <a:lnSpc>
+                <a:spcPct val="94000"/>
+              </a:lnSpc>
+            </a:pPr>
+            <a:r>
+              <a:rPr sz="819" b="0" i="0">
+                <a:solidFill>
+                  <a:srgbClr val="52514E"/>
+                </a:solidFill>
+                <a:latin typeface="Calibri"/>
+              </a:rPr>
+              <a:t>µg/m³ (CO en mg/m³)</a:t>
+            </a:r>
+          </a:p>
+        </p:txBody>
+      </p:sp>
+      <p:sp>
+        <p:nvSpPr>
+          <p:cNvPr id="14" name="TextBox 13"/>
+          <p:cNvSpPr txBox="1"/>
+          <p:nvPr/>
+        </p:nvSpPr>
+        <p:spPr>
+          <a:xfrm>
+            <a:off x="4809744" y="2747772"/>
+            <a:ext cx="1234440" cy="365760"/>
+          </a:xfrm>
+          <a:prstGeom prst="rect">
+            <a:avLst/>
+          </a:prstGeom>
+          <a:noFill/>
+        </p:spPr>
+        <p:txBody>
+          <a:bodyPr wrap="square" anchor="t" lIns="0" rIns="0" tIns="0" bIns="0">
+            <a:spAutoFit/>
+          </a:bodyPr>
+          <a:lstStyle/>
+          <a:p>
+            <a:pPr algn="l"/>
+            <a:r>
+              <a:rPr sz="860" b="1" i="0">
+                <a:solidFill>
+                  <a:srgbClr val="3366CC"/>
+                </a:solidFill>
+                <a:latin typeface="Calibri"/>
+              </a:rPr>
+              <a:t>Resolución</a:t>
+            </a:r>
+          </a:p>
+        </p:txBody>
+      </p:sp>
+      <p:sp>
+        <p:nvSpPr>
+          <p:cNvPr id="15" name="TextBox 14"/>
+          <p:cNvSpPr txBox="1"/>
+          <p:nvPr/>
+        </p:nvSpPr>
+        <p:spPr>
+          <a:xfrm>
+            <a:off x="6089904" y="2747772"/>
+            <a:ext cx="2505456" cy="402336"/>
+          </a:xfrm>
+          <a:prstGeom prst="rect">
+            <a:avLst/>
+          </a:prstGeom>
+          <a:noFill/>
+        </p:spPr>
+        <p:txBody>
+          <a:bodyPr wrap="square" anchor="t" lIns="0" rIns="0" tIns="0" bIns="0">
+            <a:spAutoFit/>
+          </a:bodyPr>
+          <a:lstStyle/>
+          <a:p>
+            <a:pPr algn="l">
+              <a:lnSpc>
+                <a:spcPct val="94000"/>
+              </a:lnSpc>
+            </a:pPr>
+            <a:r>
+              <a:rPr sz="819" b="0" i="0">
+                <a:solidFill>
+                  <a:srgbClr val="52514E"/>
+                </a:solidFill>
+                <a:latin typeface="Calibri"/>
+              </a:rPr>
+              <a:t>comuna × hora y día, todo Chile, agregable por macrozona</a:t>
+            </a:r>
+          </a:p>
+        </p:txBody>
+      </p:sp>
+      <p:sp>
+        <p:nvSpPr>
+          <p:cNvPr id="16" name="TextBox 15"/>
+          <p:cNvSpPr txBox="1"/>
+          <p:nvPr/>
+        </p:nvSpPr>
+        <p:spPr>
+          <a:xfrm>
+            <a:off x="4809744" y="3145536"/>
+            <a:ext cx="1234440" cy="365760"/>
+          </a:xfrm>
+          <a:prstGeom prst="rect">
+            <a:avLst/>
+          </a:prstGeom>
+          <a:noFill/>
+        </p:spPr>
+        <p:txBody>
+          <a:bodyPr wrap="square" anchor="t" lIns="0" rIns="0" tIns="0" bIns="0">
+            <a:spAutoFit/>
+          </a:bodyPr>
+          <a:lstStyle/>
+          <a:p>
+            <a:pPr algn="l"/>
+            <a:r>
+              <a:rPr sz="860" b="1" i="0">
+                <a:solidFill>
+                  <a:srgbClr val="3366CC"/>
+                </a:solidFill>
+                <a:latin typeface="Calibri"/>
+              </a:rPr>
+              <a:t>Modelos</a:t>
+            </a:r>
+          </a:p>
+        </p:txBody>
+      </p:sp>
+      <p:sp>
+        <p:nvSpPr>
+          <p:cNvPr id="17" name="TextBox 16"/>
+          <p:cNvSpPr txBox="1"/>
+          <p:nvPr/>
+        </p:nvSpPr>
+        <p:spPr>
+          <a:xfrm>
+            <a:off x="6089904" y="3145536"/>
+            <a:ext cx="2505456" cy="402336"/>
+          </a:xfrm>
+          <a:prstGeom prst="rect">
+            <a:avLst/>
+          </a:prstGeom>
+          <a:noFill/>
+        </p:spPr>
+        <p:txBody>
+          <a:bodyPr wrap="square" anchor="t" lIns="0" rIns="0" tIns="0" bIns="0">
+            <a:spAutoFit/>
+          </a:bodyPr>
+          <a:lstStyle/>
+          <a:p>
+            <a:pPr algn="l">
+              <a:lnSpc>
+                <a:spcPct val="94000"/>
+              </a:lnSpc>
+            </a:pPr>
+            <a:r>
+              <a:rPr sz="819" b="0" i="0">
+                <a:solidFill>
+                  <a:srgbClr val="52514E"/>
+                </a:solidFill>
+                <a:latin typeface="Calibri"/>
+              </a:rPr>
+              <a:t>un modelo por contaminante; sin enfoque multiobjetivo</a:t>
+            </a:r>
+          </a:p>
+        </p:txBody>
+      </p:sp>
+      <p:sp>
+        <p:nvSpPr>
+          <p:cNvPr id="18" name="Rounded Rectangle 17"/>
           <p:cNvSpPr/>
           <p:nvPr/>
         </p:nvSpPr>
         <p:spPr>
           <a:xfrm>
-            <a:off x="3264408" y="1115568"/>
-            <a:ext cx="2679192" cy="1591056"/>
+            <a:off x="457200" y="3749039"/>
+            <a:ext cx="8229600" cy="493776"/>
           </a:xfrm>
           <a:prstGeom prst="roundRect">
             <a:avLst>
@@ -9003,7 +9670,7 @@
             </a:avLst>
           </a:prstGeom>
           <a:solidFill>
-            <a:srgbClr val="F2F6FC"/>
+            <a:srgbClr val="EAF2FD"/>
           </a:solidFill>
           <a:ln>
             <a:noFill/>
@@ -9034,117 +9701,14 @@
       </p:sp>
       <p:sp>
         <p:nvSpPr>
-          <p:cNvPr id="9" name="Oval 8"/>
-          <p:cNvSpPr/>
-          <p:nvPr/>
-        </p:nvSpPr>
-        <p:spPr>
-          <a:xfrm>
-            <a:off x="3410712" y="1243584"/>
-            <a:ext cx="402336" cy="402336"/>
-          </a:xfrm>
-          <a:prstGeom prst="ellipse">
-            <a:avLst/>
-          </a:prstGeom>
-          <a:solidFill>
-            <a:srgbClr val="3366CC"/>
-          </a:solidFill>
-          <a:ln>
-            <a:noFill/>
-          </a:ln>
-          <a:effectLst/>
-        </p:spPr>
-        <p:style>
-          <a:lnRef idx="1">
-            <a:schemeClr val="accent1"/>
-          </a:lnRef>
-          <a:fillRef idx="3">
-            <a:schemeClr val="accent1"/>
-          </a:fillRef>
-          <a:effectRef idx="2">
-            <a:schemeClr val="accent1"/>
-          </a:effectRef>
-          <a:fontRef idx="minor">
-            <a:schemeClr val="lt1"/>
-          </a:fontRef>
-        </p:style>
-        <p:txBody>
-          <a:bodyPr rtlCol="0" anchor="ctr"/>
-          <a:lstStyle/>
-          <a:p>
-            <a:pPr algn="ctr"/>
-          </a:p>
-        </p:txBody>
-      </p:sp>
-      <p:pic>
-        <p:nvPicPr>
-          <p:cNvPr id="10" name="Picture 9" descr="checklist_w.png"/>
-          <p:cNvPicPr>
-            <a:picLocks noChangeAspect="1"/>
-          </p:cNvPicPr>
-          <p:nvPr/>
-        </p:nvPicPr>
-        <p:blipFill>
-          <a:blip r:embed="rId3"/>
-          <a:stretch>
-            <a:fillRect/>
-          </a:stretch>
-        </p:blipFill>
-        <p:spPr>
-          <a:xfrm>
-            <a:off x="3507272" y="1340144"/>
-            <a:ext cx="209214" cy="209214"/>
-          </a:xfrm>
-          <a:prstGeom prst="rect">
-            <a:avLst/>
-          </a:prstGeom>
-        </p:spPr>
-      </p:pic>
-      <p:sp>
-        <p:nvSpPr>
-          <p:cNvPr id="11" name="TextBox 10"/>
+          <p:cNvPr id="19" name="TextBox 18"/>
           <p:cNvSpPr txBox="1"/>
           <p:nvPr/>
         </p:nvSpPr>
         <p:spPr>
           <a:xfrm>
-            <a:off x="3904487" y="1261872"/>
-            <a:ext cx="1920240" cy="365760"/>
-          </a:xfrm>
-          <a:prstGeom prst="rect">
-            <a:avLst/>
-          </a:prstGeom>
-          <a:noFill/>
-        </p:spPr>
-        <p:txBody>
-          <a:bodyPr wrap="square" anchor="ctr" lIns="0" rIns="0" tIns="0" bIns="0">
-            <a:spAutoFit/>
-          </a:bodyPr>
-          <a:lstStyle/>
-          <a:p>
-            <a:pPr algn="l"/>
-            <a:r>
-              <a:rPr sz="1050" b="1" i="0">
-                <a:solidFill>
-                  <a:srgbClr val="3366CC"/>
-                </a:solidFill>
-                <a:latin typeface="Calibri"/>
-              </a:rPr>
-              <a:t>Validación</a:t>
-            </a:r>
-          </a:p>
-        </p:txBody>
-      </p:sp>
-      <p:sp>
-        <p:nvSpPr>
-          <p:cNvPr id="12" name="TextBox 11"/>
-          <p:cNvSpPr txBox="1"/>
-          <p:nvPr/>
-        </p:nvSpPr>
-        <p:spPr>
-          <a:xfrm>
-            <a:off x="3429000" y="1773936"/>
-            <a:ext cx="2377440" cy="868680"/>
+            <a:off x="621792" y="3813048"/>
+            <a:ext cx="7909560" cy="365760"/>
           </a:xfrm>
           <a:prstGeom prst="rect">
             <a:avLst/>
@@ -9157,416 +9721,24 @@
           </a:bodyPr>
           <a:lstStyle/>
           <a:p>
-            <a:pPr algn="l">
-              <a:lnSpc>
-                <a:spcPct val="96000"/>
-              </a:lnSpc>
-            </a:pPr>
-            <a:r>
-              <a:rPr sz="790" b="0" i="0">
-                <a:solidFill>
-                  <a:srgbClr val="52514E"/>
+            <a:pPr algn="l"/>
+            <a:r>
+              <a:rPr sz="960" b="1" i="0">
+                <a:solidFill>
+                  <a:srgbClr val="1F497D"/>
                 </a:solidFill>
                 <a:latin typeface="Calibri"/>
               </a:rPr>
-              <a:t>CV espacial por estación (LOSO) y reporte por macrozona, porque el desempeño se degrada lejos de la red de monitoreo.³</a:t>
-            </a:r>
-          </a:p>
-        </p:txBody>
-      </p:sp>
-      <p:sp>
-        <p:nvSpPr>
-          <p:cNvPr id="13" name="Rounded Rectangle 12"/>
-          <p:cNvSpPr/>
-          <p:nvPr/>
-        </p:nvSpPr>
-        <p:spPr>
-          <a:xfrm>
-            <a:off x="6071616" y="1115568"/>
-            <a:ext cx="2679192" cy="1591056"/>
-          </a:xfrm>
-          <a:prstGeom prst="roundRect">
-            <a:avLst>
-              <a:gd name="adj" fmla="val 10000"/>
-            </a:avLst>
-          </a:prstGeom>
-          <a:solidFill>
-            <a:srgbClr val="F2F6FC"/>
-          </a:solidFill>
-          <a:ln>
-            <a:noFill/>
-          </a:ln>
-          <a:effectLst/>
-        </p:spPr>
-        <p:style>
-          <a:lnRef idx="1">
-            <a:schemeClr val="accent1"/>
-          </a:lnRef>
-          <a:fillRef idx="3">
-            <a:schemeClr val="accent1"/>
-          </a:fillRef>
-          <a:effectRef idx="2">
-            <a:schemeClr val="accent1"/>
-          </a:effectRef>
-          <a:fontRef idx="minor">
-            <a:schemeClr val="lt1"/>
-          </a:fontRef>
-        </p:style>
-        <p:txBody>
-          <a:bodyPr rtlCol="0" anchor="ctr"/>
-          <a:lstStyle/>
-          <a:p>
-            <a:pPr algn="ctr"/>
-          </a:p>
-        </p:txBody>
-      </p:sp>
-      <p:sp>
-        <p:nvSpPr>
-          <p:cNvPr id="14" name="Oval 13"/>
-          <p:cNvSpPr/>
-          <p:nvPr/>
-        </p:nvSpPr>
-        <p:spPr>
-          <a:xfrm>
-            <a:off x="6217920" y="1243584"/>
-            <a:ext cx="402336" cy="402336"/>
-          </a:xfrm>
-          <a:prstGeom prst="ellipse">
-            <a:avLst/>
-          </a:prstGeom>
-          <a:solidFill>
-            <a:srgbClr val="0F7D57"/>
-          </a:solidFill>
-          <a:ln>
-            <a:noFill/>
-          </a:ln>
-          <a:effectLst/>
-        </p:spPr>
-        <p:style>
-          <a:lnRef idx="1">
-            <a:schemeClr val="accent1"/>
-          </a:lnRef>
-          <a:fillRef idx="3">
-            <a:schemeClr val="accent1"/>
-          </a:fillRef>
-          <a:effectRef idx="2">
-            <a:schemeClr val="accent1"/>
-          </a:effectRef>
-          <a:fontRef idx="minor">
-            <a:schemeClr val="lt1"/>
-          </a:fontRef>
-        </p:style>
-        <p:txBody>
-          <a:bodyPr rtlCol="0" anchor="ctr"/>
-          <a:lstStyle/>
-          <a:p>
-            <a:pPr algn="ctr"/>
-          </a:p>
-        </p:txBody>
-      </p:sp>
-      <p:pic>
-        <p:nvPicPr>
-          <p:cNvPr id="15" name="Picture 14" descr="science_w.png"/>
-          <p:cNvPicPr>
-            <a:picLocks noChangeAspect="1"/>
-          </p:cNvPicPr>
-          <p:nvPr/>
-        </p:nvPicPr>
-        <p:blipFill>
-          <a:blip r:embed="rId4"/>
-          <a:stretch>
-            <a:fillRect/>
-          </a:stretch>
-        </p:blipFill>
-        <p:spPr>
-          <a:xfrm>
-            <a:off x="6314480" y="1340144"/>
-            <a:ext cx="209214" cy="209214"/>
-          </a:xfrm>
-          <a:prstGeom prst="rect">
-            <a:avLst/>
-          </a:prstGeom>
-        </p:spPr>
-      </p:pic>
-      <p:sp>
-        <p:nvSpPr>
-          <p:cNvPr id="16" name="TextBox 15"/>
-          <p:cNvSpPr txBox="1"/>
-          <p:nvPr/>
-        </p:nvSpPr>
-        <p:spPr>
-          <a:xfrm>
-            <a:off x="6711696" y="1261872"/>
-            <a:ext cx="1920240" cy="365760"/>
-          </a:xfrm>
-          <a:prstGeom prst="rect">
-            <a:avLst/>
-          </a:prstGeom>
-          <a:noFill/>
-        </p:spPr>
-        <p:txBody>
-          <a:bodyPr wrap="square" anchor="ctr" lIns="0" rIns="0" tIns="0" bIns="0">
-            <a:spAutoFit/>
-          </a:bodyPr>
-          <a:lstStyle/>
-          <a:p>
-            <a:pPr algn="l"/>
-            <a:r>
-              <a:rPr sz="1050" b="1" i="0">
-                <a:solidFill>
-                  <a:srgbClr val="0F7D57"/>
+              <a:t>La secuencia completa del proyecto: </a:t>
+            </a:r>
+            <a:r>
+              <a:rPr sz="960" b="0" i="0">
+                <a:solidFill>
+                  <a:srgbClr val="52514E"/>
                 </a:solidFill>
                 <a:latin typeface="Calibri"/>
               </a:rPr>
-              <a:t>Motores</a:t>
-            </a:r>
-          </a:p>
-        </p:txBody>
-      </p:sp>
-      <p:sp>
-        <p:nvSpPr>
-          <p:cNvPr id="17" name="TextBox 16"/>
-          <p:cNvSpPr txBox="1"/>
-          <p:nvPr/>
-        </p:nvSpPr>
-        <p:spPr>
-          <a:xfrm>
-            <a:off x="6236207" y="1773936"/>
-            <a:ext cx="2377440" cy="868680"/>
-          </a:xfrm>
-          <a:prstGeom prst="rect">
-            <a:avLst/>
-          </a:prstGeom>
-          <a:noFill/>
-        </p:spPr>
-        <p:txBody>
-          <a:bodyPr wrap="square" anchor="t" lIns="0" rIns="0" tIns="0" bIns="0">
-            <a:spAutoFit/>
-          </a:bodyPr>
-          <a:lstStyle/>
-          <a:p>
-            <a:pPr algn="l">
-              <a:lnSpc>
-                <a:spcPct val="96000"/>
-              </a:lnSpc>
-            </a:pPr>
-            <a:r>
-              <a:rPr sz="790" b="0" i="0">
-                <a:solidFill>
-                  <a:srgbClr val="52514E"/>
-                </a:solidFill>
-                <a:latin typeface="Calibri"/>
-              </a:rPr>
-              <a:t>GWR², boosting³ y kriging cubren las tres familias estadísticas con mejor evidencia; los comparamos bajo el mismo panel.</a:t>
-            </a:r>
-          </a:p>
-        </p:txBody>
-      </p:sp>
-      <p:sp>
-        <p:nvSpPr>
-          <p:cNvPr id="18" name="Rounded Rectangle 17"/>
-          <p:cNvSpPr/>
-          <p:nvPr/>
-        </p:nvSpPr>
-        <p:spPr>
-          <a:xfrm>
-            <a:off x="457200" y="2889504"/>
-            <a:ext cx="8229600" cy="969264"/>
-          </a:xfrm>
-          <a:prstGeom prst="roundRect">
-            <a:avLst>
-              <a:gd name="adj" fmla="val 10000"/>
-            </a:avLst>
-          </a:prstGeom>
-          <a:solidFill>
-            <a:srgbClr val="17375D"/>
-          </a:solidFill>
-          <a:ln>
-            <a:noFill/>
-          </a:ln>
-          <a:effectLst/>
-        </p:spPr>
-        <p:style>
-          <a:lnRef idx="1">
-            <a:schemeClr val="accent1"/>
-          </a:lnRef>
-          <a:fillRef idx="3">
-            <a:schemeClr val="accent1"/>
-          </a:fillRef>
-          <a:effectRef idx="2">
-            <a:schemeClr val="accent1"/>
-          </a:effectRef>
-          <a:fontRef idx="minor">
-            <a:schemeClr val="lt1"/>
-          </a:fontRef>
-        </p:style>
-        <p:txBody>
-          <a:bodyPr rtlCol="0" anchor="ctr"/>
-          <a:lstStyle/>
-          <a:p>
-            <a:pPr algn="ctr"/>
-          </a:p>
-        </p:txBody>
-      </p:sp>
-      <p:sp>
-        <p:nvSpPr>
-          <p:cNvPr id="19" name="TextBox 18"/>
-          <p:cNvSpPr txBox="1"/>
-          <p:nvPr/>
-        </p:nvSpPr>
-        <p:spPr>
-          <a:xfrm>
-            <a:off x="640080" y="3017520"/>
-            <a:ext cx="7863840" cy="274320"/>
-          </a:xfrm>
-          <a:prstGeom prst="rect">
-            <a:avLst/>
-          </a:prstGeom>
-          <a:noFill/>
-        </p:spPr>
-        <p:txBody>
-          <a:bodyPr wrap="square" anchor="t" lIns="0" rIns="0" tIns="0" bIns="0">
-            <a:spAutoFit/>
-          </a:bodyPr>
-          <a:lstStyle/>
-          <a:p>
-            <a:pPr algn="l"/>
-            <a:r>
-              <a:rPr sz="950" b="1" i="0">
-                <a:solidFill>
-                  <a:srgbClr val="FFE200"/>
-                </a:solidFill>
-                <a:latin typeface="Calibri"/>
-              </a:rPr>
-              <a:t>LÍNEAS BASE DE DESEMPEÑO QUE FIJA LA LITERATURA</a:t>
-            </a:r>
-          </a:p>
-        </p:txBody>
-      </p:sp>
-      <p:sp>
-        <p:nvSpPr>
-          <p:cNvPr id="20" name="TextBox 19"/>
-          <p:cNvSpPr txBox="1"/>
-          <p:nvPr/>
-        </p:nvSpPr>
-        <p:spPr>
-          <a:xfrm>
-            <a:off x="640080" y="3310128"/>
-            <a:ext cx="7863840" cy="457200"/>
-          </a:xfrm>
-          <a:prstGeom prst="rect">
-            <a:avLst/>
-          </a:prstGeom>
-          <a:noFill/>
-        </p:spPr>
-        <p:txBody>
-          <a:bodyPr wrap="square" anchor="t" lIns="0" rIns="0" tIns="0" bIns="0">
-            <a:spAutoFit/>
-          </a:bodyPr>
-          <a:lstStyle/>
-          <a:p>
-            <a:pPr algn="l">
-              <a:lnSpc>
-                <a:spcPct val="105000"/>
-              </a:lnSpc>
-            </a:pPr>
-            <a:r>
-              <a:rPr sz="930" b="0" i="0">
-                <a:solidFill>
-                  <a:srgbClr val="FFFFFF"/>
-                </a:solidFill>
-                <a:latin typeface="Calibri"/>
-              </a:rPr>
-              <a:t>PM₂.₅ global con GWR: R² 0.81 en validación cruzada.² </a:t>
-            </a:r>
-            <a:r>
-              <a:rPr sz="930" b="0" i="0">
-                <a:solidFill>
-                  <a:srgbClr val="FFFFFF"/>
-                </a:solidFill>
-                <a:latin typeface="Calibri"/>
-              </a:rPr>
-              <a:t>Gases diarios en China: R² 0.80 a 0.84 en CV y 0.61 a 0.70 fuera de estación.³ </a:t>
-            </a:r>
-            <a:r>
-              <a:rPr sz="930" b="0" i="0">
-                <a:solidFill>
-                  <a:srgbClr val="CDE2FB"/>
-                </a:solidFill>
-                <a:latin typeface="Calibri"/>
-              </a:rPr>
-              <a:t>Esa es la vara realista para evaluar nuestras superficies por contaminante y macrozona.</a:t>
-            </a:r>
-          </a:p>
-        </p:txBody>
-      </p:sp>
-      <p:sp>
-        <p:nvSpPr>
-          <p:cNvPr id="21" name="TextBox 20"/>
-          <p:cNvSpPr txBox="1"/>
-          <p:nvPr/>
-        </p:nvSpPr>
-        <p:spPr>
-          <a:xfrm>
-            <a:off x="457200" y="4059936"/>
-            <a:ext cx="6446520" cy="832103"/>
-          </a:xfrm>
-          <a:prstGeom prst="rect">
-            <a:avLst/>
-          </a:prstGeom>
-          <a:noFill/>
-        </p:spPr>
-        <p:txBody>
-          <a:bodyPr wrap="square" anchor="t" lIns="0" rIns="0" tIns="0" bIns="0">
-            <a:spAutoFit/>
-          </a:bodyPr>
-          <a:lstStyle/>
-          <a:p>
-            <a:pPr algn="l">
-              <a:spcAft>
-                <a:spcPts val="100"/>
-              </a:spcAft>
-            </a:pPr>
-            <a:r>
-              <a:rPr sz="620" b="0" i="0">
-                <a:solidFill>
-                  <a:srgbClr val="898781"/>
-                </a:solidFill>
-                <a:latin typeface="Calibri"/>
-              </a:rPr>
-              <a:t>¹ Hoek G. et al. A review of land-use regression models to assess spatial variation of outdoor air pollution. Atmospheric Environment 42 (2008). doi:10.1016/j.atmosenv.2008.05.057</a:t>
-            </a:r>
-          </a:p>
-          <a:p>
-            <a:pPr algn="l">
-              <a:spcAft>
-                <a:spcPts val="100"/>
-              </a:spcAft>
-            </a:pPr>
-            <a:r>
-              <a:rPr sz="620" b="0" i="0">
-                <a:solidFill>
-                  <a:srgbClr val="898781"/>
-                </a:solidFill>
-                <a:latin typeface="Calibri"/>
-              </a:rPr>
-              <a:t>² van Donkelaar A. et al. Global estimates of fine particulate matter using a combined geophysical-statistical method with information from satellites, models, and monitors. Environ. Sci. Technol. 50 (2016). doi:10.1021/acs.est.5b05833</a:t>
-            </a:r>
-          </a:p>
-          <a:p>
-            <a:pPr algn="l">
-              <a:spcAft>
-                <a:spcPts val="100"/>
-              </a:spcAft>
-            </a:pPr>
-            <a:r>
-              <a:rPr sz="620" b="0" i="0">
-                <a:solidFill>
-                  <a:srgbClr val="898781"/>
-                </a:solidFill>
-                <a:latin typeface="Calibri"/>
-              </a:rPr>
-              <a:t>³ Wei J. et al. Ground-level gaseous pollutants (NO2, SO2, and CO) in China: daily seamless mapping and spatiotemporal variations. Atmos. Chem. Phys. 23, 1511–1532 (2023). doi:10.5194/acp-23-1511-2023</a:t>
+              <a:t>problema → brecha → evidencia → hipótesis → objetivos → metodología.</a:t>
             </a:r>
           </a:p>
         </p:txBody>
@@ -9617,13 +9789,13 @@
           <a:lstStyle/>
           <a:p>
             <a:r>
-              <a:rPr sz="2000" b="1">
+              <a:rPr sz="1900" b="1">
                 <a:solidFill>
                   <a:srgbClr val="FFFFFF"/>
                 </a:solidFill>
                 <a:latin typeface="Calibri"/>
               </a:rPr>
-              <a:t>Semana 3: qué hicimos, qué costó y qué viene</a:t>
+              <a:t>Estrategia de validación por escenarios</a:t>
             </a:r>
             <a:endParaRPr lang="es-ES" dirty="0"/>
           </a:p>
@@ -9638,7 +9810,7 @@
         <p:spPr>
           <a:xfrm>
             <a:off x="457200" y="1115568"/>
-            <a:ext cx="2011680" cy="2578608"/>
+            <a:ext cx="4041648" cy="2331720"/>
           </a:xfrm>
           <a:prstGeom prst="roundRect">
             <a:avLst>
@@ -9646,10 +9818,12 @@
             </a:avLst>
           </a:prstGeom>
           <a:solidFill>
-            <a:srgbClr val="F2F6FC"/>
+            <a:srgbClr val="FFFFFF"/>
           </a:solidFill>
-          <a:ln>
-            <a:noFill/>
+          <a:ln w="12700">
+            <a:solidFill>
+              <a:srgbClr val="D8DEE9"/>
+            </a:solidFill>
           </a:ln>
           <a:effectLst/>
         </p:spPr>
@@ -9677,20 +9851,156 @@
       </p:sp>
       <p:sp>
         <p:nvSpPr>
-          <p:cNvPr id="4" name="Oval 3"/>
+          <p:cNvPr id="4" name="TextBox 3"/>
+          <p:cNvSpPr txBox="1"/>
+          <p:nvPr/>
+        </p:nvSpPr>
+        <p:spPr>
+          <a:xfrm>
+            <a:off x="621792" y="1225296"/>
+            <a:ext cx="3749039" cy="237744"/>
+          </a:xfrm>
+          <a:prstGeom prst="rect">
+            <a:avLst/>
+          </a:prstGeom>
+          <a:noFill/>
+        </p:spPr>
+        <p:txBody>
+          <a:bodyPr wrap="square" anchor="t" lIns="0" rIns="0" tIns="0" bIns="0">
+            <a:spAutoFit/>
+          </a:bodyPr>
+          <a:lstStyle/>
+          <a:p>
+            <a:pPr algn="l"/>
+            <a:r>
+              <a:rPr sz="1000" b="1" i="0">
+                <a:solidFill>
+                  <a:srgbClr val="B24E1C"/>
+                </a:solidFill>
+                <a:latin typeface="Calibri"/>
+              </a:rPr>
+              <a:t>El desafío: dependencia espacial y temporal</a:t>
+            </a:r>
+          </a:p>
+        </p:txBody>
+      </p:sp>
+      <p:sp>
+        <p:nvSpPr>
+          <p:cNvPr id="5" name="TextBox 4"/>
+          <p:cNvSpPr txBox="1"/>
+          <p:nvPr/>
+        </p:nvSpPr>
+        <p:spPr>
+          <a:xfrm>
+            <a:off x="621792" y="1536192"/>
+            <a:ext cx="3712463" cy="1828800"/>
+          </a:xfrm>
+          <a:prstGeom prst="rect">
+            <a:avLst/>
+          </a:prstGeom>
+          <a:noFill/>
+        </p:spPr>
+        <p:txBody>
+          <a:bodyPr wrap="square" lIns="0" rIns="0" tIns="0" bIns="0">
+            <a:spAutoFit/>
+          </a:bodyPr>
+          <a:lstStyle/>
+          <a:p>
+            <a:pPr>
+              <a:lnSpc>
+                <a:spcPct val="98000"/>
+              </a:lnSpc>
+              <a:spcAft>
+                <a:spcPts val="400"/>
+              </a:spcAft>
+            </a:pPr>
+            <a:r>
+              <a:rPr sz="860">
+                <a:solidFill>
+                  <a:srgbClr val="52514E"/>
+                </a:solidFill>
+                <a:latin typeface="Calibri"/>
+              </a:rPr>
+              <a:t>• La contaminación no es independiente entre lugares: hay autocorrelación espacial</a:t>
+            </a:r>
+          </a:p>
+          <a:p>
+            <a:pPr>
+              <a:lnSpc>
+                <a:spcPct val="98000"/>
+              </a:lnSpc>
+              <a:spcAft>
+                <a:spcPts val="400"/>
+              </a:spcAft>
+            </a:pPr>
+            <a:r>
+              <a:rPr sz="860">
+                <a:solidFill>
+                  <a:srgbClr val="52514E"/>
+                </a:solidFill>
+                <a:latin typeface="Calibri"/>
+              </a:rPr>
+              <a:t>• Horas consecutivas están fuertemente correlacionadas</a:t>
+            </a:r>
+          </a:p>
+          <a:p>
+            <a:pPr>
+              <a:lnSpc>
+                <a:spcPct val="98000"/>
+              </a:lnSpc>
+              <a:spcAft>
+                <a:spcPts val="400"/>
+              </a:spcAft>
+            </a:pPr>
+            <a:r>
+              <a:rPr sz="860">
+                <a:solidFill>
+                  <a:srgbClr val="52514E"/>
+                </a:solidFill>
+                <a:latin typeface="Calibri"/>
+              </a:rPr>
+              <a:t>• La red SINCA no es uniforme: 3 regiones concentran la mitad de las estaciones</a:t>
+            </a:r>
+          </a:p>
+          <a:p>
+            <a:pPr>
+              <a:lnSpc>
+                <a:spcPct val="98000"/>
+              </a:lnSpc>
+              <a:spcAft>
+                <a:spcPts val="400"/>
+              </a:spcAft>
+            </a:pPr>
+            <a:r>
+              <a:rPr sz="860">
+                <a:solidFill>
+                  <a:srgbClr val="52514E"/>
+                </a:solidFill>
+                <a:latin typeface="Calibri"/>
+              </a:rPr>
+              <a:t>• Mezclar observaciones cercanas infla las métricas</a:t>
+            </a:r>
+          </a:p>
+        </p:txBody>
+      </p:sp>
+      <p:sp>
+        <p:nvSpPr>
+          <p:cNvPr id="6" name="Rounded Rectangle 5"/>
           <p:cNvSpPr/>
           <p:nvPr/>
         </p:nvSpPr>
         <p:spPr>
           <a:xfrm>
-            <a:off x="585216" y="1243584"/>
-            <a:ext cx="384048" cy="384048"/>
-          </a:xfrm>
-          <a:prstGeom prst="ellipse">
-            <a:avLst/>
+            <a:off x="4645152" y="1115568"/>
+            <a:ext cx="4041648" cy="2331720"/>
+          </a:xfrm>
+          <a:prstGeom prst="roundRect">
+            <a:avLst>
+              <a:gd name="adj" fmla="val 10000"/>
+            </a:avLst>
           </a:prstGeom>
           <a:solidFill>
-            <a:srgbClr val="1F497D"/>
+            <a:srgbClr val="F2F6FC"/>
           </a:solidFill>
           <a:ln>
             <a:noFill/>
@@ -9719,69 +10029,6 @@
           </a:p>
         </p:txBody>
       </p:sp>
-      <p:pic>
-        <p:nvPicPr>
-          <p:cNvPr id="5" name="Picture 4" descr="checklist_w.png"/>
-          <p:cNvPicPr>
-            <a:picLocks noChangeAspect="1"/>
-          </p:cNvPicPr>
-          <p:nvPr/>
-        </p:nvPicPr>
-        <p:blipFill>
-          <a:blip r:embed="rId2"/>
-          <a:stretch>
-            <a:fillRect/>
-          </a:stretch>
-        </p:blipFill>
-        <p:spPr>
-          <a:xfrm>
-            <a:off x="677387" y="1335755"/>
-            <a:ext cx="199704" cy="199704"/>
-          </a:xfrm>
-          <a:prstGeom prst="rect">
-            <a:avLst/>
-          </a:prstGeom>
-        </p:spPr>
-      </p:pic>
-      <p:sp>
-        <p:nvSpPr>
-          <p:cNvPr id="6" name="TextBox 5"/>
-          <p:cNvSpPr txBox="1"/>
-          <p:nvPr/>
-        </p:nvSpPr>
-        <p:spPr>
-          <a:xfrm>
-            <a:off x="1042416" y="1225296"/>
-            <a:ext cx="1371600" cy="457200"/>
-          </a:xfrm>
-          <a:prstGeom prst="rect">
-            <a:avLst/>
-          </a:prstGeom>
-          <a:noFill/>
-        </p:spPr>
-        <p:txBody>
-          <a:bodyPr wrap="square" anchor="ctr" lIns="0" rIns="0" tIns="0" bIns="0">
-            <a:spAutoFit/>
-          </a:bodyPr>
-          <a:lstStyle/>
-          <a:p>
-            <a:pPr algn="l">
-              <a:lnSpc>
-                <a:spcPct val="90000"/>
-              </a:lnSpc>
-            </a:pPr>
-            <a:r>
-              <a:rPr sz="950" b="1" i="0">
-                <a:solidFill>
-                  <a:srgbClr val="1F497D"/>
-                </a:solidFill>
-                <a:latin typeface="Calibri"/>
-              </a:rPr>
-              <a:t>Objetivos de la semana</a:t>
-            </a:r>
-          </a:p>
-        </p:txBody>
-      </p:sp>
       <p:sp>
         <p:nvSpPr>
           <p:cNvPr id="7" name="TextBox 6"/>
@@ -9790,8 +10037,43 @@
         </p:nvSpPr>
         <p:spPr>
           <a:xfrm>
-            <a:off x="603504" y="1810512"/>
-            <a:ext cx="1737360" cy="1828800"/>
+            <a:off x="4809744" y="1225296"/>
+            <a:ext cx="3749039" cy="237744"/>
+          </a:xfrm>
+          <a:prstGeom prst="rect">
+            <a:avLst/>
+          </a:prstGeom>
+          <a:noFill/>
+        </p:spPr>
+        <p:txBody>
+          <a:bodyPr wrap="square" anchor="t" lIns="0" rIns="0" tIns="0" bIns="0">
+            <a:spAutoFit/>
+          </a:bodyPr>
+          <a:lstStyle/>
+          <a:p>
+            <a:pPr algn="l"/>
+            <a:r>
+              <a:rPr sz="1000" b="1" i="0">
+                <a:solidFill>
+                  <a:srgbClr val="0F7D57"/>
+                </a:solidFill>
+                <a:latin typeface="Calibri"/>
+              </a:rPr>
+              <a:t>Nuestra estrategia, por bloques</a:t>
+            </a:r>
+          </a:p>
+        </p:txBody>
+      </p:sp>
+      <p:sp>
+        <p:nvSpPr>
+          <p:cNvPr id="8" name="TextBox 7"/>
+          <p:cNvSpPr txBox="1"/>
+          <p:nvPr/>
+        </p:nvSpPr>
+        <p:spPr>
+          <a:xfrm>
+            <a:off x="4809744" y="1536192"/>
+            <a:ext cx="3712463" cy="1828800"/>
           </a:xfrm>
           <a:prstGeom prst="rect">
             <a:avLst/>
@@ -9806,72 +10088,91 @@
           <a:p>
             <a:pPr>
               <a:lnSpc>
-                <a:spcPct val="95000"/>
+                <a:spcPct val="98000"/>
               </a:lnSpc>
               <a:spcAft>
                 <a:spcPts val="400"/>
               </a:spcAft>
             </a:pPr>
             <a:r>
-              <a:rPr sz="760">
+              <a:rPr sz="860">
                 <a:solidFill>
                   <a:srgbClr val="52514E"/>
                 </a:solidFill>
                 <a:latin typeface="Calibri"/>
               </a:rPr>
-              <a:t>• Revisar literatura por contaminante y por método</a:t>
+              <a:t>• LOSO (dejar una estación fuera) como primera aproximación</a:t>
             </a:r>
           </a:p>
           <a:p>
             <a:pPr>
               <a:lnSpc>
-                <a:spcPct val="95000"/>
+                <a:spcPct val="98000"/>
               </a:lnSpc>
               <a:spcAft>
                 <a:spcPts val="400"/>
               </a:spcAft>
             </a:pPr>
             <a:r>
-              <a:rPr sz="760">
+              <a:rPr sz="860">
                 <a:solidFill>
                   <a:srgbClr val="52514E"/>
                 </a:solidFill>
                 <a:latin typeface="Calibri"/>
               </a:rPr>
-              <a:t>• Fijar líneas base de desempeño realistas</a:t>
+              <a:t>• Bloques espaciales y macrozonas completas fuera</a:t>
             </a:r>
           </a:p>
           <a:p>
             <a:pPr>
               <a:lnSpc>
-                <a:spcPct val="95000"/>
+                <a:spcPct val="98000"/>
               </a:lnSpc>
               <a:spcAft>
                 <a:spcPts val="400"/>
               </a:spcAft>
             </a:pPr>
             <a:r>
-              <a:rPr sz="760">
+              <a:rPr sz="860">
                 <a:solidFill>
                   <a:srgbClr val="52514E"/>
                 </a:solidFill>
                 <a:latin typeface="Calibri"/>
               </a:rPr>
-              <a:t>• Armar el marco para la defensa de tema</a:t>
-            </a:r>
-          </a:p>
-        </p:txBody>
-      </p:sp>
-      <p:sp>
-        <p:nvSpPr>
-          <p:cNvPr id="8" name="Rounded Rectangle 7"/>
+              <a:t>• Bloques temporales y validación hacia adelante</a:t>
+            </a:r>
+          </a:p>
+          <a:p>
+            <a:pPr>
+              <a:lnSpc>
+                <a:spcPct val="98000"/>
+              </a:lnSpc>
+              <a:spcAft>
+                <a:spcPts val="400"/>
+              </a:spcAft>
+            </a:pPr>
+            <a:r>
+              <a:rPr sz="860">
+                <a:solidFill>
+                  <a:srgbClr val="52514E"/>
+                </a:solidFill>
+                <a:latin typeface="Calibri"/>
+              </a:rPr>
+              <a:t>• Reporte de métricas por contaminante, estación y macrozona</a:t>
+            </a:r>
+          </a:p>
+        </p:txBody>
+      </p:sp>
+      <p:sp>
+        <p:nvSpPr>
+          <p:cNvPr id="9" name="Rounded Rectangle 8"/>
           <p:cNvSpPr/>
           <p:nvPr/>
         </p:nvSpPr>
         <p:spPr>
           <a:xfrm>
-            <a:off x="2578608" y="1115568"/>
-            <a:ext cx="2011680" cy="2578608"/>
+            <a:off x="457200" y="3621024"/>
+            <a:ext cx="8229600" cy="658368"/>
           </a:xfrm>
           <a:prstGeom prst="roundRect">
             <a:avLst>
@@ -9879,7 +10180,7 @@
             </a:avLst>
           </a:prstGeom>
           <a:solidFill>
-            <a:srgbClr val="F2F6FC"/>
+            <a:srgbClr val="17375D"/>
           </a:solidFill>
           <a:ln>
             <a:noFill/>
@@ -9910,72 +10211,48 @@
       </p:sp>
       <p:sp>
         <p:nvSpPr>
-          <p:cNvPr id="9" name="Oval 8"/>
-          <p:cNvSpPr/>
+          <p:cNvPr id="10" name="TextBox 9"/>
+          <p:cNvSpPr txBox="1"/>
           <p:nvPr/>
         </p:nvSpPr>
         <p:spPr>
           <a:xfrm>
-            <a:off x="2706624" y="1243584"/>
-            <a:ext cx="384048" cy="384048"/>
-          </a:xfrm>
-          <a:prstGeom prst="ellipse">
-            <a:avLst/>
-          </a:prstGeom>
-          <a:solidFill>
-            <a:srgbClr val="3366CC"/>
-          </a:solidFill>
-          <a:ln>
-            <a:noFill/>
-          </a:ln>
-          <a:effectLst/>
-        </p:spPr>
-        <p:style>
-          <a:lnRef idx="1">
-            <a:schemeClr val="accent1"/>
-          </a:lnRef>
-          <a:fillRef idx="3">
-            <a:schemeClr val="accent1"/>
-          </a:fillRef>
-          <a:effectRef idx="2">
-            <a:schemeClr val="accent1"/>
-          </a:effectRef>
-          <a:fontRef idx="minor">
-            <a:schemeClr val="lt1"/>
-          </a:fontRef>
-        </p:style>
-        <p:txBody>
-          <a:bodyPr rtlCol="0" anchor="ctr"/>
-          <a:lstStyle/>
-          <a:p>
-            <a:pPr algn="ctr"/>
-          </a:p>
-        </p:txBody>
-      </p:sp>
-      <p:pic>
-        <p:nvPicPr>
-          <p:cNvPr id="10" name="Picture 9" descr="download_w.png"/>
-          <p:cNvPicPr>
-            <a:picLocks noChangeAspect="1"/>
-          </p:cNvPicPr>
-          <p:nvPr/>
-        </p:nvPicPr>
-        <p:blipFill>
-          <a:blip r:embed="rId3"/>
-          <a:stretch>
-            <a:fillRect/>
-          </a:stretch>
-        </p:blipFill>
-        <p:spPr>
-          <a:xfrm>
-            <a:off x="2798795" y="1335755"/>
-            <a:ext cx="199704" cy="199704"/>
+            <a:off x="640080" y="3703320"/>
+            <a:ext cx="7863840" cy="512064"/>
           </a:xfrm>
           <a:prstGeom prst="rect">
             <a:avLst/>
           </a:prstGeom>
-        </p:spPr>
-      </p:pic>
+          <a:noFill/>
+        </p:spPr>
+        <p:txBody>
+          <a:bodyPr wrap="square" anchor="t" lIns="0" rIns="0" tIns="0" bIns="0">
+            <a:spAutoFit/>
+          </a:bodyPr>
+          <a:lstStyle/>
+          <a:p>
+            <a:pPr algn="l"/>
+            <a:r>
+              <a:rPr sz="940" b="1" i="0">
+                <a:solidFill>
+                  <a:srgbClr val="FFE200"/>
+                </a:solidFill>
+                <a:latin typeface="Calibri"/>
+              </a:rPr>
+              <a:t>Cada métrica declarará su escenario: </a:t>
+            </a:r>
+            <a:r>
+              <a:rPr sz="940" b="0" i="0">
+                <a:solidFill>
+                  <a:srgbClr val="FFFFFF"/>
+                </a:solidFill>
+                <a:latin typeface="Calibri"/>
+              </a:rPr>
+              <a:t>¿predice una nueva hora en una estación conocida, una estación nunca vista o un territorio donde nunca hubo estación? Fuera de estación, la literatura reporta caídas a R² 0.6 a 0.7.¹</a:t>
+            </a:r>
+          </a:p>
+        </p:txBody>
+      </p:sp>
       <p:sp>
         <p:nvSpPr>
           <p:cNvPr id="11" name="TextBox 10"/>
@@ -9984,8 +10261,8 @@
         </p:nvSpPr>
         <p:spPr>
           <a:xfrm>
-            <a:off x="3163824" y="1225296"/>
-            <a:ext cx="1371600" cy="457200"/>
+            <a:off x="457200" y="4443984"/>
+            <a:ext cx="8229600" cy="448055"/>
           </a:xfrm>
           <a:prstGeom prst="rect">
             <a:avLst/>
@@ -9993,570 +10270,24 @@
           <a:noFill/>
         </p:spPr>
         <p:txBody>
-          <a:bodyPr wrap="square" anchor="ctr" lIns="0" rIns="0" tIns="0" bIns="0">
+          <a:bodyPr wrap="square" anchor="t" lIns="0" rIns="0" tIns="0" bIns="0">
             <a:spAutoFit/>
           </a:bodyPr>
           <a:lstStyle/>
           <a:p>
             <a:pPr algn="l">
-              <a:lnSpc>
-                <a:spcPct val="90000"/>
-              </a:lnSpc>
+              <a:spcAft>
+                <a:spcPts val="100"/>
+              </a:spcAft>
             </a:pPr>
             <a:r>
-              <a:rPr sz="950" b="1" i="0">
-                <a:solidFill>
-                  <a:srgbClr val="3366CC"/>
+              <a:rPr sz="600" b="0" i="0">
+                <a:solidFill>
+                  <a:srgbClr val="898781"/>
                 </a:solidFill>
                 <a:latin typeface="Calibri"/>
               </a:rPr>
-              <a:t>Tareas realizadas</a:t>
-            </a:r>
-          </a:p>
-        </p:txBody>
-      </p:sp>
-      <p:sp>
-        <p:nvSpPr>
-          <p:cNvPr id="12" name="TextBox 11"/>
-          <p:cNvSpPr txBox="1"/>
-          <p:nvPr/>
-        </p:nvSpPr>
-        <p:spPr>
-          <a:xfrm>
-            <a:off x="2724912" y="1810512"/>
-            <a:ext cx="1737360" cy="1828800"/>
-          </a:xfrm>
-          <a:prstGeom prst="rect">
-            <a:avLst/>
-          </a:prstGeom>
-          <a:noFill/>
-        </p:spPr>
-        <p:txBody>
-          <a:bodyPr wrap="square" lIns="0" rIns="0" tIns="0" bIns="0">
-            <a:spAutoFit/>
-          </a:bodyPr>
-          <a:lstStyle/>
-          <a:p>
-            <a:pPr>
-              <a:lnSpc>
-                <a:spcPct val="95000"/>
-              </a:lnSpc>
-              <a:spcAft>
-                <a:spcPts val="400"/>
-              </a:spcAft>
-            </a:pPr>
-            <a:r>
-              <a:rPr sz="760">
-                <a:solidFill>
-                  <a:srgbClr val="52514E"/>
-                </a:solidFill>
-                <a:latin typeface="Calibri"/>
-              </a:rPr>
-              <a:t>• Matriz contaminante × método con referencias verificadas (DOI)</a:t>
-            </a:r>
-          </a:p>
-          <a:p>
-            <a:pPr>
-              <a:lnSpc>
-                <a:spcPct val="95000"/>
-              </a:lnSpc>
-              <a:spcAft>
-                <a:spcPts val="400"/>
-              </a:spcAft>
-            </a:pPr>
-            <a:r>
-              <a:rPr sz="760">
-                <a:solidFill>
-                  <a:srgbClr val="52514E"/>
-                </a:solidFill>
-                <a:latin typeface="Calibri"/>
-              </a:rPr>
-              <a:t>• Bibliografía APA del repositorio actualizada</a:t>
-            </a:r>
-          </a:p>
-          <a:p>
-            <a:pPr>
-              <a:lnSpc>
-                <a:spcPct val="95000"/>
-              </a:lnSpc>
-              <a:spcAft>
-                <a:spcPts val="400"/>
-              </a:spcAft>
-            </a:pPr>
-            <a:r>
-              <a:rPr sz="760">
-                <a:solidFill>
-                  <a:srgbClr val="52514E"/>
-                </a:solidFill>
-                <a:latin typeface="Calibri"/>
-              </a:rPr>
-              <a:t>• Líneas base: R² 0.8+ en CV; 0.6 a 0.7 fuera de estación</a:t>
-            </a:r>
-          </a:p>
-        </p:txBody>
-      </p:sp>
-      <p:sp>
-        <p:nvSpPr>
-          <p:cNvPr id="13" name="Rounded Rectangle 12"/>
-          <p:cNvSpPr/>
-          <p:nvPr/>
-        </p:nvSpPr>
-        <p:spPr>
-          <a:xfrm>
-            <a:off x="4700016" y="1115568"/>
-            <a:ext cx="2011680" cy="2578608"/>
-          </a:xfrm>
-          <a:prstGeom prst="roundRect">
-            <a:avLst>
-              <a:gd name="adj" fmla="val 10000"/>
-            </a:avLst>
-          </a:prstGeom>
-          <a:solidFill>
-            <a:srgbClr val="F2F6FC"/>
-          </a:solidFill>
-          <a:ln>
-            <a:noFill/>
-          </a:ln>
-          <a:effectLst/>
-        </p:spPr>
-        <p:style>
-          <a:lnRef idx="1">
-            <a:schemeClr val="accent1"/>
-          </a:lnRef>
-          <a:fillRef idx="3">
-            <a:schemeClr val="accent1"/>
-          </a:fillRef>
-          <a:effectRef idx="2">
-            <a:schemeClr val="accent1"/>
-          </a:effectRef>
-          <a:fontRef idx="minor">
-            <a:schemeClr val="lt1"/>
-          </a:fontRef>
-        </p:style>
-        <p:txBody>
-          <a:bodyPr rtlCol="0" anchor="ctr"/>
-          <a:lstStyle/>
-          <a:p>
-            <a:pPr algn="ctr"/>
-          </a:p>
-        </p:txBody>
-      </p:sp>
-      <p:sp>
-        <p:nvSpPr>
-          <p:cNvPr id="14" name="Oval 13"/>
-          <p:cNvSpPr/>
-          <p:nvPr/>
-        </p:nvSpPr>
-        <p:spPr>
-          <a:xfrm>
-            <a:off x="4828031" y="1243584"/>
-            <a:ext cx="384048" cy="384048"/>
-          </a:xfrm>
-          <a:prstGeom prst="ellipse">
-            <a:avLst/>
-          </a:prstGeom>
-          <a:solidFill>
-            <a:srgbClr val="B24E1C"/>
-          </a:solidFill>
-          <a:ln>
-            <a:noFill/>
-          </a:ln>
-          <a:effectLst/>
-        </p:spPr>
-        <p:style>
-          <a:lnRef idx="1">
-            <a:schemeClr val="accent1"/>
-          </a:lnRef>
-          <a:fillRef idx="3">
-            <a:schemeClr val="accent1"/>
-          </a:fillRef>
-          <a:effectRef idx="2">
-            <a:schemeClr val="accent1"/>
-          </a:effectRef>
-          <a:fontRef idx="minor">
-            <a:schemeClr val="lt1"/>
-          </a:fontRef>
-        </p:style>
-        <p:txBody>
-          <a:bodyPr rtlCol="0" anchor="ctr"/>
-          <a:lstStyle/>
-          <a:p>
-            <a:pPr algn="ctr"/>
-          </a:p>
-        </p:txBody>
-      </p:sp>
-      <p:pic>
-        <p:nvPicPr>
-          <p:cNvPr id="15" name="Picture 14" descr="warning_w.png"/>
-          <p:cNvPicPr>
-            <a:picLocks noChangeAspect="1"/>
-          </p:cNvPicPr>
-          <p:nvPr/>
-        </p:nvPicPr>
-        <p:blipFill>
-          <a:blip r:embed="rId4"/>
-          <a:stretch>
-            <a:fillRect/>
-          </a:stretch>
-        </p:blipFill>
-        <p:spPr>
-          <a:xfrm>
-            <a:off x="4920203" y="1335755"/>
-            <a:ext cx="199704" cy="199704"/>
-          </a:xfrm>
-          <a:prstGeom prst="rect">
-            <a:avLst/>
-          </a:prstGeom>
-        </p:spPr>
-      </p:pic>
-      <p:sp>
-        <p:nvSpPr>
-          <p:cNvPr id="16" name="TextBox 15"/>
-          <p:cNvSpPr txBox="1"/>
-          <p:nvPr/>
-        </p:nvSpPr>
-        <p:spPr>
-          <a:xfrm>
-            <a:off x="5285231" y="1225296"/>
-            <a:ext cx="1371600" cy="457200"/>
-          </a:xfrm>
-          <a:prstGeom prst="rect">
-            <a:avLst/>
-          </a:prstGeom>
-          <a:noFill/>
-        </p:spPr>
-        <p:txBody>
-          <a:bodyPr wrap="square" anchor="ctr" lIns="0" rIns="0" tIns="0" bIns="0">
-            <a:spAutoFit/>
-          </a:bodyPr>
-          <a:lstStyle/>
-          <a:p>
-            <a:pPr algn="l">
-              <a:lnSpc>
-                <a:spcPct val="90000"/>
-              </a:lnSpc>
-            </a:pPr>
-            <a:r>
-              <a:rPr sz="950" b="1" i="0">
-                <a:solidFill>
-                  <a:srgbClr val="B24E1C"/>
-                </a:solidFill>
-                <a:latin typeface="Calibri"/>
-              </a:rPr>
-              <a:t>Desafíos</a:t>
-            </a:r>
-          </a:p>
-        </p:txBody>
-      </p:sp>
-      <p:sp>
-        <p:nvSpPr>
-          <p:cNvPr id="17" name="TextBox 16"/>
-          <p:cNvSpPr txBox="1"/>
-          <p:nvPr/>
-        </p:nvSpPr>
-        <p:spPr>
-          <a:xfrm>
-            <a:off x="4846320" y="1810512"/>
-            <a:ext cx="1737360" cy="1828800"/>
-          </a:xfrm>
-          <a:prstGeom prst="rect">
-            <a:avLst/>
-          </a:prstGeom>
-          <a:noFill/>
-        </p:spPr>
-        <p:txBody>
-          <a:bodyPr wrap="square" lIns="0" rIns="0" tIns="0" bIns="0">
-            <a:spAutoFit/>
-          </a:bodyPr>
-          <a:lstStyle/>
-          <a:p>
-            <a:pPr>
-              <a:lnSpc>
-                <a:spcPct val="95000"/>
-              </a:lnSpc>
-              <a:spcAft>
-                <a:spcPts val="400"/>
-              </a:spcAft>
-            </a:pPr>
-            <a:r>
-              <a:rPr sz="760">
-                <a:solidFill>
-                  <a:srgbClr val="52514E"/>
-                </a:solidFill>
-                <a:latin typeface="Calibri"/>
-              </a:rPr>
-              <a:t>• Literatura de SO₂ y CO escasa a nivel global</a:t>
-            </a:r>
-          </a:p>
-          <a:p>
-            <a:pPr>
-              <a:lnSpc>
-                <a:spcPct val="95000"/>
-              </a:lnSpc>
-              <a:spcAft>
-                <a:spcPts val="400"/>
-              </a:spcAft>
-            </a:pPr>
-            <a:r>
-              <a:rPr sz="760">
-                <a:solidFill>
-                  <a:srgbClr val="52514E"/>
-                </a:solidFill>
-                <a:latin typeface="Calibri"/>
-              </a:rPr>
-              <a:t>• Métricas no comparables entre estudios (CV muestral vs espacial)</a:t>
-            </a:r>
-          </a:p>
-          <a:p>
-            <a:pPr>
-              <a:lnSpc>
-                <a:spcPct val="95000"/>
-              </a:lnSpc>
-              <a:spcAft>
-                <a:spcPts val="400"/>
-              </a:spcAft>
-            </a:pPr>
-            <a:r>
-              <a:rPr sz="760">
-                <a:solidFill>
-                  <a:srgbClr val="52514E"/>
-                </a:solidFill>
-                <a:latin typeface="Calibri"/>
-              </a:rPr>
-              <a:t>• Traducir resoluciones de 1 a 10 km a comunas heterogéneas</a:t>
-            </a:r>
-          </a:p>
-        </p:txBody>
-      </p:sp>
-      <p:sp>
-        <p:nvSpPr>
-          <p:cNvPr id="18" name="Rounded Rectangle 17"/>
-          <p:cNvSpPr/>
-          <p:nvPr/>
-        </p:nvSpPr>
-        <p:spPr>
-          <a:xfrm>
-            <a:off x="6821423" y="1115568"/>
-            <a:ext cx="2011680" cy="2578608"/>
-          </a:xfrm>
-          <a:prstGeom prst="roundRect">
-            <a:avLst>
-              <a:gd name="adj" fmla="val 10000"/>
-            </a:avLst>
-          </a:prstGeom>
-          <a:solidFill>
-            <a:srgbClr val="F2F6FC"/>
-          </a:solidFill>
-          <a:ln>
-            <a:noFill/>
-          </a:ln>
-          <a:effectLst/>
-        </p:spPr>
-        <p:style>
-          <a:lnRef idx="1">
-            <a:schemeClr val="accent1"/>
-          </a:lnRef>
-          <a:fillRef idx="3">
-            <a:schemeClr val="accent1"/>
-          </a:fillRef>
-          <a:effectRef idx="2">
-            <a:schemeClr val="accent1"/>
-          </a:effectRef>
-          <a:fontRef idx="minor">
-            <a:schemeClr val="lt1"/>
-          </a:fontRef>
-        </p:style>
-        <p:txBody>
-          <a:bodyPr rtlCol="0" anchor="ctr"/>
-          <a:lstStyle/>
-          <a:p>
-            <a:pPr algn="ctr"/>
-          </a:p>
-        </p:txBody>
-      </p:sp>
-      <p:sp>
-        <p:nvSpPr>
-          <p:cNvPr id="19" name="Oval 18"/>
-          <p:cNvSpPr/>
-          <p:nvPr/>
-        </p:nvSpPr>
-        <p:spPr>
-          <a:xfrm>
-            <a:off x="6949439" y="1243584"/>
-            <a:ext cx="384048" cy="384048"/>
-          </a:xfrm>
-          <a:prstGeom prst="ellipse">
-            <a:avLst/>
-          </a:prstGeom>
-          <a:solidFill>
-            <a:srgbClr val="0F7D57"/>
-          </a:solidFill>
-          <a:ln>
-            <a:noFill/>
-          </a:ln>
-          <a:effectLst/>
-        </p:spPr>
-        <p:style>
-          <a:lnRef idx="1">
-            <a:schemeClr val="accent1"/>
-          </a:lnRef>
-          <a:fillRef idx="3">
-            <a:schemeClr val="accent1"/>
-          </a:fillRef>
-          <a:effectRef idx="2">
-            <a:schemeClr val="accent1"/>
-          </a:effectRef>
-          <a:fontRef idx="minor">
-            <a:schemeClr val="lt1"/>
-          </a:fontRef>
-        </p:style>
-        <p:txBody>
-          <a:bodyPr rtlCol="0" anchor="ctr"/>
-          <a:lstStyle/>
-          <a:p>
-            <a:pPr algn="ctr"/>
-          </a:p>
-        </p:txBody>
-      </p:sp>
-      <p:pic>
-        <p:nvPicPr>
-          <p:cNvPr id="20" name="Picture 19" descr="calendar_w.png"/>
-          <p:cNvPicPr>
-            <a:picLocks noChangeAspect="1"/>
-          </p:cNvPicPr>
-          <p:nvPr/>
-        </p:nvPicPr>
-        <p:blipFill>
-          <a:blip r:embed="rId5"/>
-          <a:stretch>
-            <a:fillRect/>
-          </a:stretch>
-        </p:blipFill>
-        <p:spPr>
-          <a:xfrm>
-            <a:off x="7041611" y="1335755"/>
-            <a:ext cx="199704" cy="199704"/>
-          </a:xfrm>
-          <a:prstGeom prst="rect">
-            <a:avLst/>
-          </a:prstGeom>
-        </p:spPr>
-      </p:pic>
-      <p:sp>
-        <p:nvSpPr>
-          <p:cNvPr id="21" name="TextBox 20"/>
-          <p:cNvSpPr txBox="1"/>
-          <p:nvPr/>
-        </p:nvSpPr>
-        <p:spPr>
-          <a:xfrm>
-            <a:off x="7406640" y="1225296"/>
-            <a:ext cx="1371600" cy="457200"/>
-          </a:xfrm>
-          <a:prstGeom prst="rect">
-            <a:avLst/>
-          </a:prstGeom>
-          <a:noFill/>
-        </p:spPr>
-        <p:txBody>
-          <a:bodyPr wrap="square" anchor="ctr" lIns="0" rIns="0" tIns="0" bIns="0">
-            <a:spAutoFit/>
-          </a:bodyPr>
-          <a:lstStyle/>
-          <a:p>
-            <a:pPr algn="l">
-              <a:lnSpc>
-                <a:spcPct val="90000"/>
-              </a:lnSpc>
-            </a:pPr>
-            <a:r>
-              <a:rPr sz="950" b="1" i="0">
-                <a:solidFill>
-                  <a:srgbClr val="0F7D57"/>
-                </a:solidFill>
-                <a:latin typeface="Calibri"/>
-              </a:rPr>
-              <a:t>Próxima semana</a:t>
-            </a:r>
-          </a:p>
-        </p:txBody>
-      </p:sp>
-      <p:sp>
-        <p:nvSpPr>
-          <p:cNvPr id="22" name="TextBox 21"/>
-          <p:cNvSpPr txBox="1"/>
-          <p:nvPr/>
-        </p:nvSpPr>
-        <p:spPr>
-          <a:xfrm>
-            <a:off x="6967727" y="1810512"/>
-            <a:ext cx="1737360" cy="1828800"/>
-          </a:xfrm>
-          <a:prstGeom prst="rect">
-            <a:avLst/>
-          </a:prstGeom>
-          <a:noFill/>
-        </p:spPr>
-        <p:txBody>
-          <a:bodyPr wrap="square" lIns="0" rIns="0" tIns="0" bIns="0">
-            <a:spAutoFit/>
-          </a:bodyPr>
-          <a:lstStyle/>
-          <a:p>
-            <a:pPr>
-              <a:lnSpc>
-                <a:spcPct val="95000"/>
-              </a:lnSpc>
-              <a:spcAft>
-                <a:spcPts val="400"/>
-              </a:spcAft>
-            </a:pPr>
-            <a:r>
-              <a:rPr sz="760">
-                <a:solidFill>
-                  <a:srgbClr val="52514E"/>
-                </a:solidFill>
-                <a:latin typeface="Calibri"/>
-              </a:rPr>
-              <a:t>• Defensa de tema (semana 4): presentación formal del problema</a:t>
-            </a:r>
-          </a:p>
-          <a:p>
-            <a:pPr>
-              <a:lnSpc>
-                <a:spcPct val="95000"/>
-              </a:lnSpc>
-              <a:spcAft>
-                <a:spcPts val="400"/>
-              </a:spcAft>
-            </a:pPr>
-            <a:r>
-              <a:rPr sz="760">
-                <a:solidFill>
-                  <a:srgbClr val="52514E"/>
-                </a:solidFill>
-                <a:latin typeface="Calibri"/>
-              </a:rPr>
-              <a:t>• Congelar el diseño metodológico</a:t>
-            </a:r>
-          </a:p>
-          <a:p>
-            <a:pPr>
-              <a:lnSpc>
-                <a:spcPct val="95000"/>
-              </a:lnSpc>
-              <a:spcAft>
-                <a:spcPts val="400"/>
-              </a:spcAft>
-            </a:pPr>
-            <a:r>
-              <a:rPr sz="760">
-                <a:solidFill>
-                  <a:srgbClr val="52514E"/>
-                </a:solidFill>
-                <a:latin typeface="Calibri"/>
-              </a:rPr>
-              <a:t>• Iniciar los paneles de modelamiento por contaminante</a:t>
+              <a:t>¹ Wei J. et al. Ground-level gaseous pollutants (NO2, SO2, and CO) in China: daily seamless mapping and spatiotemporal variations. Atmos. Chem. Phys. 23, 1511–1532 (2023). doi:10.5194/acp-23-1511-2023</a:t>
             </a:r>
           </a:p>
         </p:txBody>
@@ -10593,137 +10324,42 @@
       </p:grpSpPr>
       <p:sp>
         <p:nvSpPr>
-          <p:cNvPr id="2" name="TextBox 1"/>
-          <p:cNvSpPr txBox="1"/>
-          <p:nvPr/>
-        </p:nvSpPr>
-        <p:spPr>
-          <a:xfrm>
-            <a:off x="502920" y="932688"/>
-            <a:ext cx="5394960" cy="685800"/>
-          </a:xfrm>
-          <a:prstGeom prst="rect">
-            <a:avLst/>
-          </a:prstGeom>
-          <a:noFill/>
-        </p:spPr>
-        <p:txBody>
-          <a:bodyPr wrap="square" anchor="t" lIns="0" rIns="0" tIns="0" bIns="0">
-            <a:spAutoFit/>
-          </a:bodyPr>
-          <a:lstStyle/>
-          <a:p>
-            <a:pPr algn="l"/>
-            <a:r>
-              <a:rPr sz="1900" b="1" i="0">
+          <p:cNvPr id="2" name="Título 1"/>
+          <p:cNvSpPr>
+            <a:spLocks noGrp="1"/>
+          </p:cNvSpPr>
+          <p:nvPr>
+            <p:ph type="title"/>
+          </p:nvPr>
+        </p:nvSpPr>
+        <p:spPr/>
+        <p:txBody>
+          <a:bodyPr wrap="square" anchor="ctr"/>
+          <a:lstStyle/>
+          <a:p>
+            <a:r>
+              <a:rPr sz="2000" b="1">
                 <a:solidFill>
                   <a:srgbClr val="FFFFFF"/>
                 </a:solidFill>
                 <a:latin typeface="Calibri"/>
               </a:rPr>
-              <a:t>La revisión completa vive
-en el repositorio</a:t>
-            </a:r>
-          </a:p>
-        </p:txBody>
-      </p:sp>
-      <p:sp>
-        <p:nvSpPr>
-          <p:cNvPr id="3" name="TextBox 2"/>
-          <p:cNvSpPr txBox="1"/>
-          <p:nvPr/>
-        </p:nvSpPr>
-        <p:spPr>
-          <a:xfrm>
-            <a:off x="502920" y="1783080"/>
-            <a:ext cx="5394960" cy="1554480"/>
-          </a:xfrm>
-          <a:prstGeom prst="rect">
-            <a:avLst/>
-          </a:prstGeom>
-          <a:noFill/>
-        </p:spPr>
-        <p:txBody>
-          <a:bodyPr wrap="square" lIns="0" rIns="0" tIns="0" bIns="0">
-            <a:spAutoFit/>
-          </a:bodyPr>
-          <a:lstStyle/>
-          <a:p>
-            <a:pPr>
-              <a:spcAft>
-                <a:spcPts val="500"/>
-              </a:spcAft>
-            </a:pPr>
-            <a:r>
-              <a:rPr sz="950">
-                <a:solidFill>
-                  <a:srgbClr val="CDE2FB"/>
-                </a:solidFill>
-                <a:latin typeface="Calibri"/>
-              </a:rPr>
-              <a:t>• docs/: bibliografía APA consolidada y trazable</a:t>
-            </a:r>
-          </a:p>
-          <a:p>
-            <a:pPr>
-              <a:spcAft>
-                <a:spcPts val="500"/>
-              </a:spcAft>
-            </a:pPr>
-            <a:r>
-              <a:rPr sz="950">
-                <a:solidFill>
-                  <a:srgbClr val="CDE2FB"/>
-                </a:solidFill>
-                <a:latin typeface="Calibri"/>
-              </a:rPr>
-              <a:t>• Matriz contaminante × método con cada DOI verificado</a:t>
-            </a:r>
-          </a:p>
-          <a:p>
-            <a:pPr>
-              <a:spcAft>
-                <a:spcPts val="500"/>
-              </a:spcAft>
-            </a:pPr>
-            <a:r>
-              <a:rPr sz="950">
-                <a:solidFill>
-                  <a:srgbClr val="CDE2FB"/>
-                </a:solidFill>
-                <a:latin typeface="Calibri"/>
-              </a:rPr>
-              <a:t>• Líneas base de desempeño por contaminante</a:t>
-            </a:r>
-          </a:p>
-          <a:p>
-            <a:pPr>
-              <a:spcAft>
-                <a:spcPts val="500"/>
-              </a:spcAft>
-            </a:pPr>
-            <a:r>
-              <a:rPr sz="950">
-                <a:solidFill>
-                  <a:srgbClr val="CDE2FB"/>
-                </a:solidFill>
-                <a:latin typeface="Calibri"/>
-              </a:rPr>
-              <a:t>• Todo listo para la defensa de tema de la semana 4</a:t>
-            </a:r>
-          </a:p>
-        </p:txBody>
-      </p:sp>
-      <p:sp>
-        <p:nvSpPr>
-          <p:cNvPr id="4" name="Rounded Rectangle 3"/>
+              <a:t>Semana 3: qué hicimos, qué costó y qué viene</a:t>
+            </a:r>
+            <a:endParaRPr lang="es-ES" dirty="0"/>
+          </a:p>
+        </p:txBody>
+      </p:sp>
+      <p:sp>
+        <p:nvSpPr>
+          <p:cNvPr id="3" name="Rounded Rectangle 2"/>
           <p:cNvSpPr/>
           <p:nvPr/>
         </p:nvSpPr>
         <p:spPr>
           <a:xfrm>
-            <a:off x="502920" y="3456432"/>
-            <a:ext cx="5394960" cy="512064"/>
+            <a:off x="457200" y="1115568"/>
+            <a:ext cx="2011680" cy="2615184"/>
           </a:xfrm>
           <a:prstGeom prst="roundRect">
             <a:avLst>
@@ -10731,7 +10367,7 @@
             </a:avLst>
           </a:prstGeom>
           <a:solidFill>
-            <a:srgbClr val="113E8F"/>
+            <a:srgbClr val="F2F6FC"/>
           </a:solidFill>
           <a:ln>
             <a:noFill/>
@@ -10760,40 +10396,55 @@
           </a:p>
         </p:txBody>
       </p:sp>
-      <p:pic>
-        <p:nvPicPr>
-          <p:cNvPr id="5" name="Picture 4" descr="github_w.png"/>
-          <p:cNvPicPr>
-            <a:picLocks noChangeAspect="1"/>
-          </p:cNvPicPr>
+      <p:sp>
+        <p:nvSpPr>
+          <p:cNvPr id="4" name="TextBox 3"/>
+          <p:cNvSpPr txBox="1"/>
           <p:nvPr/>
-        </p:nvPicPr>
-        <p:blipFill>
-          <a:blip r:embed="rId2"/>
-          <a:stretch>
-            <a:fillRect/>
-          </a:stretch>
-        </p:blipFill>
-        <p:spPr>
-          <a:xfrm>
-            <a:off x="658368" y="3584448"/>
-            <a:ext cx="256032" cy="256032"/>
+        </p:nvSpPr>
+        <p:spPr>
+          <a:xfrm>
+            <a:off x="603504" y="1243584"/>
+            <a:ext cx="1783080" cy="457200"/>
           </a:xfrm>
           <a:prstGeom prst="rect">
             <a:avLst/>
           </a:prstGeom>
-        </p:spPr>
-      </p:pic>
-      <p:sp>
-        <p:nvSpPr>
-          <p:cNvPr id="6" name="TextBox 5"/>
+          <a:noFill/>
+        </p:spPr>
+        <p:txBody>
+          <a:bodyPr wrap="square" anchor="t" lIns="0" rIns="0" tIns="0" bIns="0">
+            <a:spAutoFit/>
+          </a:bodyPr>
+          <a:lstStyle/>
+          <a:p>
+            <a:pPr algn="l">
+              <a:lnSpc>
+                <a:spcPct val="90000"/>
+              </a:lnSpc>
+            </a:pPr>
+            <a:r>
+              <a:rPr sz="980" b="1" i="0">
+                <a:solidFill>
+                  <a:srgbClr val="1F497D"/>
+                </a:solidFill>
+                <a:latin typeface="Calibri"/>
+              </a:rPr>
+              <a:t>Objetivos de la semana</a:t>
+            </a:r>
+          </a:p>
+        </p:txBody>
+      </p:sp>
+      <p:sp>
+        <p:nvSpPr>
+          <p:cNvPr id="5" name="TextBox 4"/>
           <p:cNvSpPr txBox="1"/>
           <p:nvPr/>
         </p:nvSpPr>
         <p:spPr>
           <a:xfrm>
-            <a:off x="1005840" y="3456432"/>
-            <a:ext cx="4846320" cy="512064"/>
+            <a:off x="603504" y="1755648"/>
+            <a:ext cx="1737360" cy="1920240"/>
           </a:xfrm>
           <a:prstGeom prst="rect">
             <a:avLst/>
@@ -10801,42 +10452,87 @@
           <a:noFill/>
         </p:spPr>
         <p:txBody>
-          <a:bodyPr wrap="square" anchor="ctr" lIns="0" rIns="0" tIns="0" bIns="0">
+          <a:bodyPr wrap="square" lIns="0" rIns="0" tIns="0" bIns="0">
             <a:spAutoFit/>
           </a:bodyPr>
           <a:lstStyle/>
           <a:p>
-            <a:pPr algn="l"/>
-            <a:r>
-              <a:rPr sz="1150" b="1" i="0">
-                <a:solidFill>
-                  <a:srgbClr val="FFFFFF"/>
+            <a:pPr>
+              <a:lnSpc>
+                <a:spcPct val="96000"/>
+              </a:lnSpc>
+              <a:spcAft>
+                <a:spcPts val="500"/>
+              </a:spcAft>
+            </a:pPr>
+            <a:r>
+              <a:rPr sz="780">
+                <a:solidFill>
+                  <a:srgbClr val="52514E"/>
                 </a:solidFill>
                 <a:latin typeface="Calibri"/>
               </a:rPr>
-              <a:t>github.com/AmaruSimonAgueroJimenez/Air-Pollution</a:t>
-            </a:r>
-          </a:p>
-        </p:txBody>
-      </p:sp>
-      <p:sp>
-        <p:nvSpPr>
-          <p:cNvPr id="7" name="Rounded Rectangle 6"/>
+              <a:t>• Profundizar la definición del problema y su evidencia</a:t>
+            </a:r>
+          </a:p>
+          <a:p>
+            <a:pPr>
+              <a:lnSpc>
+                <a:spcPct val="96000"/>
+              </a:lnSpc>
+              <a:spcAft>
+                <a:spcPts val="500"/>
+              </a:spcAft>
+            </a:pPr>
+            <a:r>
+              <a:rPr sz="780">
+                <a:solidFill>
+                  <a:srgbClr val="52514E"/>
+                </a:solidFill>
+                <a:latin typeface="Calibri"/>
+              </a:rPr>
+              <a:t>• Revisión de literatura internacional y chilena</a:t>
+            </a:r>
+          </a:p>
+          <a:p>
+            <a:pPr>
+              <a:lnSpc>
+                <a:spcPct val="96000"/>
+              </a:lnSpc>
+              <a:spcAft>
+                <a:spcPts val="500"/>
+              </a:spcAft>
+            </a:pPr>
+            <a:r>
+              <a:rPr sz="780">
+                <a:solidFill>
+                  <a:srgbClr val="52514E"/>
+                </a:solidFill>
+                <a:latin typeface="Calibri"/>
+              </a:rPr>
+              <a:t>• Cuantificar la brecha con datos del repositorio</a:t>
+            </a:r>
+          </a:p>
+        </p:txBody>
+      </p:sp>
+      <p:sp>
+        <p:nvSpPr>
+          <p:cNvPr id="6" name="Rounded Rectangle 5"/>
           <p:cNvSpPr/>
           <p:nvPr/>
         </p:nvSpPr>
         <p:spPr>
           <a:xfrm>
-            <a:off x="6355080" y="932688"/>
-            <a:ext cx="2331720" cy="3035808"/>
+            <a:off x="2578608" y="1115568"/>
+            <a:ext cx="2011680" cy="2615184"/>
           </a:xfrm>
           <a:prstGeom prst="roundRect">
             <a:avLst>
-              <a:gd name="adj" fmla="val 6000"/>
+              <a:gd name="adj" fmla="val 10000"/>
             </a:avLst>
           </a:prstGeom>
           <a:solidFill>
-            <a:srgbClr val="FFFFFF"/>
+            <a:srgbClr val="F2F6FC"/>
           </a:solidFill>
           <a:ln>
             <a:noFill/>
@@ -10865,40 +10561,16 @@
           </a:p>
         </p:txBody>
       </p:sp>
-      <p:pic>
-        <p:nvPicPr>
-          <p:cNvPr id="8" name="Picture 7" descr="qr_repo.png"/>
-          <p:cNvPicPr>
-            <a:picLocks noChangeAspect="1"/>
-          </p:cNvPicPr>
-          <p:nvPr/>
-        </p:nvPicPr>
-        <p:blipFill>
-          <a:blip r:embed="rId3"/>
-          <a:stretch>
-            <a:fillRect/>
-          </a:stretch>
-        </p:blipFill>
-        <p:spPr>
-          <a:xfrm>
-            <a:off x="6556248" y="1133856"/>
-            <a:ext cx="1929384" cy="1929384"/>
-          </a:xfrm>
-          <a:prstGeom prst="rect">
-            <a:avLst/>
-          </a:prstGeom>
-        </p:spPr>
-      </p:pic>
-      <p:sp>
-        <p:nvSpPr>
-          <p:cNvPr id="9" name="TextBox 8"/>
+      <p:sp>
+        <p:nvSpPr>
+          <p:cNvPr id="7" name="TextBox 6"/>
           <p:cNvSpPr txBox="1"/>
           <p:nvPr/>
         </p:nvSpPr>
         <p:spPr>
           <a:xfrm>
-            <a:off x="6446520" y="3127248"/>
-            <a:ext cx="2148840" cy="731520"/>
+            <a:off x="2724912" y="1243584"/>
+            <a:ext cx="1783080" cy="457200"/>
           </a:xfrm>
           <a:prstGeom prst="rect">
             <a:avLst/>
@@ -10911,20 +10583,146 @@
           </a:bodyPr>
           <a:lstStyle/>
           <a:p>
-            <a:pPr algn="ctr">
+            <a:pPr algn="l">
               <a:lnSpc>
-                <a:spcPct val="95000"/>
+                <a:spcPct val="90000"/>
               </a:lnSpc>
             </a:pPr>
             <a:r>
-              <a:rPr sz="850" b="0" i="0">
-                <a:solidFill>
-                  <a:srgbClr val="17375D"/>
+              <a:rPr sz="980" b="1" i="0">
+                <a:solidFill>
+                  <a:srgbClr val="3366CC"/>
                 </a:solidFill>
                 <a:latin typeface="Calibri"/>
               </a:rPr>
-              <a:t>Escanea para ver la bibliografía, el pipeline y la documentación</a:t>
-            </a:r>
+              <a:t>Tareas realizadas</a:t>
+            </a:r>
+          </a:p>
+        </p:txBody>
+      </p:sp>
+      <p:sp>
+        <p:nvSpPr>
+          <p:cNvPr id="8" name="TextBox 7"/>
+          <p:cNvSpPr txBox="1"/>
+          <p:nvPr/>
+        </p:nvSpPr>
+        <p:spPr>
+          <a:xfrm>
+            <a:off x="2724912" y="1755648"/>
+            <a:ext cx="1737360" cy="1920240"/>
+          </a:xfrm>
+          <a:prstGeom prst="rect">
+            <a:avLst/>
+          </a:prstGeom>
+          <a:noFill/>
+        </p:spPr>
+        <p:txBody>
+          <a:bodyPr wrap="square" lIns="0" rIns="0" tIns="0" bIns="0">
+            <a:spAutoFit/>
+          </a:bodyPr>
+          <a:lstStyle/>
+          <a:p>
+            <a:pPr>
+              <a:lnSpc>
+                <a:spcPct val="96000"/>
+              </a:lnSpc>
+              <a:spcAft>
+                <a:spcPts val="500"/>
+              </a:spcAft>
+            </a:pPr>
+            <a:r>
+              <a:rPr sz="780">
+                <a:solidFill>
+                  <a:srgbClr val="52514E"/>
+                </a:solidFill>
+                <a:latin typeface="Calibri"/>
+              </a:rPr>
+              <a:t>• Brecha medida: mapa SINCA, estaciones por región y cobertura por contaminante</a:t>
+            </a:r>
+          </a:p>
+          <a:p>
+            <a:pPr>
+              <a:lnSpc>
+                <a:spcPct val="96000"/>
+              </a:lnSpc>
+              <a:spcAft>
+                <a:spcPts val="500"/>
+              </a:spcAft>
+            </a:pPr>
+            <a:r>
+              <a:rPr sz="780">
+                <a:solidFill>
+                  <a:srgbClr val="52514E"/>
+                </a:solidFill>
+                <a:latin typeface="Calibri"/>
+              </a:rPr>
+              <a:t>• Tabla de trabajos chilenos con DOI verificado</a:t>
+            </a:r>
+          </a:p>
+          <a:p>
+            <a:pPr>
+              <a:lnSpc>
+                <a:spcPct val="96000"/>
+              </a:lnSpc>
+              <a:spcAft>
+                <a:spcPts val="500"/>
+              </a:spcAft>
+            </a:pPr>
+            <a:r>
+              <a:rPr sz="780">
+                <a:solidFill>
+                  <a:srgbClr val="52514E"/>
+                </a:solidFill>
+                <a:latin typeface="Calibri"/>
+              </a:rPr>
+              <a:t>• Hipótesis y problema predictivo definidos</a:t>
+            </a:r>
+          </a:p>
+        </p:txBody>
+      </p:sp>
+      <p:sp>
+        <p:nvSpPr>
+          <p:cNvPr id="9" name="Rounded Rectangle 8"/>
+          <p:cNvSpPr/>
+          <p:nvPr/>
+        </p:nvSpPr>
+        <p:spPr>
+          <a:xfrm>
+            <a:off x="4700016" y="1115568"/>
+            <a:ext cx="2011680" cy="2615184"/>
+          </a:xfrm>
+          <a:prstGeom prst="roundRect">
+            <a:avLst>
+              <a:gd name="adj" fmla="val 10000"/>
+            </a:avLst>
+          </a:prstGeom>
+          <a:solidFill>
+            <a:srgbClr val="F2F6FC"/>
+          </a:solidFill>
+          <a:ln>
+            <a:noFill/>
+          </a:ln>
+          <a:effectLst/>
+        </p:spPr>
+        <p:style>
+          <a:lnRef idx="1">
+            <a:schemeClr val="accent1"/>
+          </a:lnRef>
+          <a:fillRef idx="3">
+            <a:schemeClr val="accent1"/>
+          </a:fillRef>
+          <a:effectRef idx="2">
+            <a:schemeClr val="accent1"/>
+          </a:effectRef>
+          <a:fontRef idx="minor">
+            <a:schemeClr val="lt1"/>
+          </a:fontRef>
+        </p:style>
+        <p:txBody>
+          <a:bodyPr rtlCol="0" anchor="ctr"/>
+          <a:lstStyle/>
+          <a:p>
+            <a:pPr algn="ctr"/>
           </a:p>
         </p:txBody>
       </p:sp>
@@ -10936,8 +10734,8 @@
         </p:nvSpPr>
         <p:spPr>
           <a:xfrm>
-            <a:off x="502920" y="4389120"/>
-            <a:ext cx="8138160" cy="274320"/>
+            <a:off x="4846320" y="1243584"/>
+            <a:ext cx="1783080" cy="457200"/>
           </a:xfrm>
           <a:prstGeom prst="rect">
             <a:avLst/>
@@ -10950,15 +10748,264 @@
           </a:bodyPr>
           <a:lstStyle/>
           <a:p>
-            <a:pPr algn="l"/>
-            <a:r>
-              <a:rPr sz="1000" b="0" i="0">
-                <a:solidFill>
-                  <a:srgbClr val="CDE2FB"/>
+            <a:pPr algn="l">
+              <a:lnSpc>
+                <a:spcPct val="90000"/>
+              </a:lnSpc>
+            </a:pPr>
+            <a:r>
+              <a:rPr sz="980" b="1" i="0">
+                <a:solidFill>
+                  <a:srgbClr val="B24E1C"/>
                 </a:solidFill>
                 <a:latin typeface="Calibri"/>
               </a:rPr>
-              <a:t>Equipo 2: José J. Romero · Roberto I. Ávila · Amaru S. Agüero · Esteban A. González          ¡Gracias!</a:t>
+              <a:t>Desafíos</a:t>
+            </a:r>
+          </a:p>
+        </p:txBody>
+      </p:sp>
+      <p:sp>
+        <p:nvSpPr>
+          <p:cNvPr id="11" name="TextBox 10"/>
+          <p:cNvSpPr txBox="1"/>
+          <p:nvPr/>
+        </p:nvSpPr>
+        <p:spPr>
+          <a:xfrm>
+            <a:off x="4846320" y="1755648"/>
+            <a:ext cx="1737360" cy="1920240"/>
+          </a:xfrm>
+          <a:prstGeom prst="rect">
+            <a:avLst/>
+          </a:prstGeom>
+          <a:noFill/>
+        </p:spPr>
+        <p:txBody>
+          <a:bodyPr wrap="square" lIns="0" rIns="0" tIns="0" bIns="0">
+            <a:spAutoFit/>
+          </a:bodyPr>
+          <a:lstStyle/>
+          <a:p>
+            <a:pPr>
+              <a:lnSpc>
+                <a:spcPct val="96000"/>
+              </a:lnSpc>
+              <a:spcAft>
+                <a:spcPts val="500"/>
+              </a:spcAft>
+            </a:pPr>
+            <a:r>
+              <a:rPr sz="780">
+                <a:solidFill>
+                  <a:srgbClr val="52514E"/>
+                </a:solidFill>
+                <a:latin typeface="Calibri"/>
+              </a:rPr>
+              <a:t>• La literatura chilena es de pronóstico temporal, no de superficies</a:t>
+            </a:r>
+          </a:p>
+          <a:p>
+            <a:pPr>
+              <a:lnSpc>
+                <a:spcPct val="96000"/>
+              </a:lnSpc>
+              <a:spcAft>
+                <a:spcPts val="500"/>
+              </a:spcAft>
+            </a:pPr>
+            <a:r>
+              <a:rPr sz="780">
+                <a:solidFill>
+                  <a:srgbClr val="52514E"/>
+                </a:solidFill>
+                <a:latin typeface="Calibri"/>
+              </a:rPr>
+              <a:t>• Métricas no comparables entre estudios</a:t>
+            </a:r>
+          </a:p>
+          <a:p>
+            <a:pPr>
+              <a:lnSpc>
+                <a:spcPct val="96000"/>
+              </a:lnSpc>
+              <a:spcAft>
+                <a:spcPts val="500"/>
+              </a:spcAft>
+            </a:pPr>
+            <a:r>
+              <a:rPr sz="780">
+                <a:solidFill>
+                  <a:srgbClr val="52514E"/>
+                </a:solidFill>
+                <a:latin typeface="Calibri"/>
+              </a:rPr>
+              <a:t>• Definir escenarios de validación honestos</a:t>
+            </a:r>
+          </a:p>
+        </p:txBody>
+      </p:sp>
+      <p:sp>
+        <p:nvSpPr>
+          <p:cNvPr id="12" name="Rounded Rectangle 11"/>
+          <p:cNvSpPr/>
+          <p:nvPr/>
+        </p:nvSpPr>
+        <p:spPr>
+          <a:xfrm>
+            <a:off x="6821423" y="1115568"/>
+            <a:ext cx="2011680" cy="2615184"/>
+          </a:xfrm>
+          <a:prstGeom prst="roundRect">
+            <a:avLst>
+              <a:gd name="adj" fmla="val 10000"/>
+            </a:avLst>
+          </a:prstGeom>
+          <a:solidFill>
+            <a:srgbClr val="F2F6FC"/>
+          </a:solidFill>
+          <a:ln>
+            <a:noFill/>
+          </a:ln>
+          <a:effectLst/>
+        </p:spPr>
+        <p:style>
+          <a:lnRef idx="1">
+            <a:schemeClr val="accent1"/>
+          </a:lnRef>
+          <a:fillRef idx="3">
+            <a:schemeClr val="accent1"/>
+          </a:fillRef>
+          <a:effectRef idx="2">
+            <a:schemeClr val="accent1"/>
+          </a:effectRef>
+          <a:fontRef idx="minor">
+            <a:schemeClr val="lt1"/>
+          </a:fontRef>
+        </p:style>
+        <p:txBody>
+          <a:bodyPr rtlCol="0" anchor="ctr"/>
+          <a:lstStyle/>
+          <a:p>
+            <a:pPr algn="ctr"/>
+          </a:p>
+        </p:txBody>
+      </p:sp>
+      <p:sp>
+        <p:nvSpPr>
+          <p:cNvPr id="13" name="TextBox 12"/>
+          <p:cNvSpPr txBox="1"/>
+          <p:nvPr/>
+        </p:nvSpPr>
+        <p:spPr>
+          <a:xfrm>
+            <a:off x="6967727" y="1243584"/>
+            <a:ext cx="1783080" cy="457200"/>
+          </a:xfrm>
+          <a:prstGeom prst="rect">
+            <a:avLst/>
+          </a:prstGeom>
+          <a:noFill/>
+        </p:spPr>
+        <p:txBody>
+          <a:bodyPr wrap="square" anchor="t" lIns="0" rIns="0" tIns="0" bIns="0">
+            <a:spAutoFit/>
+          </a:bodyPr>
+          <a:lstStyle/>
+          <a:p>
+            <a:pPr algn="l">
+              <a:lnSpc>
+                <a:spcPct val="90000"/>
+              </a:lnSpc>
+            </a:pPr>
+            <a:r>
+              <a:rPr sz="980" b="1" i="0">
+                <a:solidFill>
+                  <a:srgbClr val="0F7D57"/>
+                </a:solidFill>
+                <a:latin typeface="Calibri"/>
+              </a:rPr>
+              <a:t>Próxima semana</a:t>
+            </a:r>
+          </a:p>
+        </p:txBody>
+      </p:sp>
+      <p:sp>
+        <p:nvSpPr>
+          <p:cNvPr id="14" name="TextBox 13"/>
+          <p:cNvSpPr txBox="1"/>
+          <p:nvPr/>
+        </p:nvSpPr>
+        <p:spPr>
+          <a:xfrm>
+            <a:off x="6967727" y="1755648"/>
+            <a:ext cx="1737360" cy="1920240"/>
+          </a:xfrm>
+          <a:prstGeom prst="rect">
+            <a:avLst/>
+          </a:prstGeom>
+          <a:noFill/>
+        </p:spPr>
+        <p:txBody>
+          <a:bodyPr wrap="square" lIns="0" rIns="0" tIns="0" bIns="0">
+            <a:spAutoFit/>
+          </a:bodyPr>
+          <a:lstStyle/>
+          <a:p>
+            <a:pPr>
+              <a:lnSpc>
+                <a:spcPct val="96000"/>
+              </a:lnSpc>
+              <a:spcAft>
+                <a:spcPts val="500"/>
+              </a:spcAft>
+            </a:pPr>
+            <a:r>
+              <a:rPr sz="780">
+                <a:solidFill>
+                  <a:srgbClr val="52514E"/>
+                </a:solidFill>
+                <a:latin typeface="Calibri"/>
+              </a:rPr>
+              <a:t>• Defensa de tema (semana 4): documento de una plana</a:t>
+            </a:r>
+          </a:p>
+          <a:p>
+            <a:pPr>
+              <a:lnSpc>
+                <a:spcPct val="96000"/>
+              </a:lnSpc>
+              <a:spcAft>
+                <a:spcPts val="500"/>
+              </a:spcAft>
+            </a:pPr>
+            <a:r>
+              <a:rPr sz="780">
+                <a:solidFill>
+                  <a:srgbClr val="52514E"/>
+                </a:solidFill>
+                <a:latin typeface="Calibri"/>
+              </a:rPr>
+              <a:t>• Congelar el diseño metodológico</a:t>
+            </a:r>
+          </a:p>
+          <a:p>
+            <a:pPr>
+              <a:lnSpc>
+                <a:spcPct val="96000"/>
+              </a:lnSpc>
+              <a:spcAft>
+                <a:spcPts val="500"/>
+              </a:spcAft>
+            </a:pPr>
+            <a:r>
+              <a:rPr sz="780">
+                <a:solidFill>
+                  <a:srgbClr val="52514E"/>
+                </a:solidFill>
+                <a:latin typeface="Calibri"/>
+              </a:rPr>
+              <a:t>• Iniciar los paneles de modelamiento</a:t>
             </a:r>
           </a:p>
         </p:txBody>
@@ -10966,7 +11013,7 @@
     </p:spTree>
     <p:extLst>
       <p:ext uri="{BB962C8B-B14F-4D97-AF65-F5344CB8AC3E}">
-        <p14:creationId xmlns:p14="http://schemas.microsoft.com/office/powerpoint/2010/main" val="785384284"/>
+        <p14:creationId xmlns:p14="http://schemas.microsoft.com/office/powerpoint/2010/main" val="3227572768"/>
       </p:ext>
     </p:extLst>
   </p:cSld>
